--- a/03-课件PPT/讲次版/第2章-2-讲次 2-2 · Tool Registry 设计.pptx
+++ b/03-课件PPT/讲次版/第2章-2-讲次 2-2 · Tool Registry 设计.pptx
@@ -6193,14 +6193,1128 @@
       </p:sp>
       <p:sp>
         <p:nvSpPr>
-          <p:cNvPr id="5" name="TextBox 4"/>
+          <p:cNvPr id="5" name="Rectangle 4"/>
+          <p:cNvSpPr/>
+          <p:nvPr/>
+        </p:nvSpPr>
+        <p:spPr>
+          <a:xfrm>
+            <a:off x="1619250" y="3314700"/>
+            <a:ext cx="8953500" cy="38100"/>
+          </a:xfrm>
+          <a:prstGeom prst="rect">
+            <a:avLst/>
+          </a:prstGeom>
+          <a:solidFill>
+            <a:srgbClr val="DDE5EE"/>
+          </a:solidFill>
+          <a:ln>
+            <a:noFill/>
+          </a:ln>
+          <a:effectLst/>
+        </p:spPr>
+        <p:style>
+          <a:lnRef idx="1">
+            <a:schemeClr val="accent1"/>
+          </a:lnRef>
+          <a:fillRef idx="3">
+            <a:schemeClr val="accent1"/>
+          </a:fillRef>
+          <a:effectRef idx="2">
+            <a:schemeClr val="accent1"/>
+          </a:effectRef>
+          <a:fontRef idx="minor">
+            <a:schemeClr val="lt1"/>
+          </a:fontRef>
+        </p:style>
+        <p:txBody>
+          <a:bodyPr rtlCol="0" anchor="ctr"/>
+          <a:lstStyle/>
+          <a:p>
+            <a:pPr algn="ctr"/>
+          </a:p>
+        </p:txBody>
+      </p:sp>
+      <p:sp>
+        <p:nvSpPr>
+          <p:cNvPr id="6" name="Rounded Rectangle 5"/>
+          <p:cNvSpPr/>
+          <p:nvPr/>
+        </p:nvSpPr>
+        <p:spPr>
+          <a:xfrm>
+            <a:off x="1514475" y="3228975"/>
+            <a:ext cx="209550" cy="209550"/>
+          </a:xfrm>
+          <a:prstGeom prst="roundRect">
+            <a:avLst>
+              <a:gd name="adj" fmla="val 8000"/>
+            </a:avLst>
+          </a:prstGeom>
+          <a:solidFill>
+            <a:srgbClr val="2563EB"/>
+          </a:solidFill>
+          <a:ln>
+            <a:noFill/>
+          </a:ln>
+          <a:effectLst/>
+        </p:spPr>
+        <p:style>
+          <a:lnRef idx="1">
+            <a:schemeClr val="accent1"/>
+          </a:lnRef>
+          <a:fillRef idx="3">
+            <a:schemeClr val="accent1"/>
+          </a:fillRef>
+          <a:effectRef idx="2">
+            <a:schemeClr val="accent1"/>
+          </a:effectRef>
+          <a:fontRef idx="minor">
+            <a:schemeClr val="lt1"/>
+          </a:fontRef>
+        </p:style>
+        <p:txBody>
+          <a:bodyPr rtlCol="0" anchor="ctr"/>
+          <a:lstStyle/>
+          <a:p>
+            <a:pPr algn="ctr"/>
+          </a:p>
+        </p:txBody>
+      </p:sp>
+      <p:sp>
+        <p:nvSpPr>
+          <p:cNvPr id="7" name="Rounded Rectangle 6"/>
+          <p:cNvSpPr/>
+          <p:nvPr/>
+        </p:nvSpPr>
+        <p:spPr>
+          <a:xfrm>
+            <a:off x="190500" y="1905000"/>
+            <a:ext cx="2857500" cy="1123950"/>
+          </a:xfrm>
+          <a:prstGeom prst="roundRect">
+            <a:avLst>
+              <a:gd name="adj" fmla="val 8000"/>
+            </a:avLst>
+          </a:prstGeom>
+          <a:solidFill>
+            <a:srgbClr val="F1F5F9"/>
+          </a:solidFill>
+          <a:ln>
+            <a:noFill/>
+          </a:ln>
+          <a:effectLst/>
+        </p:spPr>
+        <p:style>
+          <a:lnRef idx="1">
+            <a:schemeClr val="accent1"/>
+          </a:lnRef>
+          <a:fillRef idx="3">
+            <a:schemeClr val="accent1"/>
+          </a:fillRef>
+          <a:effectRef idx="2">
+            <a:schemeClr val="accent1"/>
+          </a:effectRef>
+          <a:fontRef idx="minor">
+            <a:schemeClr val="lt1"/>
+          </a:fontRef>
+        </p:style>
+        <p:txBody>
+          <a:bodyPr rtlCol="0" anchor="ctr"/>
+          <a:lstStyle/>
+          <a:p>
+            <a:pPr algn="ctr"/>
+          </a:p>
+        </p:txBody>
+      </p:sp>
+      <p:sp>
+        <p:nvSpPr>
+          <p:cNvPr id="8" name="Rectangle 7"/>
+          <p:cNvSpPr/>
+          <p:nvPr/>
+        </p:nvSpPr>
+        <p:spPr>
+          <a:xfrm>
+            <a:off x="190500" y="1905000"/>
+            <a:ext cx="2857500" cy="38100"/>
+          </a:xfrm>
+          <a:prstGeom prst="rect">
+            <a:avLst/>
+          </a:prstGeom>
+          <a:solidFill>
+            <a:srgbClr val="2563EB"/>
+          </a:solidFill>
+          <a:ln>
+            <a:noFill/>
+          </a:ln>
+          <a:effectLst/>
+        </p:spPr>
+        <p:style>
+          <a:lnRef idx="1">
+            <a:schemeClr val="accent1"/>
+          </a:lnRef>
+          <a:fillRef idx="3">
+            <a:schemeClr val="accent1"/>
+          </a:fillRef>
+          <a:effectRef idx="2">
+            <a:schemeClr val="accent1"/>
+          </a:effectRef>
+          <a:fontRef idx="minor">
+            <a:schemeClr val="lt1"/>
+          </a:fontRef>
+        </p:style>
+        <p:txBody>
+          <a:bodyPr rtlCol="0" anchor="ctr"/>
+          <a:lstStyle/>
+          <a:p>
+            <a:pPr algn="ctr"/>
+          </a:p>
+        </p:txBody>
+      </p:sp>
+      <p:sp>
+        <p:nvSpPr>
+          <p:cNvPr id="9" name="TextBox 8"/>
           <p:cNvSpPr txBox="1"/>
           <p:nvPr/>
         </p:nvSpPr>
         <p:spPr>
           <a:xfrm>
-            <a:off x="9334500" y="0"/>
-            <a:ext cx="2667000" cy="704850"/>
+            <a:off x="285750" y="2000250"/>
+            <a:ext cx="2667000" cy="285750"/>
+          </a:xfrm>
+          <a:prstGeom prst="rect">
+            <a:avLst/>
+          </a:prstGeom>
+          <a:noFill/>
+        </p:spPr>
+        <p:txBody>
+          <a:bodyPr wrap="square" anchor="ctr">
+            <a:spAutoFit/>
+          </a:bodyPr>
+          <a:lstStyle/>
+          <a:p>
+            <a:pPr algn="ctr">
+              <a:lnSpc>
+                <a:spcPct val="100000"/>
+              </a:lnSpc>
+            </a:pPr>
+            <a:r>
+              <a:rPr sz="1400" b="1">
+                <a:solidFill>
+                  <a:srgbClr val="2563EB"/>
+                </a:solidFill>
+                <a:latin typeface="PingFang SC"/>
+              </a:rPr>
+              <a:t>注册</a:t>
+            </a:r>
+          </a:p>
+        </p:txBody>
+      </p:sp>
+      <p:sp>
+        <p:nvSpPr>
+          <p:cNvPr id="10" name="TextBox 9"/>
+          <p:cNvSpPr txBox="1"/>
+          <p:nvPr/>
+        </p:nvSpPr>
+        <p:spPr>
+          <a:xfrm>
+            <a:off x="285750" y="2305050"/>
+            <a:ext cx="2667000" cy="666750"/>
+          </a:xfrm>
+          <a:prstGeom prst="rect">
+            <a:avLst/>
+          </a:prstGeom>
+          <a:noFill/>
+        </p:spPr>
+        <p:txBody>
+          <a:bodyPr wrap="square" anchor="ctr">
+            <a:spAutoFit/>
+          </a:bodyPr>
+          <a:lstStyle/>
+          <a:p>
+            <a:pPr algn="l">
+              <a:lnSpc>
+                <a:spcPct val="105000"/>
+              </a:lnSpc>
+            </a:pPr>
+            <a:r>
+              <a:rPr sz="1050" b="0">
+                <a:solidFill>
+                  <a:srgbClr val="475569"/>
+                </a:solidFill>
+                <a:latin typeface="PingFang SC"/>
+              </a:rPr>
+              <a:t>Schema+实现绑定</a:t>
+            </a:r>
+          </a:p>
+        </p:txBody>
+      </p:sp>
+      <p:sp>
+        <p:nvSpPr>
+          <p:cNvPr id="11" name="Rounded Rectangle 10"/>
+          <p:cNvSpPr/>
+          <p:nvPr/>
+        </p:nvSpPr>
+        <p:spPr>
+          <a:xfrm>
+            <a:off x="3752850" y="3228975"/>
+            <a:ext cx="209550" cy="209550"/>
+          </a:xfrm>
+          <a:prstGeom prst="roundRect">
+            <a:avLst>
+              <a:gd name="adj" fmla="val 8000"/>
+            </a:avLst>
+          </a:prstGeom>
+          <a:solidFill>
+            <a:srgbClr val="14B8A6"/>
+          </a:solidFill>
+          <a:ln>
+            <a:noFill/>
+          </a:ln>
+          <a:effectLst/>
+        </p:spPr>
+        <p:style>
+          <a:lnRef idx="1">
+            <a:schemeClr val="accent1"/>
+          </a:lnRef>
+          <a:fillRef idx="3">
+            <a:schemeClr val="accent1"/>
+          </a:fillRef>
+          <a:effectRef idx="2">
+            <a:schemeClr val="accent1"/>
+          </a:effectRef>
+          <a:fontRef idx="minor">
+            <a:schemeClr val="lt1"/>
+          </a:fontRef>
+        </p:style>
+        <p:txBody>
+          <a:bodyPr rtlCol="0" anchor="ctr"/>
+          <a:lstStyle/>
+          <a:p>
+            <a:pPr algn="ctr"/>
+          </a:p>
+        </p:txBody>
+      </p:sp>
+      <p:sp>
+        <p:nvSpPr>
+          <p:cNvPr id="12" name="Rounded Rectangle 11"/>
+          <p:cNvSpPr/>
+          <p:nvPr/>
+        </p:nvSpPr>
+        <p:spPr>
+          <a:xfrm>
+            <a:off x="2428875" y="3619500"/>
+            <a:ext cx="2857500" cy="1123950"/>
+          </a:xfrm>
+          <a:prstGeom prst="roundRect">
+            <a:avLst>
+              <a:gd name="adj" fmla="val 8000"/>
+            </a:avLst>
+          </a:prstGeom>
+          <a:solidFill>
+            <a:srgbClr val="F1F5F9"/>
+          </a:solidFill>
+          <a:ln>
+            <a:noFill/>
+          </a:ln>
+          <a:effectLst/>
+        </p:spPr>
+        <p:style>
+          <a:lnRef idx="1">
+            <a:schemeClr val="accent1"/>
+          </a:lnRef>
+          <a:fillRef idx="3">
+            <a:schemeClr val="accent1"/>
+          </a:fillRef>
+          <a:effectRef idx="2">
+            <a:schemeClr val="accent1"/>
+          </a:effectRef>
+          <a:fontRef idx="minor">
+            <a:schemeClr val="lt1"/>
+          </a:fontRef>
+        </p:style>
+        <p:txBody>
+          <a:bodyPr rtlCol="0" anchor="ctr"/>
+          <a:lstStyle/>
+          <a:p>
+            <a:pPr algn="ctr"/>
+          </a:p>
+        </p:txBody>
+      </p:sp>
+      <p:sp>
+        <p:nvSpPr>
+          <p:cNvPr id="13" name="Rectangle 12"/>
+          <p:cNvSpPr/>
+          <p:nvPr/>
+        </p:nvSpPr>
+        <p:spPr>
+          <a:xfrm>
+            <a:off x="2428875" y="3619500"/>
+            <a:ext cx="2857500" cy="38100"/>
+          </a:xfrm>
+          <a:prstGeom prst="rect">
+            <a:avLst/>
+          </a:prstGeom>
+          <a:solidFill>
+            <a:srgbClr val="14B8A6"/>
+          </a:solidFill>
+          <a:ln>
+            <a:noFill/>
+          </a:ln>
+          <a:effectLst/>
+        </p:spPr>
+        <p:style>
+          <a:lnRef idx="1">
+            <a:schemeClr val="accent1"/>
+          </a:lnRef>
+          <a:fillRef idx="3">
+            <a:schemeClr val="accent1"/>
+          </a:fillRef>
+          <a:effectRef idx="2">
+            <a:schemeClr val="accent1"/>
+          </a:effectRef>
+          <a:fontRef idx="minor">
+            <a:schemeClr val="lt1"/>
+          </a:fontRef>
+        </p:style>
+        <p:txBody>
+          <a:bodyPr rtlCol="0" anchor="ctr"/>
+          <a:lstStyle/>
+          <a:p>
+            <a:pPr algn="ctr"/>
+          </a:p>
+        </p:txBody>
+      </p:sp>
+      <p:sp>
+        <p:nvSpPr>
+          <p:cNvPr id="14" name="TextBox 13"/>
+          <p:cNvSpPr txBox="1"/>
+          <p:nvPr/>
+        </p:nvSpPr>
+        <p:spPr>
+          <a:xfrm>
+            <a:off x="2524125" y="3714750"/>
+            <a:ext cx="2667000" cy="285750"/>
+          </a:xfrm>
+          <a:prstGeom prst="rect">
+            <a:avLst/>
+          </a:prstGeom>
+          <a:noFill/>
+        </p:spPr>
+        <p:txBody>
+          <a:bodyPr wrap="square" anchor="ctr">
+            <a:spAutoFit/>
+          </a:bodyPr>
+          <a:lstStyle/>
+          <a:p>
+            <a:pPr algn="ctr">
+              <a:lnSpc>
+                <a:spcPct val="100000"/>
+              </a:lnSpc>
+            </a:pPr>
+            <a:r>
+              <a:rPr sz="1400" b="1">
+                <a:solidFill>
+                  <a:srgbClr val="14B8A6"/>
+                </a:solidFill>
+                <a:latin typeface="PingFang SC"/>
+              </a:rPr>
+              <a:t>上架</a:t>
+            </a:r>
+          </a:p>
+        </p:txBody>
+      </p:sp>
+      <p:sp>
+        <p:nvSpPr>
+          <p:cNvPr id="15" name="TextBox 14"/>
+          <p:cNvSpPr txBox="1"/>
+          <p:nvPr/>
+        </p:nvSpPr>
+        <p:spPr>
+          <a:xfrm>
+            <a:off x="2524125" y="4019550"/>
+            <a:ext cx="2667000" cy="666750"/>
+          </a:xfrm>
+          <a:prstGeom prst="rect">
+            <a:avLst/>
+          </a:prstGeom>
+          <a:noFill/>
+        </p:spPr>
+        <p:txBody>
+          <a:bodyPr wrap="square" anchor="ctr">
+            <a:spAutoFit/>
+          </a:bodyPr>
+          <a:lstStyle/>
+          <a:p>
+            <a:pPr algn="l">
+              <a:lnSpc>
+                <a:spcPct val="105000"/>
+              </a:lnSpc>
+            </a:pPr>
+            <a:r>
+              <a:rPr sz="1050" b="0">
+                <a:solidFill>
+                  <a:srgbClr val="475569"/>
+                </a:solidFill>
+                <a:latin typeface="PingFang SC"/>
+              </a:rPr>
+              <a:t>审批+文档</a:t>
+            </a:r>
+          </a:p>
+        </p:txBody>
+      </p:sp>
+      <p:sp>
+        <p:nvSpPr>
+          <p:cNvPr id="16" name="Rounded Rectangle 15"/>
+          <p:cNvSpPr/>
+          <p:nvPr/>
+        </p:nvSpPr>
+        <p:spPr>
+          <a:xfrm>
+            <a:off x="5991225" y="3228975"/>
+            <a:ext cx="209550" cy="209550"/>
+          </a:xfrm>
+          <a:prstGeom prst="roundRect">
+            <a:avLst>
+              <a:gd name="adj" fmla="val 8000"/>
+            </a:avLst>
+          </a:prstGeom>
+          <a:solidFill>
+            <a:srgbClr val="8B5CF6"/>
+          </a:solidFill>
+          <a:ln>
+            <a:noFill/>
+          </a:ln>
+          <a:effectLst/>
+        </p:spPr>
+        <p:style>
+          <a:lnRef idx="1">
+            <a:schemeClr val="accent1"/>
+          </a:lnRef>
+          <a:fillRef idx="3">
+            <a:schemeClr val="accent1"/>
+          </a:fillRef>
+          <a:effectRef idx="2">
+            <a:schemeClr val="accent1"/>
+          </a:effectRef>
+          <a:fontRef idx="minor">
+            <a:schemeClr val="lt1"/>
+          </a:fontRef>
+        </p:style>
+        <p:txBody>
+          <a:bodyPr rtlCol="0" anchor="ctr"/>
+          <a:lstStyle/>
+          <a:p>
+            <a:pPr algn="ctr"/>
+          </a:p>
+        </p:txBody>
+      </p:sp>
+      <p:sp>
+        <p:nvSpPr>
+          <p:cNvPr id="17" name="Rounded Rectangle 16"/>
+          <p:cNvSpPr/>
+          <p:nvPr/>
+        </p:nvSpPr>
+        <p:spPr>
+          <a:xfrm>
+            <a:off x="4667250" y="1905000"/>
+            <a:ext cx="2857500" cy="1123950"/>
+          </a:xfrm>
+          <a:prstGeom prst="roundRect">
+            <a:avLst>
+              <a:gd name="adj" fmla="val 8000"/>
+            </a:avLst>
+          </a:prstGeom>
+          <a:solidFill>
+            <a:srgbClr val="F1F5F9"/>
+          </a:solidFill>
+          <a:ln>
+            <a:noFill/>
+          </a:ln>
+          <a:effectLst/>
+        </p:spPr>
+        <p:style>
+          <a:lnRef idx="1">
+            <a:schemeClr val="accent1"/>
+          </a:lnRef>
+          <a:fillRef idx="3">
+            <a:schemeClr val="accent1"/>
+          </a:fillRef>
+          <a:effectRef idx="2">
+            <a:schemeClr val="accent1"/>
+          </a:effectRef>
+          <a:fontRef idx="minor">
+            <a:schemeClr val="lt1"/>
+          </a:fontRef>
+        </p:style>
+        <p:txBody>
+          <a:bodyPr rtlCol="0" anchor="ctr"/>
+          <a:lstStyle/>
+          <a:p>
+            <a:pPr algn="ctr"/>
+          </a:p>
+        </p:txBody>
+      </p:sp>
+      <p:sp>
+        <p:nvSpPr>
+          <p:cNvPr id="18" name="Rectangle 17"/>
+          <p:cNvSpPr/>
+          <p:nvPr/>
+        </p:nvSpPr>
+        <p:spPr>
+          <a:xfrm>
+            <a:off x="4667250" y="1905000"/>
+            <a:ext cx="2857500" cy="38100"/>
+          </a:xfrm>
+          <a:prstGeom prst="rect">
+            <a:avLst/>
+          </a:prstGeom>
+          <a:solidFill>
+            <a:srgbClr val="8B5CF6"/>
+          </a:solidFill>
+          <a:ln>
+            <a:noFill/>
+          </a:ln>
+          <a:effectLst/>
+        </p:spPr>
+        <p:style>
+          <a:lnRef idx="1">
+            <a:schemeClr val="accent1"/>
+          </a:lnRef>
+          <a:fillRef idx="3">
+            <a:schemeClr val="accent1"/>
+          </a:fillRef>
+          <a:effectRef idx="2">
+            <a:schemeClr val="accent1"/>
+          </a:effectRef>
+          <a:fontRef idx="minor">
+            <a:schemeClr val="lt1"/>
+          </a:fontRef>
+        </p:style>
+        <p:txBody>
+          <a:bodyPr rtlCol="0" anchor="ctr"/>
+          <a:lstStyle/>
+          <a:p>
+            <a:pPr algn="ctr"/>
+          </a:p>
+        </p:txBody>
+      </p:sp>
+      <p:sp>
+        <p:nvSpPr>
+          <p:cNvPr id="19" name="TextBox 18"/>
+          <p:cNvSpPr txBox="1"/>
+          <p:nvPr/>
+        </p:nvSpPr>
+        <p:spPr>
+          <a:xfrm>
+            <a:off x="4762500" y="2000250"/>
+            <a:ext cx="2667000" cy="285750"/>
+          </a:xfrm>
+          <a:prstGeom prst="rect">
+            <a:avLst/>
+          </a:prstGeom>
+          <a:noFill/>
+        </p:spPr>
+        <p:txBody>
+          <a:bodyPr wrap="square" anchor="ctr">
+            <a:spAutoFit/>
+          </a:bodyPr>
+          <a:lstStyle/>
+          <a:p>
+            <a:pPr algn="ctr">
+              <a:lnSpc>
+                <a:spcPct val="100000"/>
+              </a:lnSpc>
+            </a:pPr>
+            <a:r>
+              <a:rPr sz="1400" b="1">
+                <a:solidFill>
+                  <a:srgbClr val="8B5CF6"/>
+                </a:solidFill>
+                <a:latin typeface="PingFang SC"/>
+              </a:rPr>
+              <a:t>灰度</a:t>
+            </a:r>
+          </a:p>
+        </p:txBody>
+      </p:sp>
+      <p:sp>
+        <p:nvSpPr>
+          <p:cNvPr id="20" name="TextBox 19"/>
+          <p:cNvSpPr txBox="1"/>
+          <p:nvPr/>
+        </p:nvSpPr>
+        <p:spPr>
+          <a:xfrm>
+            <a:off x="4762500" y="2305050"/>
+            <a:ext cx="2667000" cy="666750"/>
+          </a:xfrm>
+          <a:prstGeom prst="rect">
+            <a:avLst/>
+          </a:prstGeom>
+          <a:noFill/>
+        </p:spPr>
+        <p:txBody>
+          <a:bodyPr wrap="square" anchor="ctr">
+            <a:spAutoFit/>
+          </a:bodyPr>
+          <a:lstStyle/>
+          <a:p>
+            <a:pPr algn="l">
+              <a:lnSpc>
+                <a:spcPct val="105000"/>
+              </a:lnSpc>
+            </a:pPr>
+            <a:r>
+              <a:rPr sz="1050" b="0">
+                <a:solidFill>
+                  <a:srgbClr val="475569"/>
+                </a:solidFill>
+                <a:latin typeface="PingFang SC"/>
+              </a:rPr>
+              <a:t>10% 流量验证</a:t>
+            </a:r>
+          </a:p>
+        </p:txBody>
+      </p:sp>
+      <p:sp>
+        <p:nvSpPr>
+          <p:cNvPr id="21" name="Rounded Rectangle 20"/>
+          <p:cNvSpPr/>
+          <p:nvPr/>
+        </p:nvSpPr>
+        <p:spPr>
+          <a:xfrm>
+            <a:off x="8229600" y="3228975"/>
+            <a:ext cx="209550" cy="209550"/>
+          </a:xfrm>
+          <a:prstGeom prst="roundRect">
+            <a:avLst>
+              <a:gd name="adj" fmla="val 8000"/>
+            </a:avLst>
+          </a:prstGeom>
+          <a:solidFill>
+            <a:srgbClr val="F59E0B"/>
+          </a:solidFill>
+          <a:ln>
+            <a:noFill/>
+          </a:ln>
+          <a:effectLst/>
+        </p:spPr>
+        <p:style>
+          <a:lnRef idx="1">
+            <a:schemeClr val="accent1"/>
+          </a:lnRef>
+          <a:fillRef idx="3">
+            <a:schemeClr val="accent1"/>
+          </a:fillRef>
+          <a:effectRef idx="2">
+            <a:schemeClr val="accent1"/>
+          </a:effectRef>
+          <a:fontRef idx="minor">
+            <a:schemeClr val="lt1"/>
+          </a:fontRef>
+        </p:style>
+        <p:txBody>
+          <a:bodyPr rtlCol="0" anchor="ctr"/>
+          <a:lstStyle/>
+          <a:p>
+            <a:pPr algn="ctr"/>
+          </a:p>
+        </p:txBody>
+      </p:sp>
+      <p:sp>
+        <p:nvSpPr>
+          <p:cNvPr id="22" name="Rounded Rectangle 21"/>
+          <p:cNvSpPr/>
+          <p:nvPr/>
+        </p:nvSpPr>
+        <p:spPr>
+          <a:xfrm>
+            <a:off x="6905625" y="3619500"/>
+            <a:ext cx="2857500" cy="1123950"/>
+          </a:xfrm>
+          <a:prstGeom prst="roundRect">
+            <a:avLst>
+              <a:gd name="adj" fmla="val 8000"/>
+            </a:avLst>
+          </a:prstGeom>
+          <a:solidFill>
+            <a:srgbClr val="F1F5F9"/>
+          </a:solidFill>
+          <a:ln>
+            <a:noFill/>
+          </a:ln>
+          <a:effectLst/>
+        </p:spPr>
+        <p:style>
+          <a:lnRef idx="1">
+            <a:schemeClr val="accent1"/>
+          </a:lnRef>
+          <a:fillRef idx="3">
+            <a:schemeClr val="accent1"/>
+          </a:fillRef>
+          <a:effectRef idx="2">
+            <a:schemeClr val="accent1"/>
+          </a:effectRef>
+          <a:fontRef idx="minor">
+            <a:schemeClr val="lt1"/>
+          </a:fontRef>
+        </p:style>
+        <p:txBody>
+          <a:bodyPr rtlCol="0" anchor="ctr"/>
+          <a:lstStyle/>
+          <a:p>
+            <a:pPr algn="ctr"/>
+          </a:p>
+        </p:txBody>
+      </p:sp>
+      <p:sp>
+        <p:nvSpPr>
+          <p:cNvPr id="23" name="Rectangle 22"/>
+          <p:cNvSpPr/>
+          <p:nvPr/>
+        </p:nvSpPr>
+        <p:spPr>
+          <a:xfrm>
+            <a:off x="6905625" y="3619500"/>
+            <a:ext cx="2857500" cy="38100"/>
+          </a:xfrm>
+          <a:prstGeom prst="rect">
+            <a:avLst/>
+          </a:prstGeom>
+          <a:solidFill>
+            <a:srgbClr val="F59E0B"/>
+          </a:solidFill>
+          <a:ln>
+            <a:noFill/>
+          </a:ln>
+          <a:effectLst/>
+        </p:spPr>
+        <p:style>
+          <a:lnRef idx="1">
+            <a:schemeClr val="accent1"/>
+          </a:lnRef>
+          <a:fillRef idx="3">
+            <a:schemeClr val="accent1"/>
+          </a:fillRef>
+          <a:effectRef idx="2">
+            <a:schemeClr val="accent1"/>
+          </a:effectRef>
+          <a:fontRef idx="minor">
+            <a:schemeClr val="lt1"/>
+          </a:fontRef>
+        </p:style>
+        <p:txBody>
+          <a:bodyPr rtlCol="0" anchor="ctr"/>
+          <a:lstStyle/>
+          <a:p>
+            <a:pPr algn="ctr"/>
+          </a:p>
+        </p:txBody>
+      </p:sp>
+      <p:sp>
+        <p:nvSpPr>
+          <p:cNvPr id="24" name="TextBox 23"/>
+          <p:cNvSpPr txBox="1"/>
+          <p:nvPr/>
+        </p:nvSpPr>
+        <p:spPr>
+          <a:xfrm>
+            <a:off x="7000875" y="3714750"/>
+            <a:ext cx="2667000" cy="285750"/>
+          </a:xfrm>
+          <a:prstGeom prst="rect">
+            <a:avLst/>
+          </a:prstGeom>
+          <a:noFill/>
+        </p:spPr>
+        <p:txBody>
+          <a:bodyPr wrap="square" anchor="ctr">
+            <a:spAutoFit/>
+          </a:bodyPr>
+          <a:lstStyle/>
+          <a:p>
+            <a:pPr algn="ctr">
+              <a:lnSpc>
+                <a:spcPct val="100000"/>
+              </a:lnSpc>
+            </a:pPr>
+            <a:r>
+              <a:rPr sz="1400" b="1">
+                <a:solidFill>
+                  <a:srgbClr val="F59E0B"/>
+                </a:solidFill>
+                <a:latin typeface="PingFang SC"/>
+              </a:rPr>
+              <a:t>全量</a:t>
+            </a:r>
+          </a:p>
+        </p:txBody>
+      </p:sp>
+      <p:sp>
+        <p:nvSpPr>
+          <p:cNvPr id="25" name="TextBox 24"/>
+          <p:cNvSpPr txBox="1"/>
+          <p:nvPr/>
+        </p:nvSpPr>
+        <p:spPr>
+          <a:xfrm>
+            <a:off x="7000875" y="4019550"/>
+            <a:ext cx="2667000" cy="666750"/>
+          </a:xfrm>
+          <a:prstGeom prst="rect">
+            <a:avLst/>
+          </a:prstGeom>
+          <a:noFill/>
+        </p:spPr>
+        <p:txBody>
+          <a:bodyPr wrap="square" anchor="ctr">
+            <a:spAutoFit/>
+          </a:bodyPr>
+          <a:lstStyle/>
+          <a:p>
+            <a:pPr algn="l">
+              <a:lnSpc>
+                <a:spcPct val="105000"/>
+              </a:lnSpc>
+            </a:pPr>
+            <a:r>
+              <a:rPr sz="1050" b="0">
+                <a:solidFill>
+                  <a:srgbClr val="475569"/>
+                </a:solidFill>
+                <a:latin typeface="PingFang SC"/>
+              </a:rPr>
+              <a:t>健康分达标</a:t>
+            </a:r>
+          </a:p>
+        </p:txBody>
+      </p:sp>
+      <p:sp>
+        <p:nvSpPr>
+          <p:cNvPr id="26" name="Rounded Rectangle 25"/>
+          <p:cNvSpPr/>
+          <p:nvPr/>
+        </p:nvSpPr>
+        <p:spPr>
+          <a:xfrm>
+            <a:off x="10467975" y="3228975"/>
+            <a:ext cx="209550" cy="209550"/>
+          </a:xfrm>
+          <a:prstGeom prst="roundRect">
+            <a:avLst>
+              <a:gd name="adj" fmla="val 8000"/>
+            </a:avLst>
+          </a:prstGeom>
+          <a:solidFill>
+            <a:srgbClr val="34D399"/>
+          </a:solidFill>
+          <a:ln>
+            <a:noFill/>
+          </a:ln>
+          <a:effectLst/>
+        </p:spPr>
+        <p:style>
+          <a:lnRef idx="1">
+            <a:schemeClr val="accent1"/>
+          </a:lnRef>
+          <a:fillRef idx="3">
+            <a:schemeClr val="accent1"/>
+          </a:fillRef>
+          <a:effectRef idx="2">
+            <a:schemeClr val="accent1"/>
+          </a:effectRef>
+          <a:fontRef idx="minor">
+            <a:schemeClr val="lt1"/>
+          </a:fontRef>
+        </p:style>
+        <p:txBody>
+          <a:bodyPr rtlCol="0" anchor="ctr"/>
+          <a:lstStyle/>
+          <a:p>
+            <a:pPr algn="ctr"/>
+          </a:p>
+        </p:txBody>
+      </p:sp>
+      <p:sp>
+        <p:nvSpPr>
+          <p:cNvPr id="27" name="Rounded Rectangle 26"/>
+          <p:cNvSpPr/>
+          <p:nvPr/>
+        </p:nvSpPr>
+        <p:spPr>
+          <a:xfrm>
+            <a:off x="9144000" y="1905000"/>
+            <a:ext cx="2857500" cy="1123950"/>
+          </a:xfrm>
+          <a:prstGeom prst="roundRect">
+            <a:avLst>
+              <a:gd name="adj" fmla="val 8000"/>
+            </a:avLst>
+          </a:prstGeom>
+          <a:solidFill>
+            <a:srgbClr val="F1F5F9"/>
+          </a:solidFill>
+          <a:ln>
+            <a:noFill/>
+          </a:ln>
+          <a:effectLst/>
+        </p:spPr>
+        <p:style>
+          <a:lnRef idx="1">
+            <a:schemeClr val="accent1"/>
+          </a:lnRef>
+          <a:fillRef idx="3">
+            <a:schemeClr val="accent1"/>
+          </a:fillRef>
+          <a:effectRef idx="2">
+            <a:schemeClr val="accent1"/>
+          </a:effectRef>
+          <a:fontRef idx="minor">
+            <a:schemeClr val="lt1"/>
+          </a:fontRef>
+        </p:style>
+        <p:txBody>
+          <a:bodyPr rtlCol="0" anchor="ctr"/>
+          <a:lstStyle/>
+          <a:p>
+            <a:pPr algn="ctr"/>
+          </a:p>
+        </p:txBody>
+      </p:sp>
+      <p:sp>
+        <p:nvSpPr>
+          <p:cNvPr id="28" name="Rectangle 27"/>
+          <p:cNvSpPr/>
+          <p:nvPr/>
+        </p:nvSpPr>
+        <p:spPr>
+          <a:xfrm>
+            <a:off x="9144000" y="1905000"/>
+            <a:ext cx="2857500" cy="38100"/>
+          </a:xfrm>
+          <a:prstGeom prst="rect">
+            <a:avLst/>
+          </a:prstGeom>
+          <a:solidFill>
+            <a:srgbClr val="34D399"/>
+          </a:solidFill>
+          <a:ln>
+            <a:noFill/>
+          </a:ln>
+          <a:effectLst/>
+        </p:spPr>
+        <p:style>
+          <a:lnRef idx="1">
+            <a:schemeClr val="accent1"/>
+          </a:lnRef>
+          <a:fillRef idx="3">
+            <a:schemeClr val="accent1"/>
+          </a:fillRef>
+          <a:effectRef idx="2">
+            <a:schemeClr val="accent1"/>
+          </a:effectRef>
+          <a:fontRef idx="minor">
+            <a:schemeClr val="lt1"/>
+          </a:fontRef>
+        </p:style>
+        <p:txBody>
+          <a:bodyPr rtlCol="0" anchor="ctr"/>
+          <a:lstStyle/>
+          <a:p>
+            <a:pPr algn="ctr"/>
+          </a:p>
+        </p:txBody>
+      </p:sp>
+      <p:sp>
+        <p:nvSpPr>
+          <p:cNvPr id="29" name="TextBox 28"/>
+          <p:cNvSpPr txBox="1"/>
+          <p:nvPr/>
+        </p:nvSpPr>
+        <p:spPr>
+          <a:xfrm>
+            <a:off x="9239250" y="2000250"/>
+            <a:ext cx="2667000" cy="285750"/>
+          </a:xfrm>
+          <a:prstGeom prst="rect">
+            <a:avLst/>
+          </a:prstGeom>
+          <a:noFill/>
+        </p:spPr>
+        <p:txBody>
+          <a:bodyPr wrap="square" anchor="ctr">
+            <a:spAutoFit/>
+          </a:bodyPr>
+          <a:lstStyle/>
+          <a:p>
+            <a:pPr algn="ctr">
+              <a:lnSpc>
+                <a:spcPct val="100000"/>
+              </a:lnSpc>
+            </a:pPr>
+            <a:r>
+              <a:rPr sz="1400" b="1">
+                <a:solidFill>
+                  <a:srgbClr val="34D399"/>
+                </a:solidFill>
+                <a:latin typeface="PingFang SC"/>
+              </a:rPr>
+              <a:t>下线</a:t>
+            </a:r>
+          </a:p>
+        </p:txBody>
+      </p:sp>
+      <p:sp>
+        <p:nvSpPr>
+          <p:cNvPr id="30" name="TextBox 29"/>
+          <p:cNvSpPr txBox="1"/>
+          <p:nvPr/>
+        </p:nvSpPr>
+        <p:spPr>
+          <a:xfrm>
+            <a:off x="9239250" y="2305050"/>
+            <a:ext cx="2667000" cy="666750"/>
+          </a:xfrm>
+          <a:prstGeom prst="rect">
+            <a:avLst/>
+          </a:prstGeom>
+          <a:noFill/>
+        </p:spPr>
+        <p:txBody>
+          <a:bodyPr wrap="square" anchor="ctr">
+            <a:spAutoFit/>
+          </a:bodyPr>
+          <a:lstStyle/>
+          <a:p>
+            <a:pPr algn="l">
+              <a:lnSpc>
+                <a:spcPct val="105000"/>
+              </a:lnSpc>
+            </a:pPr>
+            <a:r>
+              <a:rPr sz="1050" b="0">
+                <a:solidFill>
+                  <a:srgbClr val="475569"/>
+                </a:solidFill>
+                <a:latin typeface="PingFang SC"/>
+              </a:rPr>
+              <a:t>一键热禁用</a:t>
+            </a:r>
+          </a:p>
+        </p:txBody>
+      </p:sp>
+      <p:sp>
+        <p:nvSpPr>
+          <p:cNvPr id="31" name="TextBox 30"/>
+          <p:cNvSpPr txBox="1"/>
+          <p:nvPr/>
+        </p:nvSpPr>
+        <p:spPr>
+          <a:xfrm>
+            <a:off x="10287000" y="6534150"/>
+            <a:ext cx="1619250" cy="266700"/>
           </a:xfrm>
           <a:prstGeom prst="rect">
             <a:avLst/>
@@ -6219,1159 +7333,6 @@
               </a:lnSpc>
             </a:pPr>
             <a:r>
-              <a:rPr sz="1100" b="0">
-                <a:solidFill>
-                  <a:srgbClr val="94A3B8"/>
-                </a:solidFill>
-                <a:latin typeface="PingFang SC"/>
-              </a:rPr>
-              <a:t>注册:Schema+实现绑定;上架:审批+文档;灰度:10% 流量验证;全量:健康分达标;下线:一键热禁用|平台 disable() 已实现</a:t>
-            </a:r>
-          </a:p>
-        </p:txBody>
-      </p:sp>
-      <p:sp>
-        <p:nvSpPr>
-          <p:cNvPr id="6" name="Rectangle 5"/>
-          <p:cNvSpPr/>
-          <p:nvPr/>
-        </p:nvSpPr>
-        <p:spPr>
-          <a:xfrm>
-            <a:off x="1619250" y="3314700"/>
-            <a:ext cx="8953500" cy="38100"/>
-          </a:xfrm>
-          <a:prstGeom prst="rect">
-            <a:avLst/>
-          </a:prstGeom>
-          <a:solidFill>
-            <a:srgbClr val="DDE5EE"/>
-          </a:solidFill>
-          <a:ln>
-            <a:noFill/>
-          </a:ln>
-          <a:effectLst/>
-        </p:spPr>
-        <p:style>
-          <a:lnRef idx="1">
-            <a:schemeClr val="accent1"/>
-          </a:lnRef>
-          <a:fillRef idx="3">
-            <a:schemeClr val="accent1"/>
-          </a:fillRef>
-          <a:effectRef idx="2">
-            <a:schemeClr val="accent1"/>
-          </a:effectRef>
-          <a:fontRef idx="minor">
-            <a:schemeClr val="lt1"/>
-          </a:fontRef>
-        </p:style>
-        <p:txBody>
-          <a:bodyPr rtlCol="0" anchor="ctr"/>
-          <a:lstStyle/>
-          <a:p>
-            <a:pPr algn="ctr"/>
-          </a:p>
-        </p:txBody>
-      </p:sp>
-      <p:sp>
-        <p:nvSpPr>
-          <p:cNvPr id="7" name="Rounded Rectangle 6"/>
-          <p:cNvSpPr/>
-          <p:nvPr/>
-        </p:nvSpPr>
-        <p:spPr>
-          <a:xfrm>
-            <a:off x="1514475" y="3228975"/>
-            <a:ext cx="209550" cy="209550"/>
-          </a:xfrm>
-          <a:prstGeom prst="roundRect">
-            <a:avLst>
-              <a:gd name="adj" fmla="val 8000"/>
-            </a:avLst>
-          </a:prstGeom>
-          <a:solidFill>
-            <a:srgbClr val="2563EB"/>
-          </a:solidFill>
-          <a:ln>
-            <a:noFill/>
-          </a:ln>
-          <a:effectLst/>
-        </p:spPr>
-        <p:style>
-          <a:lnRef idx="1">
-            <a:schemeClr val="accent1"/>
-          </a:lnRef>
-          <a:fillRef idx="3">
-            <a:schemeClr val="accent1"/>
-          </a:fillRef>
-          <a:effectRef idx="2">
-            <a:schemeClr val="accent1"/>
-          </a:effectRef>
-          <a:fontRef idx="minor">
-            <a:schemeClr val="lt1"/>
-          </a:fontRef>
-        </p:style>
-        <p:txBody>
-          <a:bodyPr rtlCol="0" anchor="ctr"/>
-          <a:lstStyle/>
-          <a:p>
-            <a:pPr algn="ctr"/>
-          </a:p>
-        </p:txBody>
-      </p:sp>
-      <p:sp>
-        <p:nvSpPr>
-          <p:cNvPr id="8" name="Rounded Rectangle 7"/>
-          <p:cNvSpPr/>
-          <p:nvPr/>
-        </p:nvSpPr>
-        <p:spPr>
-          <a:xfrm>
-            <a:off x="190500" y="1905000"/>
-            <a:ext cx="2857500" cy="1123950"/>
-          </a:xfrm>
-          <a:prstGeom prst="roundRect">
-            <a:avLst>
-              <a:gd name="adj" fmla="val 8000"/>
-            </a:avLst>
-          </a:prstGeom>
-          <a:solidFill>
-            <a:srgbClr val="F1F5F9"/>
-          </a:solidFill>
-          <a:ln>
-            <a:noFill/>
-          </a:ln>
-          <a:effectLst/>
-        </p:spPr>
-        <p:style>
-          <a:lnRef idx="1">
-            <a:schemeClr val="accent1"/>
-          </a:lnRef>
-          <a:fillRef idx="3">
-            <a:schemeClr val="accent1"/>
-          </a:fillRef>
-          <a:effectRef idx="2">
-            <a:schemeClr val="accent1"/>
-          </a:effectRef>
-          <a:fontRef idx="minor">
-            <a:schemeClr val="lt1"/>
-          </a:fontRef>
-        </p:style>
-        <p:txBody>
-          <a:bodyPr rtlCol="0" anchor="ctr"/>
-          <a:lstStyle/>
-          <a:p>
-            <a:pPr algn="ctr"/>
-          </a:p>
-        </p:txBody>
-      </p:sp>
-      <p:sp>
-        <p:nvSpPr>
-          <p:cNvPr id="9" name="Rectangle 8"/>
-          <p:cNvSpPr/>
-          <p:nvPr/>
-        </p:nvSpPr>
-        <p:spPr>
-          <a:xfrm>
-            <a:off x="190500" y="1905000"/>
-            <a:ext cx="2857500" cy="38100"/>
-          </a:xfrm>
-          <a:prstGeom prst="rect">
-            <a:avLst/>
-          </a:prstGeom>
-          <a:solidFill>
-            <a:srgbClr val="2563EB"/>
-          </a:solidFill>
-          <a:ln>
-            <a:noFill/>
-          </a:ln>
-          <a:effectLst/>
-        </p:spPr>
-        <p:style>
-          <a:lnRef idx="1">
-            <a:schemeClr val="accent1"/>
-          </a:lnRef>
-          <a:fillRef idx="3">
-            <a:schemeClr val="accent1"/>
-          </a:fillRef>
-          <a:effectRef idx="2">
-            <a:schemeClr val="accent1"/>
-          </a:effectRef>
-          <a:fontRef idx="minor">
-            <a:schemeClr val="lt1"/>
-          </a:fontRef>
-        </p:style>
-        <p:txBody>
-          <a:bodyPr rtlCol="0" anchor="ctr"/>
-          <a:lstStyle/>
-          <a:p>
-            <a:pPr algn="ctr"/>
-          </a:p>
-        </p:txBody>
-      </p:sp>
-      <p:sp>
-        <p:nvSpPr>
-          <p:cNvPr id="10" name="TextBox 9"/>
-          <p:cNvSpPr txBox="1"/>
-          <p:nvPr/>
-        </p:nvSpPr>
-        <p:spPr>
-          <a:xfrm>
-            <a:off x="285750" y="2000250"/>
-            <a:ext cx="2667000" cy="285750"/>
-          </a:xfrm>
-          <a:prstGeom prst="rect">
-            <a:avLst/>
-          </a:prstGeom>
-          <a:noFill/>
-        </p:spPr>
-        <p:txBody>
-          <a:bodyPr wrap="square" anchor="ctr">
-            <a:spAutoFit/>
-          </a:bodyPr>
-          <a:lstStyle/>
-          <a:p>
-            <a:pPr algn="ctr">
-              <a:lnSpc>
-                <a:spcPct val="100000"/>
-              </a:lnSpc>
-            </a:pPr>
-            <a:r>
-              <a:rPr sz="1400" b="1">
-                <a:solidFill>
-                  <a:srgbClr val="2563EB"/>
-                </a:solidFill>
-                <a:latin typeface="PingFang SC"/>
-              </a:rPr>
-              <a:t>注册</a:t>
-            </a:r>
-          </a:p>
-        </p:txBody>
-      </p:sp>
-      <p:sp>
-        <p:nvSpPr>
-          <p:cNvPr id="11" name="TextBox 10"/>
-          <p:cNvSpPr txBox="1"/>
-          <p:nvPr/>
-        </p:nvSpPr>
-        <p:spPr>
-          <a:xfrm>
-            <a:off x="285750" y="2305050"/>
-            <a:ext cx="2667000" cy="666750"/>
-          </a:xfrm>
-          <a:prstGeom prst="rect">
-            <a:avLst/>
-          </a:prstGeom>
-          <a:noFill/>
-        </p:spPr>
-        <p:txBody>
-          <a:bodyPr wrap="square" anchor="ctr">
-            <a:spAutoFit/>
-          </a:bodyPr>
-          <a:lstStyle/>
-          <a:p>
-            <a:pPr algn="l">
-              <a:lnSpc>
-                <a:spcPct val="105000"/>
-              </a:lnSpc>
-            </a:pPr>
-            <a:r>
-              <a:rPr sz="1050" b="0">
-                <a:solidFill>
-                  <a:srgbClr val="475569"/>
-                </a:solidFill>
-                <a:latin typeface="PingFang SC"/>
-              </a:rPr>
-              <a:t>Schema+实现绑定</a:t>
-            </a:r>
-          </a:p>
-        </p:txBody>
-      </p:sp>
-      <p:sp>
-        <p:nvSpPr>
-          <p:cNvPr id="12" name="Rounded Rectangle 11"/>
-          <p:cNvSpPr/>
-          <p:nvPr/>
-        </p:nvSpPr>
-        <p:spPr>
-          <a:xfrm>
-            <a:off x="3752850" y="3228975"/>
-            <a:ext cx="209550" cy="209550"/>
-          </a:xfrm>
-          <a:prstGeom prst="roundRect">
-            <a:avLst>
-              <a:gd name="adj" fmla="val 8000"/>
-            </a:avLst>
-          </a:prstGeom>
-          <a:solidFill>
-            <a:srgbClr val="14B8A6"/>
-          </a:solidFill>
-          <a:ln>
-            <a:noFill/>
-          </a:ln>
-          <a:effectLst/>
-        </p:spPr>
-        <p:style>
-          <a:lnRef idx="1">
-            <a:schemeClr val="accent1"/>
-          </a:lnRef>
-          <a:fillRef idx="3">
-            <a:schemeClr val="accent1"/>
-          </a:fillRef>
-          <a:effectRef idx="2">
-            <a:schemeClr val="accent1"/>
-          </a:effectRef>
-          <a:fontRef idx="minor">
-            <a:schemeClr val="lt1"/>
-          </a:fontRef>
-        </p:style>
-        <p:txBody>
-          <a:bodyPr rtlCol="0" anchor="ctr"/>
-          <a:lstStyle/>
-          <a:p>
-            <a:pPr algn="ctr"/>
-          </a:p>
-        </p:txBody>
-      </p:sp>
-      <p:sp>
-        <p:nvSpPr>
-          <p:cNvPr id="13" name="Rounded Rectangle 12"/>
-          <p:cNvSpPr/>
-          <p:nvPr/>
-        </p:nvSpPr>
-        <p:spPr>
-          <a:xfrm>
-            <a:off x="2428875" y="3619500"/>
-            <a:ext cx="2857500" cy="1123950"/>
-          </a:xfrm>
-          <a:prstGeom prst="roundRect">
-            <a:avLst>
-              <a:gd name="adj" fmla="val 8000"/>
-            </a:avLst>
-          </a:prstGeom>
-          <a:solidFill>
-            <a:srgbClr val="F1F5F9"/>
-          </a:solidFill>
-          <a:ln>
-            <a:noFill/>
-          </a:ln>
-          <a:effectLst/>
-        </p:spPr>
-        <p:style>
-          <a:lnRef idx="1">
-            <a:schemeClr val="accent1"/>
-          </a:lnRef>
-          <a:fillRef idx="3">
-            <a:schemeClr val="accent1"/>
-          </a:fillRef>
-          <a:effectRef idx="2">
-            <a:schemeClr val="accent1"/>
-          </a:effectRef>
-          <a:fontRef idx="minor">
-            <a:schemeClr val="lt1"/>
-          </a:fontRef>
-        </p:style>
-        <p:txBody>
-          <a:bodyPr rtlCol="0" anchor="ctr"/>
-          <a:lstStyle/>
-          <a:p>
-            <a:pPr algn="ctr"/>
-          </a:p>
-        </p:txBody>
-      </p:sp>
-      <p:sp>
-        <p:nvSpPr>
-          <p:cNvPr id="14" name="Rectangle 13"/>
-          <p:cNvSpPr/>
-          <p:nvPr/>
-        </p:nvSpPr>
-        <p:spPr>
-          <a:xfrm>
-            <a:off x="2428875" y="3619500"/>
-            <a:ext cx="2857500" cy="38100"/>
-          </a:xfrm>
-          <a:prstGeom prst="rect">
-            <a:avLst/>
-          </a:prstGeom>
-          <a:solidFill>
-            <a:srgbClr val="14B8A6"/>
-          </a:solidFill>
-          <a:ln>
-            <a:noFill/>
-          </a:ln>
-          <a:effectLst/>
-        </p:spPr>
-        <p:style>
-          <a:lnRef idx="1">
-            <a:schemeClr val="accent1"/>
-          </a:lnRef>
-          <a:fillRef idx="3">
-            <a:schemeClr val="accent1"/>
-          </a:fillRef>
-          <a:effectRef idx="2">
-            <a:schemeClr val="accent1"/>
-          </a:effectRef>
-          <a:fontRef idx="minor">
-            <a:schemeClr val="lt1"/>
-          </a:fontRef>
-        </p:style>
-        <p:txBody>
-          <a:bodyPr rtlCol="0" anchor="ctr"/>
-          <a:lstStyle/>
-          <a:p>
-            <a:pPr algn="ctr"/>
-          </a:p>
-        </p:txBody>
-      </p:sp>
-      <p:sp>
-        <p:nvSpPr>
-          <p:cNvPr id="15" name="TextBox 14"/>
-          <p:cNvSpPr txBox="1"/>
-          <p:nvPr/>
-        </p:nvSpPr>
-        <p:spPr>
-          <a:xfrm>
-            <a:off x="2524125" y="3714750"/>
-            <a:ext cx="2667000" cy="285750"/>
-          </a:xfrm>
-          <a:prstGeom prst="rect">
-            <a:avLst/>
-          </a:prstGeom>
-          <a:noFill/>
-        </p:spPr>
-        <p:txBody>
-          <a:bodyPr wrap="square" anchor="ctr">
-            <a:spAutoFit/>
-          </a:bodyPr>
-          <a:lstStyle/>
-          <a:p>
-            <a:pPr algn="ctr">
-              <a:lnSpc>
-                <a:spcPct val="100000"/>
-              </a:lnSpc>
-            </a:pPr>
-            <a:r>
-              <a:rPr sz="1400" b="1">
-                <a:solidFill>
-                  <a:srgbClr val="14B8A6"/>
-                </a:solidFill>
-                <a:latin typeface="PingFang SC"/>
-              </a:rPr>
-              <a:t>上架</a:t>
-            </a:r>
-          </a:p>
-        </p:txBody>
-      </p:sp>
-      <p:sp>
-        <p:nvSpPr>
-          <p:cNvPr id="16" name="TextBox 15"/>
-          <p:cNvSpPr txBox="1"/>
-          <p:nvPr/>
-        </p:nvSpPr>
-        <p:spPr>
-          <a:xfrm>
-            <a:off x="2524125" y="4019550"/>
-            <a:ext cx="2667000" cy="666750"/>
-          </a:xfrm>
-          <a:prstGeom prst="rect">
-            <a:avLst/>
-          </a:prstGeom>
-          <a:noFill/>
-        </p:spPr>
-        <p:txBody>
-          <a:bodyPr wrap="square" anchor="ctr">
-            <a:spAutoFit/>
-          </a:bodyPr>
-          <a:lstStyle/>
-          <a:p>
-            <a:pPr algn="l">
-              <a:lnSpc>
-                <a:spcPct val="105000"/>
-              </a:lnSpc>
-            </a:pPr>
-            <a:r>
-              <a:rPr sz="1050" b="0">
-                <a:solidFill>
-                  <a:srgbClr val="475569"/>
-                </a:solidFill>
-                <a:latin typeface="PingFang SC"/>
-              </a:rPr>
-              <a:t>审批+文档</a:t>
-            </a:r>
-          </a:p>
-        </p:txBody>
-      </p:sp>
-      <p:sp>
-        <p:nvSpPr>
-          <p:cNvPr id="17" name="Rounded Rectangle 16"/>
-          <p:cNvSpPr/>
-          <p:nvPr/>
-        </p:nvSpPr>
-        <p:spPr>
-          <a:xfrm>
-            <a:off x="5991225" y="3228975"/>
-            <a:ext cx="209550" cy="209550"/>
-          </a:xfrm>
-          <a:prstGeom prst="roundRect">
-            <a:avLst>
-              <a:gd name="adj" fmla="val 8000"/>
-            </a:avLst>
-          </a:prstGeom>
-          <a:solidFill>
-            <a:srgbClr val="8B5CF6"/>
-          </a:solidFill>
-          <a:ln>
-            <a:noFill/>
-          </a:ln>
-          <a:effectLst/>
-        </p:spPr>
-        <p:style>
-          <a:lnRef idx="1">
-            <a:schemeClr val="accent1"/>
-          </a:lnRef>
-          <a:fillRef idx="3">
-            <a:schemeClr val="accent1"/>
-          </a:fillRef>
-          <a:effectRef idx="2">
-            <a:schemeClr val="accent1"/>
-          </a:effectRef>
-          <a:fontRef idx="minor">
-            <a:schemeClr val="lt1"/>
-          </a:fontRef>
-        </p:style>
-        <p:txBody>
-          <a:bodyPr rtlCol="0" anchor="ctr"/>
-          <a:lstStyle/>
-          <a:p>
-            <a:pPr algn="ctr"/>
-          </a:p>
-        </p:txBody>
-      </p:sp>
-      <p:sp>
-        <p:nvSpPr>
-          <p:cNvPr id="18" name="Rounded Rectangle 17"/>
-          <p:cNvSpPr/>
-          <p:nvPr/>
-        </p:nvSpPr>
-        <p:spPr>
-          <a:xfrm>
-            <a:off x="4667250" y="1905000"/>
-            <a:ext cx="2857500" cy="1123950"/>
-          </a:xfrm>
-          <a:prstGeom prst="roundRect">
-            <a:avLst>
-              <a:gd name="adj" fmla="val 8000"/>
-            </a:avLst>
-          </a:prstGeom>
-          <a:solidFill>
-            <a:srgbClr val="F1F5F9"/>
-          </a:solidFill>
-          <a:ln>
-            <a:noFill/>
-          </a:ln>
-          <a:effectLst/>
-        </p:spPr>
-        <p:style>
-          <a:lnRef idx="1">
-            <a:schemeClr val="accent1"/>
-          </a:lnRef>
-          <a:fillRef idx="3">
-            <a:schemeClr val="accent1"/>
-          </a:fillRef>
-          <a:effectRef idx="2">
-            <a:schemeClr val="accent1"/>
-          </a:effectRef>
-          <a:fontRef idx="minor">
-            <a:schemeClr val="lt1"/>
-          </a:fontRef>
-        </p:style>
-        <p:txBody>
-          <a:bodyPr rtlCol="0" anchor="ctr"/>
-          <a:lstStyle/>
-          <a:p>
-            <a:pPr algn="ctr"/>
-          </a:p>
-        </p:txBody>
-      </p:sp>
-      <p:sp>
-        <p:nvSpPr>
-          <p:cNvPr id="19" name="Rectangle 18"/>
-          <p:cNvSpPr/>
-          <p:nvPr/>
-        </p:nvSpPr>
-        <p:spPr>
-          <a:xfrm>
-            <a:off x="4667250" y="1905000"/>
-            <a:ext cx="2857500" cy="38100"/>
-          </a:xfrm>
-          <a:prstGeom prst="rect">
-            <a:avLst/>
-          </a:prstGeom>
-          <a:solidFill>
-            <a:srgbClr val="8B5CF6"/>
-          </a:solidFill>
-          <a:ln>
-            <a:noFill/>
-          </a:ln>
-          <a:effectLst/>
-        </p:spPr>
-        <p:style>
-          <a:lnRef idx="1">
-            <a:schemeClr val="accent1"/>
-          </a:lnRef>
-          <a:fillRef idx="3">
-            <a:schemeClr val="accent1"/>
-          </a:fillRef>
-          <a:effectRef idx="2">
-            <a:schemeClr val="accent1"/>
-          </a:effectRef>
-          <a:fontRef idx="minor">
-            <a:schemeClr val="lt1"/>
-          </a:fontRef>
-        </p:style>
-        <p:txBody>
-          <a:bodyPr rtlCol="0" anchor="ctr"/>
-          <a:lstStyle/>
-          <a:p>
-            <a:pPr algn="ctr"/>
-          </a:p>
-        </p:txBody>
-      </p:sp>
-      <p:sp>
-        <p:nvSpPr>
-          <p:cNvPr id="20" name="TextBox 19"/>
-          <p:cNvSpPr txBox="1"/>
-          <p:nvPr/>
-        </p:nvSpPr>
-        <p:spPr>
-          <a:xfrm>
-            <a:off x="4762500" y="2000250"/>
-            <a:ext cx="2667000" cy="285750"/>
-          </a:xfrm>
-          <a:prstGeom prst="rect">
-            <a:avLst/>
-          </a:prstGeom>
-          <a:noFill/>
-        </p:spPr>
-        <p:txBody>
-          <a:bodyPr wrap="square" anchor="ctr">
-            <a:spAutoFit/>
-          </a:bodyPr>
-          <a:lstStyle/>
-          <a:p>
-            <a:pPr algn="ctr">
-              <a:lnSpc>
-                <a:spcPct val="100000"/>
-              </a:lnSpc>
-            </a:pPr>
-            <a:r>
-              <a:rPr sz="1400" b="1">
-                <a:solidFill>
-                  <a:srgbClr val="8B5CF6"/>
-                </a:solidFill>
-                <a:latin typeface="PingFang SC"/>
-              </a:rPr>
-              <a:t>灰度</a:t>
-            </a:r>
-          </a:p>
-        </p:txBody>
-      </p:sp>
-      <p:sp>
-        <p:nvSpPr>
-          <p:cNvPr id="21" name="TextBox 20"/>
-          <p:cNvSpPr txBox="1"/>
-          <p:nvPr/>
-        </p:nvSpPr>
-        <p:spPr>
-          <a:xfrm>
-            <a:off x="4762500" y="2305050"/>
-            <a:ext cx="2667000" cy="666750"/>
-          </a:xfrm>
-          <a:prstGeom prst="rect">
-            <a:avLst/>
-          </a:prstGeom>
-          <a:noFill/>
-        </p:spPr>
-        <p:txBody>
-          <a:bodyPr wrap="square" anchor="ctr">
-            <a:spAutoFit/>
-          </a:bodyPr>
-          <a:lstStyle/>
-          <a:p>
-            <a:pPr algn="l">
-              <a:lnSpc>
-                <a:spcPct val="105000"/>
-              </a:lnSpc>
-            </a:pPr>
-            <a:r>
-              <a:rPr sz="1050" b="0">
-                <a:solidFill>
-                  <a:srgbClr val="475569"/>
-                </a:solidFill>
-                <a:latin typeface="PingFang SC"/>
-              </a:rPr>
-              <a:t>10% 流量验证</a:t>
-            </a:r>
-          </a:p>
-        </p:txBody>
-      </p:sp>
-      <p:sp>
-        <p:nvSpPr>
-          <p:cNvPr id="22" name="Rounded Rectangle 21"/>
-          <p:cNvSpPr/>
-          <p:nvPr/>
-        </p:nvSpPr>
-        <p:spPr>
-          <a:xfrm>
-            <a:off x="8229600" y="3228975"/>
-            <a:ext cx="209550" cy="209550"/>
-          </a:xfrm>
-          <a:prstGeom prst="roundRect">
-            <a:avLst>
-              <a:gd name="adj" fmla="val 8000"/>
-            </a:avLst>
-          </a:prstGeom>
-          <a:solidFill>
-            <a:srgbClr val="F59E0B"/>
-          </a:solidFill>
-          <a:ln>
-            <a:noFill/>
-          </a:ln>
-          <a:effectLst/>
-        </p:spPr>
-        <p:style>
-          <a:lnRef idx="1">
-            <a:schemeClr val="accent1"/>
-          </a:lnRef>
-          <a:fillRef idx="3">
-            <a:schemeClr val="accent1"/>
-          </a:fillRef>
-          <a:effectRef idx="2">
-            <a:schemeClr val="accent1"/>
-          </a:effectRef>
-          <a:fontRef idx="minor">
-            <a:schemeClr val="lt1"/>
-          </a:fontRef>
-        </p:style>
-        <p:txBody>
-          <a:bodyPr rtlCol="0" anchor="ctr"/>
-          <a:lstStyle/>
-          <a:p>
-            <a:pPr algn="ctr"/>
-          </a:p>
-        </p:txBody>
-      </p:sp>
-      <p:sp>
-        <p:nvSpPr>
-          <p:cNvPr id="23" name="Rounded Rectangle 22"/>
-          <p:cNvSpPr/>
-          <p:nvPr/>
-        </p:nvSpPr>
-        <p:spPr>
-          <a:xfrm>
-            <a:off x="6905625" y="3619500"/>
-            <a:ext cx="2857500" cy="1123950"/>
-          </a:xfrm>
-          <a:prstGeom prst="roundRect">
-            <a:avLst>
-              <a:gd name="adj" fmla="val 8000"/>
-            </a:avLst>
-          </a:prstGeom>
-          <a:solidFill>
-            <a:srgbClr val="F1F5F9"/>
-          </a:solidFill>
-          <a:ln>
-            <a:noFill/>
-          </a:ln>
-          <a:effectLst/>
-        </p:spPr>
-        <p:style>
-          <a:lnRef idx="1">
-            <a:schemeClr val="accent1"/>
-          </a:lnRef>
-          <a:fillRef idx="3">
-            <a:schemeClr val="accent1"/>
-          </a:fillRef>
-          <a:effectRef idx="2">
-            <a:schemeClr val="accent1"/>
-          </a:effectRef>
-          <a:fontRef idx="minor">
-            <a:schemeClr val="lt1"/>
-          </a:fontRef>
-        </p:style>
-        <p:txBody>
-          <a:bodyPr rtlCol="0" anchor="ctr"/>
-          <a:lstStyle/>
-          <a:p>
-            <a:pPr algn="ctr"/>
-          </a:p>
-        </p:txBody>
-      </p:sp>
-      <p:sp>
-        <p:nvSpPr>
-          <p:cNvPr id="24" name="Rectangle 23"/>
-          <p:cNvSpPr/>
-          <p:nvPr/>
-        </p:nvSpPr>
-        <p:spPr>
-          <a:xfrm>
-            <a:off x="6905625" y="3619500"/>
-            <a:ext cx="2857500" cy="38100"/>
-          </a:xfrm>
-          <a:prstGeom prst="rect">
-            <a:avLst/>
-          </a:prstGeom>
-          <a:solidFill>
-            <a:srgbClr val="F59E0B"/>
-          </a:solidFill>
-          <a:ln>
-            <a:noFill/>
-          </a:ln>
-          <a:effectLst/>
-        </p:spPr>
-        <p:style>
-          <a:lnRef idx="1">
-            <a:schemeClr val="accent1"/>
-          </a:lnRef>
-          <a:fillRef idx="3">
-            <a:schemeClr val="accent1"/>
-          </a:fillRef>
-          <a:effectRef idx="2">
-            <a:schemeClr val="accent1"/>
-          </a:effectRef>
-          <a:fontRef idx="minor">
-            <a:schemeClr val="lt1"/>
-          </a:fontRef>
-        </p:style>
-        <p:txBody>
-          <a:bodyPr rtlCol="0" anchor="ctr"/>
-          <a:lstStyle/>
-          <a:p>
-            <a:pPr algn="ctr"/>
-          </a:p>
-        </p:txBody>
-      </p:sp>
-      <p:sp>
-        <p:nvSpPr>
-          <p:cNvPr id="25" name="TextBox 24"/>
-          <p:cNvSpPr txBox="1"/>
-          <p:nvPr/>
-        </p:nvSpPr>
-        <p:spPr>
-          <a:xfrm>
-            <a:off x="7000875" y="3714750"/>
-            <a:ext cx="2667000" cy="285750"/>
-          </a:xfrm>
-          <a:prstGeom prst="rect">
-            <a:avLst/>
-          </a:prstGeom>
-          <a:noFill/>
-        </p:spPr>
-        <p:txBody>
-          <a:bodyPr wrap="square" anchor="ctr">
-            <a:spAutoFit/>
-          </a:bodyPr>
-          <a:lstStyle/>
-          <a:p>
-            <a:pPr algn="ctr">
-              <a:lnSpc>
-                <a:spcPct val="100000"/>
-              </a:lnSpc>
-            </a:pPr>
-            <a:r>
-              <a:rPr sz="1400" b="1">
-                <a:solidFill>
-                  <a:srgbClr val="F59E0B"/>
-                </a:solidFill>
-                <a:latin typeface="PingFang SC"/>
-              </a:rPr>
-              <a:t>全量</a:t>
-            </a:r>
-          </a:p>
-        </p:txBody>
-      </p:sp>
-      <p:sp>
-        <p:nvSpPr>
-          <p:cNvPr id="26" name="TextBox 25"/>
-          <p:cNvSpPr txBox="1"/>
-          <p:nvPr/>
-        </p:nvSpPr>
-        <p:spPr>
-          <a:xfrm>
-            <a:off x="7000875" y="4019550"/>
-            <a:ext cx="2667000" cy="666750"/>
-          </a:xfrm>
-          <a:prstGeom prst="rect">
-            <a:avLst/>
-          </a:prstGeom>
-          <a:noFill/>
-        </p:spPr>
-        <p:txBody>
-          <a:bodyPr wrap="square" anchor="ctr">
-            <a:spAutoFit/>
-          </a:bodyPr>
-          <a:lstStyle/>
-          <a:p>
-            <a:pPr algn="l">
-              <a:lnSpc>
-                <a:spcPct val="105000"/>
-              </a:lnSpc>
-            </a:pPr>
-            <a:r>
-              <a:rPr sz="1050" b="0">
-                <a:solidFill>
-                  <a:srgbClr val="475569"/>
-                </a:solidFill>
-                <a:latin typeface="PingFang SC"/>
-              </a:rPr>
-              <a:t>健康分达标</a:t>
-            </a:r>
-          </a:p>
-        </p:txBody>
-      </p:sp>
-      <p:sp>
-        <p:nvSpPr>
-          <p:cNvPr id="27" name="Rounded Rectangle 26"/>
-          <p:cNvSpPr/>
-          <p:nvPr/>
-        </p:nvSpPr>
-        <p:spPr>
-          <a:xfrm>
-            <a:off x="10467975" y="3228975"/>
-            <a:ext cx="209550" cy="209550"/>
-          </a:xfrm>
-          <a:prstGeom prst="roundRect">
-            <a:avLst>
-              <a:gd name="adj" fmla="val 8000"/>
-            </a:avLst>
-          </a:prstGeom>
-          <a:solidFill>
-            <a:srgbClr val="34D399"/>
-          </a:solidFill>
-          <a:ln>
-            <a:noFill/>
-          </a:ln>
-          <a:effectLst/>
-        </p:spPr>
-        <p:style>
-          <a:lnRef idx="1">
-            <a:schemeClr val="accent1"/>
-          </a:lnRef>
-          <a:fillRef idx="3">
-            <a:schemeClr val="accent1"/>
-          </a:fillRef>
-          <a:effectRef idx="2">
-            <a:schemeClr val="accent1"/>
-          </a:effectRef>
-          <a:fontRef idx="minor">
-            <a:schemeClr val="lt1"/>
-          </a:fontRef>
-        </p:style>
-        <p:txBody>
-          <a:bodyPr rtlCol="0" anchor="ctr"/>
-          <a:lstStyle/>
-          <a:p>
-            <a:pPr algn="ctr"/>
-          </a:p>
-        </p:txBody>
-      </p:sp>
-      <p:sp>
-        <p:nvSpPr>
-          <p:cNvPr id="28" name="Rounded Rectangle 27"/>
-          <p:cNvSpPr/>
-          <p:nvPr/>
-        </p:nvSpPr>
-        <p:spPr>
-          <a:xfrm>
-            <a:off x="9144000" y="1905000"/>
-            <a:ext cx="2857500" cy="1123950"/>
-          </a:xfrm>
-          <a:prstGeom prst="roundRect">
-            <a:avLst>
-              <a:gd name="adj" fmla="val 8000"/>
-            </a:avLst>
-          </a:prstGeom>
-          <a:solidFill>
-            <a:srgbClr val="F1F5F9"/>
-          </a:solidFill>
-          <a:ln>
-            <a:noFill/>
-          </a:ln>
-          <a:effectLst/>
-        </p:spPr>
-        <p:style>
-          <a:lnRef idx="1">
-            <a:schemeClr val="accent1"/>
-          </a:lnRef>
-          <a:fillRef idx="3">
-            <a:schemeClr val="accent1"/>
-          </a:fillRef>
-          <a:effectRef idx="2">
-            <a:schemeClr val="accent1"/>
-          </a:effectRef>
-          <a:fontRef idx="minor">
-            <a:schemeClr val="lt1"/>
-          </a:fontRef>
-        </p:style>
-        <p:txBody>
-          <a:bodyPr rtlCol="0" anchor="ctr"/>
-          <a:lstStyle/>
-          <a:p>
-            <a:pPr algn="ctr"/>
-          </a:p>
-        </p:txBody>
-      </p:sp>
-      <p:sp>
-        <p:nvSpPr>
-          <p:cNvPr id="29" name="Rectangle 28"/>
-          <p:cNvSpPr/>
-          <p:nvPr/>
-        </p:nvSpPr>
-        <p:spPr>
-          <a:xfrm>
-            <a:off x="9144000" y="1905000"/>
-            <a:ext cx="2857500" cy="38100"/>
-          </a:xfrm>
-          <a:prstGeom prst="rect">
-            <a:avLst/>
-          </a:prstGeom>
-          <a:solidFill>
-            <a:srgbClr val="34D399"/>
-          </a:solidFill>
-          <a:ln>
-            <a:noFill/>
-          </a:ln>
-          <a:effectLst/>
-        </p:spPr>
-        <p:style>
-          <a:lnRef idx="1">
-            <a:schemeClr val="accent1"/>
-          </a:lnRef>
-          <a:fillRef idx="3">
-            <a:schemeClr val="accent1"/>
-          </a:fillRef>
-          <a:effectRef idx="2">
-            <a:schemeClr val="accent1"/>
-          </a:effectRef>
-          <a:fontRef idx="minor">
-            <a:schemeClr val="lt1"/>
-          </a:fontRef>
-        </p:style>
-        <p:txBody>
-          <a:bodyPr rtlCol="0" anchor="ctr"/>
-          <a:lstStyle/>
-          <a:p>
-            <a:pPr algn="ctr"/>
-          </a:p>
-        </p:txBody>
-      </p:sp>
-      <p:sp>
-        <p:nvSpPr>
-          <p:cNvPr id="30" name="TextBox 29"/>
-          <p:cNvSpPr txBox="1"/>
-          <p:nvPr/>
-        </p:nvSpPr>
-        <p:spPr>
-          <a:xfrm>
-            <a:off x="9239250" y="2000250"/>
-            <a:ext cx="2667000" cy="285750"/>
-          </a:xfrm>
-          <a:prstGeom prst="rect">
-            <a:avLst/>
-          </a:prstGeom>
-          <a:noFill/>
-        </p:spPr>
-        <p:txBody>
-          <a:bodyPr wrap="square" anchor="ctr">
-            <a:spAutoFit/>
-          </a:bodyPr>
-          <a:lstStyle/>
-          <a:p>
-            <a:pPr algn="ctr">
-              <a:lnSpc>
-                <a:spcPct val="100000"/>
-              </a:lnSpc>
-            </a:pPr>
-            <a:r>
-              <a:rPr sz="1400" b="1">
-                <a:solidFill>
-                  <a:srgbClr val="34D399"/>
-                </a:solidFill>
-                <a:latin typeface="PingFang SC"/>
-              </a:rPr>
-              <a:t>下线</a:t>
-            </a:r>
-          </a:p>
-        </p:txBody>
-      </p:sp>
-      <p:sp>
-        <p:nvSpPr>
-          <p:cNvPr id="31" name="TextBox 30"/>
-          <p:cNvSpPr txBox="1"/>
-          <p:nvPr/>
-        </p:nvSpPr>
-        <p:spPr>
-          <a:xfrm>
-            <a:off x="9239250" y="2305050"/>
-            <a:ext cx="2667000" cy="666750"/>
-          </a:xfrm>
-          <a:prstGeom prst="rect">
-            <a:avLst/>
-          </a:prstGeom>
-          <a:noFill/>
-        </p:spPr>
-        <p:txBody>
-          <a:bodyPr wrap="square" anchor="ctr">
-            <a:spAutoFit/>
-          </a:bodyPr>
-          <a:lstStyle/>
-          <a:p>
-            <a:pPr algn="l">
-              <a:lnSpc>
-                <a:spcPct val="105000"/>
-              </a:lnSpc>
-            </a:pPr>
-            <a:r>
-              <a:rPr sz="1050" b="0">
-                <a:solidFill>
-                  <a:srgbClr val="475569"/>
-                </a:solidFill>
-                <a:latin typeface="PingFang SC"/>
-              </a:rPr>
-              <a:t>一键热禁用|平台 disable() 已实现</a:t>
-            </a:r>
-          </a:p>
-        </p:txBody>
-      </p:sp>
-      <p:sp>
-        <p:nvSpPr>
-          <p:cNvPr id="32" name="TextBox 31"/>
-          <p:cNvSpPr txBox="1"/>
-          <p:nvPr/>
-        </p:nvSpPr>
-        <p:spPr>
-          <a:xfrm>
-            <a:off x="10287000" y="6534150"/>
-            <a:ext cx="1619250" cy="266700"/>
-          </a:xfrm>
-          <a:prstGeom prst="rect">
-            <a:avLst/>
-          </a:prstGeom>
-          <a:noFill/>
-        </p:spPr>
-        <p:txBody>
-          <a:bodyPr wrap="square" anchor="ctr">
-            <a:spAutoFit/>
-          </a:bodyPr>
-          <a:lstStyle/>
-          <a:p>
-            <a:pPr algn="r">
-              <a:lnSpc>
-                <a:spcPct val="100000"/>
-              </a:lnSpc>
-            </a:pPr>
-            <a:r>
               <a:rPr sz="900" b="0">
                 <a:solidFill>
                   <a:srgbClr val="94A3B8"/>
@@ -7385,7 +7346,7 @@
       </p:sp>
       <p:sp>
         <p:nvSpPr>
-          <p:cNvPr id="33" name="TextBox 32"/>
+          <p:cNvPr id="32" name="TextBox 31"/>
           <p:cNvSpPr txBox="1"/>
           <p:nvPr/>
         </p:nvSpPr>
@@ -8564,14 +8525,2042 @@
       </p:sp>
       <p:sp>
         <p:nvSpPr>
-          <p:cNvPr id="5" name="TextBox 4"/>
+          <p:cNvPr id="5" name="Rounded Rectangle 4"/>
+          <p:cNvSpPr/>
+          <p:nvPr/>
+        </p:nvSpPr>
+        <p:spPr>
+          <a:xfrm>
+            <a:off x="1847850" y="914400"/>
+            <a:ext cx="8877300" cy="1219200"/>
+          </a:xfrm>
+          <a:prstGeom prst="roundRect">
+            <a:avLst>
+              <a:gd name="adj" fmla="val 8000"/>
+            </a:avLst>
+          </a:prstGeom>
+          <a:solidFill>
+            <a:srgbClr val="F1F5F9"/>
+          </a:solidFill>
+          <a:ln>
+            <a:noFill/>
+          </a:ln>
+          <a:effectLst/>
+        </p:spPr>
+        <p:style>
+          <a:lnRef idx="1">
+            <a:schemeClr val="accent1"/>
+          </a:lnRef>
+          <a:fillRef idx="3">
+            <a:schemeClr val="accent1"/>
+          </a:fillRef>
+          <a:effectRef idx="2">
+            <a:schemeClr val="accent1"/>
+          </a:effectRef>
+          <a:fontRef idx="minor">
+            <a:schemeClr val="lt1"/>
+          </a:fontRef>
+        </p:style>
+        <p:txBody>
+          <a:bodyPr rtlCol="0" anchor="ctr"/>
+          <a:lstStyle/>
+          <a:p>
+            <a:pPr algn="ctr"/>
+          </a:p>
+        </p:txBody>
+      </p:sp>
+      <p:sp>
+        <p:nvSpPr>
+          <p:cNvPr id="6" name="TextBox 5"/>
           <p:cNvSpPr txBox="1"/>
           <p:nvPr/>
         </p:nvSpPr>
         <p:spPr>
           <a:xfrm>
-            <a:off x="9334500" y="0"/>
-            <a:ext cx="2667000" cy="704850"/>
+            <a:off x="1962150" y="685800"/>
+            <a:ext cx="1905000" cy="209550"/>
+          </a:xfrm>
+          <a:prstGeom prst="rect">
+            <a:avLst/>
+          </a:prstGeom>
+          <a:noFill/>
+        </p:spPr>
+        <p:txBody>
+          <a:bodyPr wrap="square" anchor="ctr">
+            <a:spAutoFit/>
+          </a:bodyPr>
+          <a:lstStyle/>
+          <a:p>
+            <a:pPr algn="l">
+              <a:lnSpc>
+                <a:spcPct val="100000"/>
+              </a:lnSpc>
+            </a:pPr>
+            <a:r>
+              <a:rPr sz="1100" b="1">
+                <a:solidFill>
+                  <a:srgbClr val="2563EB"/>
+                </a:solidFill>
+                <a:latin typeface="PingFang SC"/>
+              </a:rPr>
+              <a:t>L1</a:t>
+            </a:r>
+          </a:p>
+        </p:txBody>
+      </p:sp>
+      <p:sp>
+        <p:nvSpPr>
+          <p:cNvPr id="7" name="Rounded Rectangle 6"/>
+          <p:cNvSpPr/>
+          <p:nvPr/>
+        </p:nvSpPr>
+        <p:spPr>
+          <a:xfrm>
+            <a:off x="1905000" y="952500"/>
+            <a:ext cx="2076450" cy="1143000"/>
+          </a:xfrm>
+          <a:prstGeom prst="roundRect">
+            <a:avLst>
+              <a:gd name="adj" fmla="val 8000"/>
+            </a:avLst>
+          </a:prstGeom>
+          <a:solidFill>
+            <a:srgbClr val="FFFFFF"/>
+          </a:solidFill>
+          <a:ln w="12700">
+            <a:solidFill>
+              <a:srgbClr val="2563EB"/>
+            </a:solidFill>
+          </a:ln>
+          <a:effectLst/>
+        </p:spPr>
+        <p:style>
+          <a:lnRef idx="1">
+            <a:schemeClr val="accent1"/>
+          </a:lnRef>
+          <a:fillRef idx="3">
+            <a:schemeClr val="accent1"/>
+          </a:fillRef>
+          <a:effectRef idx="2">
+            <a:schemeClr val="accent1"/>
+          </a:effectRef>
+          <a:fontRef idx="minor">
+            <a:schemeClr val="lt1"/>
+          </a:fontRef>
+        </p:style>
+        <p:txBody>
+          <a:bodyPr rtlCol="0" anchor="ctr"/>
+          <a:lstStyle/>
+          <a:p>
+            <a:pPr algn="ctr"/>
+          </a:p>
+        </p:txBody>
+      </p:sp>
+      <p:sp>
+        <p:nvSpPr>
+          <p:cNvPr id="8" name="Rectangle 7"/>
+          <p:cNvSpPr/>
+          <p:nvPr/>
+        </p:nvSpPr>
+        <p:spPr>
+          <a:xfrm>
+            <a:off x="1905000" y="952500"/>
+            <a:ext cx="47625" cy="1143000"/>
+          </a:xfrm>
+          <a:prstGeom prst="rect">
+            <a:avLst/>
+          </a:prstGeom>
+          <a:solidFill>
+            <a:srgbClr val="2563EB"/>
+          </a:solidFill>
+          <a:ln>
+            <a:noFill/>
+          </a:ln>
+          <a:effectLst/>
+        </p:spPr>
+        <p:style>
+          <a:lnRef idx="1">
+            <a:schemeClr val="accent1"/>
+          </a:lnRef>
+          <a:fillRef idx="3">
+            <a:schemeClr val="accent1"/>
+          </a:fillRef>
+          <a:effectRef idx="2">
+            <a:schemeClr val="accent1"/>
+          </a:effectRef>
+          <a:fontRef idx="minor">
+            <a:schemeClr val="lt1"/>
+          </a:fontRef>
+        </p:style>
+        <p:txBody>
+          <a:bodyPr rtlCol="0" anchor="ctr"/>
+          <a:lstStyle/>
+          <a:p>
+            <a:pPr algn="ctr"/>
+          </a:p>
+        </p:txBody>
+      </p:sp>
+      <p:sp>
+        <p:nvSpPr>
+          <p:cNvPr id="9" name="TextBox 8"/>
+          <p:cNvSpPr txBox="1"/>
+          <p:nvPr/>
+        </p:nvSpPr>
+        <p:spPr>
+          <a:xfrm>
+            <a:off x="2057400" y="952500"/>
+            <a:ext cx="1809750" cy="1143000"/>
+          </a:xfrm>
+          <a:prstGeom prst="rect">
+            <a:avLst/>
+          </a:prstGeom>
+          <a:noFill/>
+        </p:spPr>
+        <p:txBody>
+          <a:bodyPr wrap="none" anchor="ctr">
+            <a:spAutoFit/>
+          </a:bodyPr>
+          <a:lstStyle/>
+          <a:p>
+            <a:pPr algn="l">
+              <a:lnSpc>
+                <a:spcPct val="115000"/>
+              </a:lnSpc>
+            </a:pPr>
+            <a:r>
+              <a:rPr sz="1100" b="1">
+                <a:solidFill>
+                  <a:srgbClr val="0B1D3A"/>
+                </a:solidFill>
+                <a:latin typeface="PingFang SC"/>
+              </a:rPr>
+              <a:t>工具层:search_code</a:t>
+            </a:r>
+          </a:p>
+        </p:txBody>
+      </p:sp>
+      <p:sp>
+        <p:nvSpPr>
+          <p:cNvPr id="10" name="Rounded Rectangle 9"/>
+          <p:cNvSpPr/>
+          <p:nvPr/>
+        </p:nvSpPr>
+        <p:spPr>
+          <a:xfrm>
+            <a:off x="4133850" y="952500"/>
+            <a:ext cx="2076450" cy="1143000"/>
+          </a:xfrm>
+          <a:prstGeom prst="roundRect">
+            <a:avLst>
+              <a:gd name="adj" fmla="val 8000"/>
+            </a:avLst>
+          </a:prstGeom>
+          <a:solidFill>
+            <a:srgbClr val="FFFFFF"/>
+          </a:solidFill>
+          <a:ln w="12700">
+            <a:solidFill>
+              <a:srgbClr val="2563EB"/>
+            </a:solidFill>
+          </a:ln>
+          <a:effectLst/>
+        </p:spPr>
+        <p:style>
+          <a:lnRef idx="1">
+            <a:schemeClr val="accent1"/>
+          </a:lnRef>
+          <a:fillRef idx="3">
+            <a:schemeClr val="accent1"/>
+          </a:fillRef>
+          <a:effectRef idx="2">
+            <a:schemeClr val="accent1"/>
+          </a:effectRef>
+          <a:fontRef idx="minor">
+            <a:schemeClr val="lt1"/>
+          </a:fontRef>
+        </p:style>
+        <p:txBody>
+          <a:bodyPr rtlCol="0" anchor="ctr"/>
+          <a:lstStyle/>
+          <a:p>
+            <a:pPr algn="ctr"/>
+          </a:p>
+        </p:txBody>
+      </p:sp>
+      <p:sp>
+        <p:nvSpPr>
+          <p:cNvPr id="11" name="Rectangle 10"/>
+          <p:cNvSpPr/>
+          <p:nvPr/>
+        </p:nvSpPr>
+        <p:spPr>
+          <a:xfrm>
+            <a:off x="4133850" y="952500"/>
+            <a:ext cx="47625" cy="1143000"/>
+          </a:xfrm>
+          <a:prstGeom prst="rect">
+            <a:avLst/>
+          </a:prstGeom>
+          <a:solidFill>
+            <a:srgbClr val="2563EB"/>
+          </a:solidFill>
+          <a:ln>
+            <a:noFill/>
+          </a:ln>
+          <a:effectLst/>
+        </p:spPr>
+        <p:style>
+          <a:lnRef idx="1">
+            <a:schemeClr val="accent1"/>
+          </a:lnRef>
+          <a:fillRef idx="3">
+            <a:schemeClr val="accent1"/>
+          </a:fillRef>
+          <a:effectRef idx="2">
+            <a:schemeClr val="accent1"/>
+          </a:effectRef>
+          <a:fontRef idx="minor">
+            <a:schemeClr val="lt1"/>
+          </a:fontRef>
+        </p:style>
+        <p:txBody>
+          <a:bodyPr rtlCol="0" anchor="ctr"/>
+          <a:lstStyle/>
+          <a:p>
+            <a:pPr algn="ctr"/>
+          </a:p>
+        </p:txBody>
+      </p:sp>
+      <p:sp>
+        <p:nvSpPr>
+          <p:cNvPr id="12" name="TextBox 11"/>
+          <p:cNvSpPr txBox="1"/>
+          <p:nvPr/>
+        </p:nvSpPr>
+        <p:spPr>
+          <a:xfrm>
+            <a:off x="4286250" y="952500"/>
+            <a:ext cx="1809750" cy="1143000"/>
+          </a:xfrm>
+          <a:prstGeom prst="rect">
+            <a:avLst/>
+          </a:prstGeom>
+          <a:noFill/>
+        </p:spPr>
+        <p:txBody>
+          <a:bodyPr wrap="none" anchor="ctr">
+            <a:spAutoFit/>
+          </a:bodyPr>
+          <a:lstStyle/>
+          <a:p>
+            <a:pPr algn="l">
+              <a:lnSpc>
+                <a:spcPct val="115000"/>
+              </a:lnSpc>
+            </a:pPr>
+            <a:r>
+              <a:rPr sz="1300" b="1">
+                <a:solidFill>
+                  <a:srgbClr val="0B1D3A"/>
+                </a:solidFill>
+                <a:latin typeface="PingFang SC"/>
+              </a:rPr>
+              <a:t>query_db</a:t>
+            </a:r>
+          </a:p>
+        </p:txBody>
+      </p:sp>
+      <p:sp>
+        <p:nvSpPr>
+          <p:cNvPr id="13" name="Rounded Rectangle 12"/>
+          <p:cNvSpPr/>
+          <p:nvPr/>
+        </p:nvSpPr>
+        <p:spPr>
+          <a:xfrm>
+            <a:off x="6362700" y="952500"/>
+            <a:ext cx="2076450" cy="1143000"/>
+          </a:xfrm>
+          <a:prstGeom prst="roundRect">
+            <a:avLst>
+              <a:gd name="adj" fmla="val 8000"/>
+            </a:avLst>
+          </a:prstGeom>
+          <a:solidFill>
+            <a:srgbClr val="FFFFFF"/>
+          </a:solidFill>
+          <a:ln w="12700">
+            <a:solidFill>
+              <a:srgbClr val="2563EB"/>
+            </a:solidFill>
+          </a:ln>
+          <a:effectLst/>
+        </p:spPr>
+        <p:style>
+          <a:lnRef idx="1">
+            <a:schemeClr val="accent1"/>
+          </a:lnRef>
+          <a:fillRef idx="3">
+            <a:schemeClr val="accent1"/>
+          </a:fillRef>
+          <a:effectRef idx="2">
+            <a:schemeClr val="accent1"/>
+          </a:effectRef>
+          <a:fontRef idx="minor">
+            <a:schemeClr val="lt1"/>
+          </a:fontRef>
+        </p:style>
+        <p:txBody>
+          <a:bodyPr rtlCol="0" anchor="ctr"/>
+          <a:lstStyle/>
+          <a:p>
+            <a:pPr algn="ctr"/>
+          </a:p>
+        </p:txBody>
+      </p:sp>
+      <p:sp>
+        <p:nvSpPr>
+          <p:cNvPr id="14" name="Rectangle 13"/>
+          <p:cNvSpPr/>
+          <p:nvPr/>
+        </p:nvSpPr>
+        <p:spPr>
+          <a:xfrm>
+            <a:off x="6362700" y="952500"/>
+            <a:ext cx="47625" cy="1143000"/>
+          </a:xfrm>
+          <a:prstGeom prst="rect">
+            <a:avLst/>
+          </a:prstGeom>
+          <a:solidFill>
+            <a:srgbClr val="2563EB"/>
+          </a:solidFill>
+          <a:ln>
+            <a:noFill/>
+          </a:ln>
+          <a:effectLst/>
+        </p:spPr>
+        <p:style>
+          <a:lnRef idx="1">
+            <a:schemeClr val="accent1"/>
+          </a:lnRef>
+          <a:fillRef idx="3">
+            <a:schemeClr val="accent1"/>
+          </a:fillRef>
+          <a:effectRef idx="2">
+            <a:schemeClr val="accent1"/>
+          </a:effectRef>
+          <a:fontRef idx="minor">
+            <a:schemeClr val="lt1"/>
+          </a:fontRef>
+        </p:style>
+        <p:txBody>
+          <a:bodyPr rtlCol="0" anchor="ctr"/>
+          <a:lstStyle/>
+          <a:p>
+            <a:pPr algn="ctr"/>
+          </a:p>
+        </p:txBody>
+      </p:sp>
+      <p:sp>
+        <p:nvSpPr>
+          <p:cNvPr id="15" name="TextBox 14"/>
+          <p:cNvSpPr txBox="1"/>
+          <p:nvPr/>
+        </p:nvSpPr>
+        <p:spPr>
+          <a:xfrm>
+            <a:off x="6515100" y="952500"/>
+            <a:ext cx="1809750" cy="1143000"/>
+          </a:xfrm>
+          <a:prstGeom prst="rect">
+            <a:avLst/>
+          </a:prstGeom>
+          <a:noFill/>
+        </p:spPr>
+        <p:txBody>
+          <a:bodyPr wrap="none" anchor="ctr">
+            <a:spAutoFit/>
+          </a:bodyPr>
+          <a:lstStyle/>
+          <a:p>
+            <a:pPr algn="l">
+              <a:lnSpc>
+                <a:spcPct val="115000"/>
+              </a:lnSpc>
+            </a:pPr>
+            <a:r>
+              <a:rPr sz="1300" b="1">
+                <a:solidFill>
+                  <a:srgbClr val="0B1D3A"/>
+                </a:solidFill>
+                <a:latin typeface="PingFang SC"/>
+              </a:rPr>
+              <a:t>send_mail</a:t>
+            </a:r>
+          </a:p>
+        </p:txBody>
+      </p:sp>
+      <p:sp>
+        <p:nvSpPr>
+          <p:cNvPr id="16" name="Rounded Rectangle 15"/>
+          <p:cNvSpPr/>
+          <p:nvPr/>
+        </p:nvSpPr>
+        <p:spPr>
+          <a:xfrm>
+            <a:off x="8591550" y="952500"/>
+            <a:ext cx="2076450" cy="1143000"/>
+          </a:xfrm>
+          <a:prstGeom prst="roundRect">
+            <a:avLst>
+              <a:gd name="adj" fmla="val 8000"/>
+            </a:avLst>
+          </a:prstGeom>
+          <a:solidFill>
+            <a:srgbClr val="FFFFFF"/>
+          </a:solidFill>
+          <a:ln w="12700">
+            <a:solidFill>
+              <a:srgbClr val="2563EB"/>
+            </a:solidFill>
+          </a:ln>
+          <a:effectLst/>
+        </p:spPr>
+        <p:style>
+          <a:lnRef idx="1">
+            <a:schemeClr val="accent1"/>
+          </a:lnRef>
+          <a:fillRef idx="3">
+            <a:schemeClr val="accent1"/>
+          </a:fillRef>
+          <a:effectRef idx="2">
+            <a:schemeClr val="accent1"/>
+          </a:effectRef>
+          <a:fontRef idx="minor">
+            <a:schemeClr val="lt1"/>
+          </a:fontRef>
+        </p:style>
+        <p:txBody>
+          <a:bodyPr rtlCol="0" anchor="ctr"/>
+          <a:lstStyle/>
+          <a:p>
+            <a:pPr algn="ctr"/>
+          </a:p>
+        </p:txBody>
+      </p:sp>
+      <p:sp>
+        <p:nvSpPr>
+          <p:cNvPr id="17" name="Rectangle 16"/>
+          <p:cNvSpPr/>
+          <p:nvPr/>
+        </p:nvSpPr>
+        <p:spPr>
+          <a:xfrm>
+            <a:off x="8591550" y="952500"/>
+            <a:ext cx="47625" cy="1143000"/>
+          </a:xfrm>
+          <a:prstGeom prst="rect">
+            <a:avLst/>
+          </a:prstGeom>
+          <a:solidFill>
+            <a:srgbClr val="2563EB"/>
+          </a:solidFill>
+          <a:ln>
+            <a:noFill/>
+          </a:ln>
+          <a:effectLst/>
+        </p:spPr>
+        <p:style>
+          <a:lnRef idx="1">
+            <a:schemeClr val="accent1"/>
+          </a:lnRef>
+          <a:fillRef idx="3">
+            <a:schemeClr val="accent1"/>
+          </a:fillRef>
+          <a:effectRef idx="2">
+            <a:schemeClr val="accent1"/>
+          </a:effectRef>
+          <a:fontRef idx="minor">
+            <a:schemeClr val="lt1"/>
+          </a:fontRef>
+        </p:style>
+        <p:txBody>
+          <a:bodyPr rtlCol="0" anchor="ctr"/>
+          <a:lstStyle/>
+          <a:p>
+            <a:pPr algn="ctr"/>
+          </a:p>
+        </p:txBody>
+      </p:sp>
+      <p:sp>
+        <p:nvSpPr>
+          <p:cNvPr id="18" name="TextBox 17"/>
+          <p:cNvSpPr txBox="1"/>
+          <p:nvPr/>
+        </p:nvSpPr>
+        <p:spPr>
+          <a:xfrm>
+            <a:off x="8743950" y="952500"/>
+            <a:ext cx="1809750" cy="1143000"/>
+          </a:xfrm>
+          <a:prstGeom prst="rect">
+            <a:avLst/>
+          </a:prstGeom>
+          <a:noFill/>
+        </p:spPr>
+        <p:txBody>
+          <a:bodyPr wrap="none" anchor="ctr">
+            <a:spAutoFit/>
+          </a:bodyPr>
+          <a:lstStyle/>
+          <a:p>
+            <a:pPr algn="l">
+              <a:lnSpc>
+                <a:spcPct val="115000"/>
+              </a:lnSpc>
+            </a:pPr>
+            <a:r>
+              <a:rPr sz="1300" b="1">
+                <a:solidFill>
+                  <a:srgbClr val="0B1D3A"/>
+                </a:solidFill>
+                <a:latin typeface="PingFang SC"/>
+              </a:rPr>
+              <a:t>run_test</a:t>
+            </a:r>
+          </a:p>
+        </p:txBody>
+      </p:sp>
+      <p:cxnSp>
+        <p:nvCxnSpPr>
+          <p:cNvPr id="19" name="Connector 18"/>
+          <p:cNvCxnSpPr/>
+          <p:nvPr/>
+        </p:nvCxnSpPr>
+        <p:spPr>
+          <a:xfrm>
+            <a:off x="6096000" y="2152650"/>
+            <a:ext cx="0" cy="152400"/>
+          </a:xfrm>
+          <a:prstGeom prst="line">
+            <a:avLst/>
+          </a:prstGeom>
+          <a:ln w="17780">
+            <a:solidFill>
+              <a:srgbClr val="475569"/>
+            </a:solidFill>
+          </a:ln>
+        </p:spPr>
+        <p:style>
+          <a:lnRef idx="2">
+            <a:schemeClr val="accent1"/>
+          </a:lnRef>
+          <a:fillRef idx="0">
+            <a:schemeClr val="accent1"/>
+          </a:fillRef>
+          <a:effectRef idx="1">
+            <a:schemeClr val="accent1"/>
+          </a:effectRef>
+          <a:fontRef idx="minor">
+            <a:schemeClr val="tx1"/>
+          </a:fontRef>
+        </p:style>
+      </p:cxnSp>
+      <p:sp>
+        <p:nvSpPr>
+          <p:cNvPr id="20" name="Isosceles Triangle 19"/>
+          <p:cNvSpPr/>
+          <p:nvPr/>
+        </p:nvSpPr>
+        <p:spPr>
+          <a:xfrm rot="10800000">
+            <a:off x="6053138" y="2219326"/>
+            <a:ext cx="85725" cy="85725"/>
+          </a:xfrm>
+          <a:prstGeom prst="triangle">
+            <a:avLst/>
+          </a:prstGeom>
+          <a:solidFill>
+            <a:srgbClr val="475569"/>
+          </a:solidFill>
+          <a:ln>
+            <a:noFill/>
+          </a:ln>
+          <a:effectLst/>
+        </p:spPr>
+        <p:style>
+          <a:lnRef idx="1">
+            <a:schemeClr val="accent1"/>
+          </a:lnRef>
+          <a:fillRef idx="3">
+            <a:schemeClr val="accent1"/>
+          </a:fillRef>
+          <a:effectRef idx="2">
+            <a:schemeClr val="accent1"/>
+          </a:effectRef>
+          <a:fontRef idx="minor">
+            <a:schemeClr val="lt1"/>
+          </a:fontRef>
+        </p:style>
+        <p:txBody>
+          <a:bodyPr rtlCol="0" anchor="ctr"/>
+          <a:lstStyle/>
+          <a:p>
+            <a:pPr algn="ctr"/>
+          </a:p>
+        </p:txBody>
+      </p:sp>
+      <p:sp>
+        <p:nvSpPr>
+          <p:cNvPr id="21" name="Rounded Rectangle 20"/>
+          <p:cNvSpPr/>
+          <p:nvPr/>
+        </p:nvSpPr>
+        <p:spPr>
+          <a:xfrm>
+            <a:off x="5743575" y="2133600"/>
+            <a:ext cx="704850" cy="171450"/>
+          </a:xfrm>
+          <a:prstGeom prst="roundRect">
+            <a:avLst>
+              <a:gd name="adj" fmla="val 8000"/>
+            </a:avLst>
+          </a:prstGeom>
+          <a:solidFill>
+            <a:srgbClr val="FFFFFF"/>
+          </a:solidFill>
+          <a:ln w="12700">
+            <a:solidFill>
+              <a:srgbClr val="DDE5EE"/>
+            </a:solidFill>
+          </a:ln>
+          <a:effectLst/>
+        </p:spPr>
+        <p:style>
+          <a:lnRef idx="1">
+            <a:schemeClr val="accent1"/>
+          </a:lnRef>
+          <a:fillRef idx="3">
+            <a:schemeClr val="accent1"/>
+          </a:fillRef>
+          <a:effectRef idx="2">
+            <a:schemeClr val="accent1"/>
+          </a:effectRef>
+          <a:fontRef idx="minor">
+            <a:schemeClr val="lt1"/>
+          </a:fontRef>
+        </p:style>
+        <p:txBody>
+          <a:bodyPr rtlCol="0" anchor="ctr"/>
+          <a:lstStyle/>
+          <a:p>
+            <a:pPr algn="ctr"/>
+          </a:p>
+        </p:txBody>
+      </p:sp>
+      <p:sp>
+        <p:nvSpPr>
+          <p:cNvPr id="22" name="TextBox 21"/>
+          <p:cNvSpPr txBox="1"/>
+          <p:nvPr/>
+        </p:nvSpPr>
+        <p:spPr>
+          <a:xfrm>
+            <a:off x="5743575" y="2133600"/>
+            <a:ext cx="704850" cy="171450"/>
+          </a:xfrm>
+          <a:prstGeom prst="rect">
+            <a:avLst/>
+          </a:prstGeom>
+          <a:noFill/>
+        </p:spPr>
+        <p:txBody>
+          <a:bodyPr wrap="square" anchor="ctr">
+            <a:spAutoFit/>
+          </a:bodyPr>
+          <a:lstStyle/>
+          <a:p>
+            <a:pPr algn="ctr">
+              <a:lnSpc>
+                <a:spcPct val="100000"/>
+              </a:lnSpc>
+            </a:pPr>
+            <a:r>
+              <a:rPr sz="1100" b="1">
+                <a:solidFill>
+                  <a:srgbClr val="0B1D3A"/>
+                </a:solidFill>
+                <a:latin typeface="PingFang SC"/>
+              </a:rPr>
+              <a:t>调用</a:t>
+            </a:r>
+          </a:p>
+        </p:txBody>
+      </p:sp>
+      <p:sp>
+        <p:nvSpPr>
+          <p:cNvPr id="23" name="Rounded Rectangle 22"/>
+          <p:cNvSpPr/>
+          <p:nvPr/>
+        </p:nvSpPr>
+        <p:spPr>
+          <a:xfrm>
+            <a:off x="1847850" y="2305050"/>
+            <a:ext cx="8877300" cy="1219200"/>
+          </a:xfrm>
+          <a:prstGeom prst="roundRect">
+            <a:avLst>
+              <a:gd name="adj" fmla="val 8000"/>
+            </a:avLst>
+          </a:prstGeom>
+          <a:solidFill>
+            <a:srgbClr val="F1F5F9"/>
+          </a:solidFill>
+          <a:ln>
+            <a:noFill/>
+          </a:ln>
+          <a:effectLst/>
+        </p:spPr>
+        <p:style>
+          <a:lnRef idx="1">
+            <a:schemeClr val="accent1"/>
+          </a:lnRef>
+          <a:fillRef idx="3">
+            <a:schemeClr val="accent1"/>
+          </a:fillRef>
+          <a:effectRef idx="2">
+            <a:schemeClr val="accent1"/>
+          </a:effectRef>
+          <a:fontRef idx="minor">
+            <a:schemeClr val="lt1"/>
+          </a:fontRef>
+        </p:style>
+        <p:txBody>
+          <a:bodyPr rtlCol="0" anchor="ctr"/>
+          <a:lstStyle/>
+          <a:p>
+            <a:pPr algn="ctr"/>
+          </a:p>
+        </p:txBody>
+      </p:sp>
+      <p:sp>
+        <p:nvSpPr>
+          <p:cNvPr id="24" name="TextBox 23"/>
+          <p:cNvSpPr txBox="1"/>
+          <p:nvPr/>
+        </p:nvSpPr>
+        <p:spPr>
+          <a:xfrm>
+            <a:off x="1962150" y="2076450"/>
+            <a:ext cx="1905000" cy="209550"/>
+          </a:xfrm>
+          <a:prstGeom prst="rect">
+            <a:avLst/>
+          </a:prstGeom>
+          <a:noFill/>
+        </p:spPr>
+        <p:txBody>
+          <a:bodyPr wrap="square" anchor="ctr">
+            <a:spAutoFit/>
+          </a:bodyPr>
+          <a:lstStyle/>
+          <a:p>
+            <a:pPr algn="l">
+              <a:lnSpc>
+                <a:spcPct val="100000"/>
+              </a:lnSpc>
+            </a:pPr>
+            <a:r>
+              <a:rPr sz="1100" b="1">
+                <a:solidFill>
+                  <a:srgbClr val="14B8A6"/>
+                </a:solidFill>
+                <a:latin typeface="PingFang SC"/>
+              </a:rPr>
+              <a:t>L2</a:t>
+            </a:r>
+          </a:p>
+        </p:txBody>
+      </p:sp>
+      <p:sp>
+        <p:nvSpPr>
+          <p:cNvPr id="25" name="Rounded Rectangle 24"/>
+          <p:cNvSpPr/>
+          <p:nvPr/>
+        </p:nvSpPr>
+        <p:spPr>
+          <a:xfrm>
+            <a:off x="1905000" y="2343150"/>
+            <a:ext cx="2076450" cy="1143000"/>
+          </a:xfrm>
+          <a:prstGeom prst="roundRect">
+            <a:avLst>
+              <a:gd name="adj" fmla="val 8000"/>
+            </a:avLst>
+          </a:prstGeom>
+          <a:solidFill>
+            <a:srgbClr val="FFFFFF"/>
+          </a:solidFill>
+          <a:ln w="12700">
+            <a:solidFill>
+              <a:srgbClr val="14B8A6"/>
+            </a:solidFill>
+          </a:ln>
+          <a:effectLst/>
+        </p:spPr>
+        <p:style>
+          <a:lnRef idx="1">
+            <a:schemeClr val="accent1"/>
+          </a:lnRef>
+          <a:fillRef idx="3">
+            <a:schemeClr val="accent1"/>
+          </a:fillRef>
+          <a:effectRef idx="2">
+            <a:schemeClr val="accent1"/>
+          </a:effectRef>
+          <a:fontRef idx="minor">
+            <a:schemeClr val="lt1"/>
+          </a:fontRef>
+        </p:style>
+        <p:txBody>
+          <a:bodyPr rtlCol="0" anchor="ctr"/>
+          <a:lstStyle/>
+          <a:p>
+            <a:pPr algn="ctr"/>
+          </a:p>
+        </p:txBody>
+      </p:sp>
+      <p:sp>
+        <p:nvSpPr>
+          <p:cNvPr id="26" name="Rectangle 25"/>
+          <p:cNvSpPr/>
+          <p:nvPr/>
+        </p:nvSpPr>
+        <p:spPr>
+          <a:xfrm>
+            <a:off x="1905000" y="2343150"/>
+            <a:ext cx="47625" cy="1143000"/>
+          </a:xfrm>
+          <a:prstGeom prst="rect">
+            <a:avLst/>
+          </a:prstGeom>
+          <a:solidFill>
+            <a:srgbClr val="14B8A6"/>
+          </a:solidFill>
+          <a:ln>
+            <a:noFill/>
+          </a:ln>
+          <a:effectLst/>
+        </p:spPr>
+        <p:style>
+          <a:lnRef idx="1">
+            <a:schemeClr val="accent1"/>
+          </a:lnRef>
+          <a:fillRef idx="3">
+            <a:schemeClr val="accent1"/>
+          </a:fillRef>
+          <a:effectRef idx="2">
+            <a:schemeClr val="accent1"/>
+          </a:effectRef>
+          <a:fontRef idx="minor">
+            <a:schemeClr val="lt1"/>
+          </a:fontRef>
+        </p:style>
+        <p:txBody>
+          <a:bodyPr rtlCol="0" anchor="ctr"/>
+          <a:lstStyle/>
+          <a:p>
+            <a:pPr algn="ctr"/>
+          </a:p>
+        </p:txBody>
+      </p:sp>
+      <p:sp>
+        <p:nvSpPr>
+          <p:cNvPr id="27" name="TextBox 26"/>
+          <p:cNvSpPr txBox="1"/>
+          <p:nvPr/>
+        </p:nvSpPr>
+        <p:spPr>
+          <a:xfrm>
+            <a:off x="2057400" y="2343150"/>
+            <a:ext cx="1809750" cy="1143000"/>
+          </a:xfrm>
+          <a:prstGeom prst="rect">
+            <a:avLst/>
+          </a:prstGeom>
+          <a:noFill/>
+        </p:spPr>
+        <p:txBody>
+          <a:bodyPr wrap="none" anchor="ctr">
+            <a:spAutoFit/>
+          </a:bodyPr>
+          <a:lstStyle/>
+          <a:p>
+            <a:pPr algn="l">
+              <a:lnSpc>
+                <a:spcPct val="115000"/>
+              </a:lnSpc>
+            </a:pPr>
+            <a:r>
+              <a:rPr sz="1300" b="1">
+                <a:solidFill>
+                  <a:srgbClr val="0B1D3A"/>
+                </a:solidFill>
+                <a:latin typeface="PingFang SC"/>
+              </a:rPr>
+              <a:t>服务层:Milvus</a:t>
+            </a:r>
+          </a:p>
+        </p:txBody>
+      </p:sp>
+      <p:sp>
+        <p:nvSpPr>
+          <p:cNvPr id="28" name="Rounded Rectangle 27"/>
+          <p:cNvSpPr/>
+          <p:nvPr/>
+        </p:nvSpPr>
+        <p:spPr>
+          <a:xfrm>
+            <a:off x="4133850" y="2343150"/>
+            <a:ext cx="2076450" cy="1143000"/>
+          </a:xfrm>
+          <a:prstGeom prst="roundRect">
+            <a:avLst>
+              <a:gd name="adj" fmla="val 8000"/>
+            </a:avLst>
+          </a:prstGeom>
+          <a:solidFill>
+            <a:srgbClr val="FFFFFF"/>
+          </a:solidFill>
+          <a:ln w="12700">
+            <a:solidFill>
+              <a:srgbClr val="14B8A6"/>
+            </a:solidFill>
+          </a:ln>
+          <a:effectLst/>
+        </p:spPr>
+        <p:style>
+          <a:lnRef idx="1">
+            <a:schemeClr val="accent1"/>
+          </a:lnRef>
+          <a:fillRef idx="3">
+            <a:schemeClr val="accent1"/>
+          </a:fillRef>
+          <a:effectRef idx="2">
+            <a:schemeClr val="accent1"/>
+          </a:effectRef>
+          <a:fontRef idx="minor">
+            <a:schemeClr val="lt1"/>
+          </a:fontRef>
+        </p:style>
+        <p:txBody>
+          <a:bodyPr rtlCol="0" anchor="ctr"/>
+          <a:lstStyle/>
+          <a:p>
+            <a:pPr algn="ctr"/>
+          </a:p>
+        </p:txBody>
+      </p:sp>
+      <p:sp>
+        <p:nvSpPr>
+          <p:cNvPr id="29" name="Rectangle 28"/>
+          <p:cNvSpPr/>
+          <p:nvPr/>
+        </p:nvSpPr>
+        <p:spPr>
+          <a:xfrm>
+            <a:off x="4133850" y="2343150"/>
+            <a:ext cx="47625" cy="1143000"/>
+          </a:xfrm>
+          <a:prstGeom prst="rect">
+            <a:avLst/>
+          </a:prstGeom>
+          <a:solidFill>
+            <a:srgbClr val="14B8A6"/>
+          </a:solidFill>
+          <a:ln>
+            <a:noFill/>
+          </a:ln>
+          <a:effectLst/>
+        </p:spPr>
+        <p:style>
+          <a:lnRef idx="1">
+            <a:schemeClr val="accent1"/>
+          </a:lnRef>
+          <a:fillRef idx="3">
+            <a:schemeClr val="accent1"/>
+          </a:fillRef>
+          <a:effectRef idx="2">
+            <a:schemeClr val="accent1"/>
+          </a:effectRef>
+          <a:fontRef idx="minor">
+            <a:schemeClr val="lt1"/>
+          </a:fontRef>
+        </p:style>
+        <p:txBody>
+          <a:bodyPr rtlCol="0" anchor="ctr"/>
+          <a:lstStyle/>
+          <a:p>
+            <a:pPr algn="ctr"/>
+          </a:p>
+        </p:txBody>
+      </p:sp>
+      <p:sp>
+        <p:nvSpPr>
+          <p:cNvPr id="30" name="TextBox 29"/>
+          <p:cNvSpPr txBox="1"/>
+          <p:nvPr/>
+        </p:nvSpPr>
+        <p:spPr>
+          <a:xfrm>
+            <a:off x="4286250" y="2343150"/>
+            <a:ext cx="1809750" cy="1143000"/>
+          </a:xfrm>
+          <a:prstGeom prst="rect">
+            <a:avLst/>
+          </a:prstGeom>
+          <a:noFill/>
+        </p:spPr>
+        <p:txBody>
+          <a:bodyPr wrap="none" anchor="ctr">
+            <a:spAutoFit/>
+          </a:bodyPr>
+          <a:lstStyle/>
+          <a:p>
+            <a:pPr algn="l">
+              <a:lnSpc>
+                <a:spcPct val="115000"/>
+              </a:lnSpc>
+            </a:pPr>
+            <a:r>
+              <a:rPr sz="1300" b="1">
+                <a:solidFill>
+                  <a:srgbClr val="0B1D3A"/>
+                </a:solidFill>
+                <a:latin typeface="PingFang SC"/>
+              </a:rPr>
+              <a:t>PG 只读</a:t>
+            </a:r>
+          </a:p>
+        </p:txBody>
+      </p:sp>
+      <p:sp>
+        <p:nvSpPr>
+          <p:cNvPr id="31" name="Rounded Rectangle 30"/>
+          <p:cNvSpPr/>
+          <p:nvPr/>
+        </p:nvSpPr>
+        <p:spPr>
+          <a:xfrm>
+            <a:off x="6362700" y="2343150"/>
+            <a:ext cx="2076450" cy="1143000"/>
+          </a:xfrm>
+          <a:prstGeom prst="roundRect">
+            <a:avLst>
+              <a:gd name="adj" fmla="val 8000"/>
+            </a:avLst>
+          </a:prstGeom>
+          <a:solidFill>
+            <a:srgbClr val="FFFFFF"/>
+          </a:solidFill>
+          <a:ln w="12700">
+            <a:solidFill>
+              <a:srgbClr val="14B8A6"/>
+            </a:solidFill>
+          </a:ln>
+          <a:effectLst/>
+        </p:spPr>
+        <p:style>
+          <a:lnRef idx="1">
+            <a:schemeClr val="accent1"/>
+          </a:lnRef>
+          <a:fillRef idx="3">
+            <a:schemeClr val="accent1"/>
+          </a:fillRef>
+          <a:effectRef idx="2">
+            <a:schemeClr val="accent1"/>
+          </a:effectRef>
+          <a:fontRef idx="minor">
+            <a:schemeClr val="lt1"/>
+          </a:fontRef>
+        </p:style>
+        <p:txBody>
+          <a:bodyPr rtlCol="0" anchor="ctr"/>
+          <a:lstStyle/>
+          <a:p>
+            <a:pPr algn="ctr"/>
+          </a:p>
+        </p:txBody>
+      </p:sp>
+      <p:sp>
+        <p:nvSpPr>
+          <p:cNvPr id="32" name="Rectangle 31"/>
+          <p:cNvSpPr/>
+          <p:nvPr/>
+        </p:nvSpPr>
+        <p:spPr>
+          <a:xfrm>
+            <a:off x="6362700" y="2343150"/>
+            <a:ext cx="47625" cy="1143000"/>
+          </a:xfrm>
+          <a:prstGeom prst="rect">
+            <a:avLst/>
+          </a:prstGeom>
+          <a:solidFill>
+            <a:srgbClr val="14B8A6"/>
+          </a:solidFill>
+          <a:ln>
+            <a:noFill/>
+          </a:ln>
+          <a:effectLst/>
+        </p:spPr>
+        <p:style>
+          <a:lnRef idx="1">
+            <a:schemeClr val="accent1"/>
+          </a:lnRef>
+          <a:fillRef idx="3">
+            <a:schemeClr val="accent1"/>
+          </a:fillRef>
+          <a:effectRef idx="2">
+            <a:schemeClr val="accent1"/>
+          </a:effectRef>
+          <a:fontRef idx="minor">
+            <a:schemeClr val="lt1"/>
+          </a:fontRef>
+        </p:style>
+        <p:txBody>
+          <a:bodyPr rtlCol="0" anchor="ctr"/>
+          <a:lstStyle/>
+          <a:p>
+            <a:pPr algn="ctr"/>
+          </a:p>
+        </p:txBody>
+      </p:sp>
+      <p:sp>
+        <p:nvSpPr>
+          <p:cNvPr id="33" name="TextBox 32"/>
+          <p:cNvSpPr txBox="1"/>
+          <p:nvPr/>
+        </p:nvSpPr>
+        <p:spPr>
+          <a:xfrm>
+            <a:off x="6515100" y="2343150"/>
+            <a:ext cx="1809750" cy="1143000"/>
+          </a:xfrm>
+          <a:prstGeom prst="rect">
+            <a:avLst/>
+          </a:prstGeom>
+          <a:noFill/>
+        </p:spPr>
+        <p:txBody>
+          <a:bodyPr wrap="none" anchor="ctr">
+            <a:spAutoFit/>
+          </a:bodyPr>
+          <a:lstStyle/>
+          <a:p>
+            <a:pPr algn="l">
+              <a:lnSpc>
+                <a:spcPct val="115000"/>
+              </a:lnSpc>
+            </a:pPr>
+            <a:r>
+              <a:rPr sz="1300" b="1">
+                <a:solidFill>
+                  <a:srgbClr val="0B1D3A"/>
+                </a:solidFill>
+                <a:latin typeface="PingFang SC"/>
+              </a:rPr>
+              <a:t>SMTP 网关</a:t>
+            </a:r>
+          </a:p>
+        </p:txBody>
+      </p:sp>
+      <p:sp>
+        <p:nvSpPr>
+          <p:cNvPr id="34" name="Rounded Rectangle 33"/>
+          <p:cNvSpPr/>
+          <p:nvPr/>
+        </p:nvSpPr>
+        <p:spPr>
+          <a:xfrm>
+            <a:off x="8591550" y="2343150"/>
+            <a:ext cx="2076450" cy="1143000"/>
+          </a:xfrm>
+          <a:prstGeom prst="roundRect">
+            <a:avLst>
+              <a:gd name="adj" fmla="val 8000"/>
+            </a:avLst>
+          </a:prstGeom>
+          <a:solidFill>
+            <a:srgbClr val="FFFFFF"/>
+          </a:solidFill>
+          <a:ln w="12700">
+            <a:solidFill>
+              <a:srgbClr val="14B8A6"/>
+            </a:solidFill>
+          </a:ln>
+          <a:effectLst/>
+        </p:spPr>
+        <p:style>
+          <a:lnRef idx="1">
+            <a:schemeClr val="accent1"/>
+          </a:lnRef>
+          <a:fillRef idx="3">
+            <a:schemeClr val="accent1"/>
+          </a:fillRef>
+          <a:effectRef idx="2">
+            <a:schemeClr val="accent1"/>
+          </a:effectRef>
+          <a:fontRef idx="minor">
+            <a:schemeClr val="lt1"/>
+          </a:fontRef>
+        </p:style>
+        <p:txBody>
+          <a:bodyPr rtlCol="0" anchor="ctr"/>
+          <a:lstStyle/>
+          <a:p>
+            <a:pPr algn="ctr"/>
+          </a:p>
+        </p:txBody>
+      </p:sp>
+      <p:sp>
+        <p:nvSpPr>
+          <p:cNvPr id="35" name="Rectangle 34"/>
+          <p:cNvSpPr/>
+          <p:nvPr/>
+        </p:nvSpPr>
+        <p:spPr>
+          <a:xfrm>
+            <a:off x="8591550" y="2343150"/>
+            <a:ext cx="47625" cy="1143000"/>
+          </a:xfrm>
+          <a:prstGeom prst="rect">
+            <a:avLst/>
+          </a:prstGeom>
+          <a:solidFill>
+            <a:srgbClr val="14B8A6"/>
+          </a:solidFill>
+          <a:ln>
+            <a:noFill/>
+          </a:ln>
+          <a:effectLst/>
+        </p:spPr>
+        <p:style>
+          <a:lnRef idx="1">
+            <a:schemeClr val="accent1"/>
+          </a:lnRef>
+          <a:fillRef idx="3">
+            <a:schemeClr val="accent1"/>
+          </a:fillRef>
+          <a:effectRef idx="2">
+            <a:schemeClr val="accent1"/>
+          </a:effectRef>
+          <a:fontRef idx="minor">
+            <a:schemeClr val="lt1"/>
+          </a:fontRef>
+        </p:style>
+        <p:txBody>
+          <a:bodyPr rtlCol="0" anchor="ctr"/>
+          <a:lstStyle/>
+          <a:p>
+            <a:pPr algn="ctr"/>
+          </a:p>
+        </p:txBody>
+      </p:sp>
+      <p:sp>
+        <p:nvSpPr>
+          <p:cNvPr id="36" name="TextBox 35"/>
+          <p:cNvSpPr txBox="1"/>
+          <p:nvPr/>
+        </p:nvSpPr>
+        <p:spPr>
+          <a:xfrm>
+            <a:off x="8743950" y="2343150"/>
+            <a:ext cx="1809750" cy="1143000"/>
+          </a:xfrm>
+          <a:prstGeom prst="rect">
+            <a:avLst/>
+          </a:prstGeom>
+          <a:noFill/>
+        </p:spPr>
+        <p:txBody>
+          <a:bodyPr wrap="none" anchor="ctr">
+            <a:spAutoFit/>
+          </a:bodyPr>
+          <a:lstStyle/>
+          <a:p>
+            <a:pPr algn="l">
+              <a:lnSpc>
+                <a:spcPct val="115000"/>
+              </a:lnSpc>
+            </a:pPr>
+            <a:r>
+              <a:rPr sz="1300" b="1">
+                <a:solidFill>
+                  <a:srgbClr val="0B1D3A"/>
+                </a:solidFill>
+                <a:latin typeface="PingFang SC"/>
+              </a:rPr>
+              <a:t>CI Runner</a:t>
+            </a:r>
+          </a:p>
+        </p:txBody>
+      </p:sp>
+      <p:cxnSp>
+        <p:nvCxnSpPr>
+          <p:cNvPr id="37" name="Connector 36"/>
+          <p:cNvCxnSpPr/>
+          <p:nvPr/>
+        </p:nvCxnSpPr>
+        <p:spPr>
+          <a:xfrm>
+            <a:off x="6096000" y="3543300"/>
+            <a:ext cx="0" cy="152400"/>
+          </a:xfrm>
+          <a:prstGeom prst="line">
+            <a:avLst/>
+          </a:prstGeom>
+          <a:ln w="17780">
+            <a:solidFill>
+              <a:srgbClr val="475569"/>
+            </a:solidFill>
+          </a:ln>
+        </p:spPr>
+        <p:style>
+          <a:lnRef idx="2">
+            <a:schemeClr val="accent1"/>
+          </a:lnRef>
+          <a:fillRef idx="0">
+            <a:schemeClr val="accent1"/>
+          </a:fillRef>
+          <a:effectRef idx="1">
+            <a:schemeClr val="accent1"/>
+          </a:effectRef>
+          <a:fontRef idx="minor">
+            <a:schemeClr val="tx1"/>
+          </a:fontRef>
+        </p:style>
+      </p:cxnSp>
+      <p:sp>
+        <p:nvSpPr>
+          <p:cNvPr id="38" name="Isosceles Triangle 37"/>
+          <p:cNvSpPr/>
+          <p:nvPr/>
+        </p:nvSpPr>
+        <p:spPr>
+          <a:xfrm rot="10800000">
+            <a:off x="6053138" y="3609976"/>
+            <a:ext cx="85725" cy="85725"/>
+          </a:xfrm>
+          <a:prstGeom prst="triangle">
+            <a:avLst/>
+          </a:prstGeom>
+          <a:solidFill>
+            <a:srgbClr val="475569"/>
+          </a:solidFill>
+          <a:ln>
+            <a:noFill/>
+          </a:ln>
+          <a:effectLst/>
+        </p:spPr>
+        <p:style>
+          <a:lnRef idx="1">
+            <a:schemeClr val="accent1"/>
+          </a:lnRef>
+          <a:fillRef idx="3">
+            <a:schemeClr val="accent1"/>
+          </a:fillRef>
+          <a:effectRef idx="2">
+            <a:schemeClr val="accent1"/>
+          </a:effectRef>
+          <a:fontRef idx="minor">
+            <a:schemeClr val="lt1"/>
+          </a:fontRef>
+        </p:style>
+        <p:txBody>
+          <a:bodyPr rtlCol="0" anchor="ctr"/>
+          <a:lstStyle/>
+          <a:p>
+            <a:pPr algn="ctr"/>
+          </a:p>
+        </p:txBody>
+      </p:sp>
+      <p:sp>
+        <p:nvSpPr>
+          <p:cNvPr id="39" name="Rounded Rectangle 38"/>
+          <p:cNvSpPr/>
+          <p:nvPr/>
+        </p:nvSpPr>
+        <p:spPr>
+          <a:xfrm>
+            <a:off x="5743575" y="3524250"/>
+            <a:ext cx="704850" cy="171450"/>
+          </a:xfrm>
+          <a:prstGeom prst="roundRect">
+            <a:avLst>
+              <a:gd name="adj" fmla="val 8000"/>
+            </a:avLst>
+          </a:prstGeom>
+          <a:solidFill>
+            <a:srgbClr val="FFFFFF"/>
+          </a:solidFill>
+          <a:ln w="12700">
+            <a:solidFill>
+              <a:srgbClr val="DDE5EE"/>
+            </a:solidFill>
+          </a:ln>
+          <a:effectLst/>
+        </p:spPr>
+        <p:style>
+          <a:lnRef idx="1">
+            <a:schemeClr val="accent1"/>
+          </a:lnRef>
+          <a:fillRef idx="3">
+            <a:schemeClr val="accent1"/>
+          </a:fillRef>
+          <a:effectRef idx="2">
+            <a:schemeClr val="accent1"/>
+          </a:effectRef>
+          <a:fontRef idx="minor">
+            <a:schemeClr val="lt1"/>
+          </a:fontRef>
+        </p:style>
+        <p:txBody>
+          <a:bodyPr rtlCol="0" anchor="ctr"/>
+          <a:lstStyle/>
+          <a:p>
+            <a:pPr algn="ctr"/>
+          </a:p>
+        </p:txBody>
+      </p:sp>
+      <p:sp>
+        <p:nvSpPr>
+          <p:cNvPr id="40" name="TextBox 39"/>
+          <p:cNvSpPr txBox="1"/>
+          <p:nvPr/>
+        </p:nvSpPr>
+        <p:spPr>
+          <a:xfrm>
+            <a:off x="5743575" y="3524250"/>
+            <a:ext cx="704850" cy="171450"/>
+          </a:xfrm>
+          <a:prstGeom prst="rect">
+            <a:avLst/>
+          </a:prstGeom>
+          <a:noFill/>
+        </p:spPr>
+        <p:txBody>
+          <a:bodyPr wrap="square" anchor="ctr">
+            <a:spAutoFit/>
+          </a:bodyPr>
+          <a:lstStyle/>
+          <a:p>
+            <a:pPr algn="ctr">
+              <a:lnSpc>
+                <a:spcPct val="100000"/>
+              </a:lnSpc>
+            </a:pPr>
+            <a:r>
+              <a:rPr sz="1100" b="1">
+                <a:solidFill>
+                  <a:srgbClr val="0B1D3A"/>
+                </a:solidFill>
+                <a:latin typeface="PingFang SC"/>
+              </a:rPr>
+              <a:t>连接</a:t>
+            </a:r>
+          </a:p>
+        </p:txBody>
+      </p:sp>
+      <p:sp>
+        <p:nvSpPr>
+          <p:cNvPr id="41" name="Rounded Rectangle 40"/>
+          <p:cNvSpPr/>
+          <p:nvPr/>
+        </p:nvSpPr>
+        <p:spPr>
+          <a:xfrm>
+            <a:off x="1847850" y="3695700"/>
+            <a:ext cx="8877300" cy="1219200"/>
+          </a:xfrm>
+          <a:prstGeom prst="roundRect">
+            <a:avLst>
+              <a:gd name="adj" fmla="val 8000"/>
+            </a:avLst>
+          </a:prstGeom>
+          <a:solidFill>
+            <a:srgbClr val="F1F5F9"/>
+          </a:solidFill>
+          <a:ln>
+            <a:noFill/>
+          </a:ln>
+          <a:effectLst/>
+        </p:spPr>
+        <p:style>
+          <a:lnRef idx="1">
+            <a:schemeClr val="accent1"/>
+          </a:lnRef>
+          <a:fillRef idx="3">
+            <a:schemeClr val="accent1"/>
+          </a:fillRef>
+          <a:effectRef idx="2">
+            <a:schemeClr val="accent1"/>
+          </a:effectRef>
+          <a:fontRef idx="minor">
+            <a:schemeClr val="lt1"/>
+          </a:fontRef>
+        </p:style>
+        <p:txBody>
+          <a:bodyPr rtlCol="0" anchor="ctr"/>
+          <a:lstStyle/>
+          <a:p>
+            <a:pPr algn="ctr"/>
+          </a:p>
+        </p:txBody>
+      </p:sp>
+      <p:sp>
+        <p:nvSpPr>
+          <p:cNvPr id="42" name="TextBox 41"/>
+          <p:cNvSpPr txBox="1"/>
+          <p:nvPr/>
+        </p:nvSpPr>
+        <p:spPr>
+          <a:xfrm>
+            <a:off x="1962150" y="3467100"/>
+            <a:ext cx="1905000" cy="209550"/>
+          </a:xfrm>
+          <a:prstGeom prst="rect">
+            <a:avLst/>
+          </a:prstGeom>
+          <a:noFill/>
+        </p:spPr>
+        <p:txBody>
+          <a:bodyPr wrap="square" anchor="ctr">
+            <a:spAutoFit/>
+          </a:bodyPr>
+          <a:lstStyle/>
+          <a:p>
+            <a:pPr algn="l">
+              <a:lnSpc>
+                <a:spcPct val="100000"/>
+              </a:lnSpc>
+            </a:pPr>
+            <a:r>
+              <a:rPr sz="1100" b="1">
+                <a:solidFill>
+                  <a:srgbClr val="8B5CF6"/>
+                </a:solidFill>
+                <a:latin typeface="PingFang SC"/>
+              </a:rPr>
+              <a:t>L3</a:t>
+            </a:r>
+          </a:p>
+        </p:txBody>
+      </p:sp>
+      <p:sp>
+        <p:nvSpPr>
+          <p:cNvPr id="43" name="Rounded Rectangle 42"/>
+          <p:cNvSpPr/>
+          <p:nvPr/>
+        </p:nvSpPr>
+        <p:spPr>
+          <a:xfrm>
+            <a:off x="1905000" y="3733800"/>
+            <a:ext cx="2819400" cy="1143000"/>
+          </a:xfrm>
+          <a:prstGeom prst="roundRect">
+            <a:avLst>
+              <a:gd name="adj" fmla="val 8000"/>
+            </a:avLst>
+          </a:prstGeom>
+          <a:solidFill>
+            <a:srgbClr val="FFFFFF"/>
+          </a:solidFill>
+          <a:ln w="12700">
+            <a:solidFill>
+              <a:srgbClr val="8B5CF6"/>
+            </a:solidFill>
+          </a:ln>
+          <a:effectLst/>
+        </p:spPr>
+        <p:style>
+          <a:lnRef idx="1">
+            <a:schemeClr val="accent1"/>
+          </a:lnRef>
+          <a:fillRef idx="3">
+            <a:schemeClr val="accent1"/>
+          </a:fillRef>
+          <a:effectRef idx="2">
+            <a:schemeClr val="accent1"/>
+          </a:effectRef>
+          <a:fontRef idx="minor">
+            <a:schemeClr val="lt1"/>
+          </a:fontRef>
+        </p:style>
+        <p:txBody>
+          <a:bodyPr rtlCol="0" anchor="ctr"/>
+          <a:lstStyle/>
+          <a:p>
+            <a:pPr algn="ctr"/>
+          </a:p>
+        </p:txBody>
+      </p:sp>
+      <p:sp>
+        <p:nvSpPr>
+          <p:cNvPr id="44" name="Rectangle 43"/>
+          <p:cNvSpPr/>
+          <p:nvPr/>
+        </p:nvSpPr>
+        <p:spPr>
+          <a:xfrm>
+            <a:off x="1905000" y="3733800"/>
+            <a:ext cx="47625" cy="1143000"/>
+          </a:xfrm>
+          <a:prstGeom prst="rect">
+            <a:avLst/>
+          </a:prstGeom>
+          <a:solidFill>
+            <a:srgbClr val="8B5CF6"/>
+          </a:solidFill>
+          <a:ln>
+            <a:noFill/>
+          </a:ln>
+          <a:effectLst/>
+        </p:spPr>
+        <p:style>
+          <a:lnRef idx="1">
+            <a:schemeClr val="accent1"/>
+          </a:lnRef>
+          <a:fillRef idx="3">
+            <a:schemeClr val="accent1"/>
+          </a:fillRef>
+          <a:effectRef idx="2">
+            <a:schemeClr val="accent1"/>
+          </a:effectRef>
+          <a:fontRef idx="minor">
+            <a:schemeClr val="lt1"/>
+          </a:fontRef>
+        </p:style>
+        <p:txBody>
+          <a:bodyPr rtlCol="0" anchor="ctr"/>
+          <a:lstStyle/>
+          <a:p>
+            <a:pPr algn="ctr"/>
+          </a:p>
+        </p:txBody>
+      </p:sp>
+      <p:sp>
+        <p:nvSpPr>
+          <p:cNvPr id="45" name="TextBox 44"/>
+          <p:cNvSpPr txBox="1"/>
+          <p:nvPr/>
+        </p:nvSpPr>
+        <p:spPr>
+          <a:xfrm>
+            <a:off x="2057400" y="3733800"/>
+            <a:ext cx="2552700" cy="1143000"/>
+          </a:xfrm>
+          <a:prstGeom prst="rect">
+            <a:avLst/>
+          </a:prstGeom>
+          <a:noFill/>
+        </p:spPr>
+        <p:txBody>
+          <a:bodyPr wrap="none" anchor="ctr">
+            <a:spAutoFit/>
+          </a:bodyPr>
+          <a:lstStyle/>
+          <a:p>
+            <a:pPr algn="l">
+              <a:lnSpc>
+                <a:spcPct val="115000"/>
+              </a:lnSpc>
+            </a:pPr>
+            <a:r>
+              <a:rPr sz="1300" b="1">
+                <a:solidFill>
+                  <a:srgbClr val="0B1D3A"/>
+                </a:solidFill>
+                <a:latin typeface="PingFang SC"/>
+              </a:rPr>
+              <a:t>凭据层:DB 密钥</a:t>
+            </a:r>
+          </a:p>
+        </p:txBody>
+      </p:sp>
+      <p:sp>
+        <p:nvSpPr>
+          <p:cNvPr id="46" name="Rounded Rectangle 45"/>
+          <p:cNvSpPr/>
+          <p:nvPr/>
+        </p:nvSpPr>
+        <p:spPr>
+          <a:xfrm>
+            <a:off x="4876800" y="3733800"/>
+            <a:ext cx="2819400" cy="1143000"/>
+          </a:xfrm>
+          <a:prstGeom prst="roundRect">
+            <a:avLst>
+              <a:gd name="adj" fmla="val 8000"/>
+            </a:avLst>
+          </a:prstGeom>
+          <a:solidFill>
+            <a:srgbClr val="FFFFFF"/>
+          </a:solidFill>
+          <a:ln w="12700">
+            <a:solidFill>
+              <a:srgbClr val="8B5CF6"/>
+            </a:solidFill>
+          </a:ln>
+          <a:effectLst/>
+        </p:spPr>
+        <p:style>
+          <a:lnRef idx="1">
+            <a:schemeClr val="accent1"/>
+          </a:lnRef>
+          <a:fillRef idx="3">
+            <a:schemeClr val="accent1"/>
+          </a:fillRef>
+          <a:effectRef idx="2">
+            <a:schemeClr val="accent1"/>
+          </a:effectRef>
+          <a:fontRef idx="minor">
+            <a:schemeClr val="lt1"/>
+          </a:fontRef>
+        </p:style>
+        <p:txBody>
+          <a:bodyPr rtlCol="0" anchor="ctr"/>
+          <a:lstStyle/>
+          <a:p>
+            <a:pPr algn="ctr"/>
+          </a:p>
+        </p:txBody>
+      </p:sp>
+      <p:sp>
+        <p:nvSpPr>
+          <p:cNvPr id="47" name="Rectangle 46"/>
+          <p:cNvSpPr/>
+          <p:nvPr/>
+        </p:nvSpPr>
+        <p:spPr>
+          <a:xfrm>
+            <a:off x="4876800" y="3733800"/>
+            <a:ext cx="47625" cy="1143000"/>
+          </a:xfrm>
+          <a:prstGeom prst="rect">
+            <a:avLst/>
+          </a:prstGeom>
+          <a:solidFill>
+            <a:srgbClr val="8B5CF6"/>
+          </a:solidFill>
+          <a:ln>
+            <a:noFill/>
+          </a:ln>
+          <a:effectLst/>
+        </p:spPr>
+        <p:style>
+          <a:lnRef idx="1">
+            <a:schemeClr val="accent1"/>
+          </a:lnRef>
+          <a:fillRef idx="3">
+            <a:schemeClr val="accent1"/>
+          </a:fillRef>
+          <a:effectRef idx="2">
+            <a:schemeClr val="accent1"/>
+          </a:effectRef>
+          <a:fontRef idx="minor">
+            <a:schemeClr val="lt1"/>
+          </a:fontRef>
+        </p:style>
+        <p:txBody>
+          <a:bodyPr rtlCol="0" anchor="ctr"/>
+          <a:lstStyle/>
+          <a:p>
+            <a:pPr algn="ctr"/>
+          </a:p>
+        </p:txBody>
+      </p:sp>
+      <p:sp>
+        <p:nvSpPr>
+          <p:cNvPr id="48" name="TextBox 47"/>
+          <p:cNvSpPr txBox="1"/>
+          <p:nvPr/>
+        </p:nvSpPr>
+        <p:spPr>
+          <a:xfrm>
+            <a:off x="5029200" y="3733800"/>
+            <a:ext cx="2552700" cy="1143000"/>
+          </a:xfrm>
+          <a:prstGeom prst="rect">
+            <a:avLst/>
+          </a:prstGeom>
+          <a:noFill/>
+        </p:spPr>
+        <p:txBody>
+          <a:bodyPr wrap="none" anchor="ctr">
+            <a:spAutoFit/>
+          </a:bodyPr>
+          <a:lstStyle/>
+          <a:p>
+            <a:pPr algn="l">
+              <a:lnSpc>
+                <a:spcPct val="115000"/>
+              </a:lnSpc>
+            </a:pPr>
+            <a:r>
+              <a:rPr sz="1300" b="1">
+                <a:solidFill>
+                  <a:srgbClr val="0B1D3A"/>
+                </a:solidFill>
+                <a:latin typeface="PingFang SC"/>
+              </a:rPr>
+              <a:t>API Key</a:t>
+            </a:r>
+          </a:p>
+        </p:txBody>
+      </p:sp>
+      <p:sp>
+        <p:nvSpPr>
+          <p:cNvPr id="49" name="Rounded Rectangle 48"/>
+          <p:cNvSpPr/>
+          <p:nvPr/>
+        </p:nvSpPr>
+        <p:spPr>
+          <a:xfrm>
+            <a:off x="7848600" y="3733800"/>
+            <a:ext cx="2819400" cy="1143000"/>
+          </a:xfrm>
+          <a:prstGeom prst="roundRect">
+            <a:avLst>
+              <a:gd name="adj" fmla="val 8000"/>
+            </a:avLst>
+          </a:prstGeom>
+          <a:solidFill>
+            <a:srgbClr val="FFFFFF"/>
+          </a:solidFill>
+          <a:ln w="12700">
+            <a:solidFill>
+              <a:srgbClr val="8B5CF6"/>
+            </a:solidFill>
+          </a:ln>
+          <a:effectLst/>
+        </p:spPr>
+        <p:style>
+          <a:lnRef idx="1">
+            <a:schemeClr val="accent1"/>
+          </a:lnRef>
+          <a:fillRef idx="3">
+            <a:schemeClr val="accent1"/>
+          </a:fillRef>
+          <a:effectRef idx="2">
+            <a:schemeClr val="accent1"/>
+          </a:effectRef>
+          <a:fontRef idx="minor">
+            <a:schemeClr val="lt1"/>
+          </a:fontRef>
+        </p:style>
+        <p:txBody>
+          <a:bodyPr rtlCol="0" anchor="ctr"/>
+          <a:lstStyle/>
+          <a:p>
+            <a:pPr algn="ctr"/>
+          </a:p>
+        </p:txBody>
+      </p:sp>
+      <p:sp>
+        <p:nvSpPr>
+          <p:cNvPr id="50" name="Rectangle 49"/>
+          <p:cNvSpPr/>
+          <p:nvPr/>
+        </p:nvSpPr>
+        <p:spPr>
+          <a:xfrm>
+            <a:off x="7848600" y="3733800"/>
+            <a:ext cx="47625" cy="1143000"/>
+          </a:xfrm>
+          <a:prstGeom prst="rect">
+            <a:avLst/>
+          </a:prstGeom>
+          <a:solidFill>
+            <a:srgbClr val="8B5CF6"/>
+          </a:solidFill>
+          <a:ln>
+            <a:noFill/>
+          </a:ln>
+          <a:effectLst/>
+        </p:spPr>
+        <p:style>
+          <a:lnRef idx="1">
+            <a:schemeClr val="accent1"/>
+          </a:lnRef>
+          <a:fillRef idx="3">
+            <a:schemeClr val="accent1"/>
+          </a:fillRef>
+          <a:effectRef idx="2">
+            <a:schemeClr val="accent1"/>
+          </a:effectRef>
+          <a:fontRef idx="minor">
+            <a:schemeClr val="lt1"/>
+          </a:fontRef>
+        </p:style>
+        <p:txBody>
+          <a:bodyPr rtlCol="0" anchor="ctr"/>
+          <a:lstStyle/>
+          <a:p>
+            <a:pPr algn="ctr"/>
+          </a:p>
+        </p:txBody>
+      </p:sp>
+      <p:sp>
+        <p:nvSpPr>
+          <p:cNvPr id="51" name="TextBox 50"/>
+          <p:cNvSpPr txBox="1"/>
+          <p:nvPr/>
+        </p:nvSpPr>
+        <p:spPr>
+          <a:xfrm>
+            <a:off x="8001000" y="3733800"/>
+            <a:ext cx="2552700" cy="1143000"/>
+          </a:xfrm>
+          <a:prstGeom prst="rect">
+            <a:avLst/>
+          </a:prstGeom>
+          <a:noFill/>
+        </p:spPr>
+        <p:txBody>
+          <a:bodyPr wrap="none" anchor="ctr">
+            <a:spAutoFit/>
+          </a:bodyPr>
+          <a:lstStyle/>
+          <a:p>
+            <a:pPr algn="l">
+              <a:lnSpc>
+                <a:spcPct val="115000"/>
+              </a:lnSpc>
+            </a:pPr>
+            <a:r>
+              <a:rPr sz="1300" b="1">
+                <a:solidFill>
+                  <a:srgbClr val="0B1D3A"/>
+                </a:solidFill>
+                <a:latin typeface="PingFang SC"/>
+              </a:rPr>
+              <a:t>SMTP Token</a:t>
+            </a:r>
+          </a:p>
+        </p:txBody>
+      </p:sp>
+      <p:sp>
+        <p:nvSpPr>
+          <p:cNvPr id="52" name="TextBox 51"/>
+          <p:cNvSpPr txBox="1"/>
+          <p:nvPr/>
+        </p:nvSpPr>
+        <p:spPr>
+          <a:xfrm>
+            <a:off x="10287000" y="6534150"/>
+            <a:ext cx="1619250" cy="266700"/>
           </a:xfrm>
           <a:prstGeom prst="rect">
             <a:avLst/>
@@ -8590,1860 +10579,6 @@
               </a:lnSpc>
             </a:pPr>
             <a:r>
-              <a:rPr sz="1100" b="0">
-                <a:solidFill>
-                  <a:srgbClr val="94A3B8"/>
-                </a:solidFill>
-                <a:latin typeface="PingFang SC"/>
-              </a:rPr>
-              <a:t>缺依赖→启动即自动禁用</a:t>
-            </a:r>
-          </a:p>
-        </p:txBody>
-      </p:sp>
-      <p:sp>
-        <p:nvSpPr>
-          <p:cNvPr id="6" name="Rounded Rectangle 5"/>
-          <p:cNvSpPr/>
-          <p:nvPr/>
-        </p:nvSpPr>
-        <p:spPr>
-          <a:xfrm>
-            <a:off x="1847850" y="914400"/>
-            <a:ext cx="8877300" cy="1219200"/>
-          </a:xfrm>
-          <a:prstGeom prst="roundRect">
-            <a:avLst>
-              <a:gd name="adj" fmla="val 8000"/>
-            </a:avLst>
-          </a:prstGeom>
-          <a:solidFill>
-            <a:srgbClr val="F1F5F9"/>
-          </a:solidFill>
-          <a:ln>
-            <a:noFill/>
-          </a:ln>
-          <a:effectLst/>
-        </p:spPr>
-        <p:style>
-          <a:lnRef idx="1">
-            <a:schemeClr val="accent1"/>
-          </a:lnRef>
-          <a:fillRef idx="3">
-            <a:schemeClr val="accent1"/>
-          </a:fillRef>
-          <a:effectRef idx="2">
-            <a:schemeClr val="accent1"/>
-          </a:effectRef>
-          <a:fontRef idx="minor">
-            <a:schemeClr val="lt1"/>
-          </a:fontRef>
-        </p:style>
-        <p:txBody>
-          <a:bodyPr rtlCol="0" anchor="ctr"/>
-          <a:lstStyle/>
-          <a:p>
-            <a:pPr algn="ctr"/>
-          </a:p>
-        </p:txBody>
-      </p:sp>
-      <p:sp>
-        <p:nvSpPr>
-          <p:cNvPr id="7" name="Rounded Rectangle 6"/>
-          <p:cNvSpPr/>
-          <p:nvPr/>
-        </p:nvSpPr>
-        <p:spPr>
-          <a:xfrm>
-            <a:off x="1905000" y="952500"/>
-            <a:ext cx="2076450" cy="1143000"/>
-          </a:xfrm>
-          <a:prstGeom prst="roundRect">
-            <a:avLst>
-              <a:gd name="adj" fmla="val 8000"/>
-            </a:avLst>
-          </a:prstGeom>
-          <a:solidFill>
-            <a:srgbClr val="FFFFFF"/>
-          </a:solidFill>
-          <a:ln w="12700">
-            <a:solidFill>
-              <a:srgbClr val="2563EB"/>
-            </a:solidFill>
-          </a:ln>
-          <a:effectLst/>
-        </p:spPr>
-        <p:style>
-          <a:lnRef idx="1">
-            <a:schemeClr val="accent1"/>
-          </a:lnRef>
-          <a:fillRef idx="3">
-            <a:schemeClr val="accent1"/>
-          </a:fillRef>
-          <a:effectRef idx="2">
-            <a:schemeClr val="accent1"/>
-          </a:effectRef>
-          <a:fontRef idx="minor">
-            <a:schemeClr val="lt1"/>
-          </a:fontRef>
-        </p:style>
-        <p:txBody>
-          <a:bodyPr rtlCol="0" anchor="ctr"/>
-          <a:lstStyle/>
-          <a:p>
-            <a:pPr algn="ctr"/>
-          </a:p>
-        </p:txBody>
-      </p:sp>
-      <p:sp>
-        <p:nvSpPr>
-          <p:cNvPr id="8" name="Rectangle 7"/>
-          <p:cNvSpPr/>
-          <p:nvPr/>
-        </p:nvSpPr>
-        <p:spPr>
-          <a:xfrm>
-            <a:off x="1905000" y="952500"/>
-            <a:ext cx="47625" cy="1143000"/>
-          </a:xfrm>
-          <a:prstGeom prst="rect">
-            <a:avLst/>
-          </a:prstGeom>
-          <a:solidFill>
-            <a:srgbClr val="2563EB"/>
-          </a:solidFill>
-          <a:ln>
-            <a:noFill/>
-          </a:ln>
-          <a:effectLst/>
-        </p:spPr>
-        <p:style>
-          <a:lnRef idx="1">
-            <a:schemeClr val="accent1"/>
-          </a:lnRef>
-          <a:fillRef idx="3">
-            <a:schemeClr val="accent1"/>
-          </a:fillRef>
-          <a:effectRef idx="2">
-            <a:schemeClr val="accent1"/>
-          </a:effectRef>
-          <a:fontRef idx="minor">
-            <a:schemeClr val="lt1"/>
-          </a:fontRef>
-        </p:style>
-        <p:txBody>
-          <a:bodyPr rtlCol="0" anchor="ctr"/>
-          <a:lstStyle/>
-          <a:p>
-            <a:pPr algn="ctr"/>
-          </a:p>
-        </p:txBody>
-      </p:sp>
-      <p:sp>
-        <p:nvSpPr>
-          <p:cNvPr id="9" name="TextBox 8"/>
-          <p:cNvSpPr txBox="1"/>
-          <p:nvPr/>
-        </p:nvSpPr>
-        <p:spPr>
-          <a:xfrm>
-            <a:off x="2038350" y="952500"/>
-            <a:ext cx="1847850" cy="1143000"/>
-          </a:xfrm>
-          <a:prstGeom prst="rect">
-            <a:avLst/>
-          </a:prstGeom>
-          <a:noFill/>
-        </p:spPr>
-        <p:txBody>
-          <a:bodyPr wrap="square" anchor="ctr">
-            <a:spAutoFit/>
-          </a:bodyPr>
-          <a:lstStyle/>
-          <a:p>
-            <a:pPr algn="l">
-              <a:lnSpc>
-                <a:spcPct val="100000"/>
-              </a:lnSpc>
-            </a:pPr>
-            <a:r>
-              <a:rPr sz="1200" b="1">
-                <a:solidFill>
-                  <a:srgbClr val="475569"/>
-                </a:solidFill>
-                <a:latin typeface="PingFang SC"/>
-              </a:rPr>
-              <a:t>工具层:search_code</a:t>
-            </a:r>
-          </a:p>
-        </p:txBody>
-      </p:sp>
-      <p:sp>
-        <p:nvSpPr>
-          <p:cNvPr id="10" name="Rounded Rectangle 9"/>
-          <p:cNvSpPr/>
-          <p:nvPr/>
-        </p:nvSpPr>
-        <p:spPr>
-          <a:xfrm>
-            <a:off x="4133850" y="952500"/>
-            <a:ext cx="2076450" cy="1143000"/>
-          </a:xfrm>
-          <a:prstGeom prst="roundRect">
-            <a:avLst>
-              <a:gd name="adj" fmla="val 8000"/>
-            </a:avLst>
-          </a:prstGeom>
-          <a:solidFill>
-            <a:srgbClr val="FFFFFF"/>
-          </a:solidFill>
-          <a:ln w="12700">
-            <a:solidFill>
-              <a:srgbClr val="2563EB"/>
-            </a:solidFill>
-          </a:ln>
-          <a:effectLst/>
-        </p:spPr>
-        <p:style>
-          <a:lnRef idx="1">
-            <a:schemeClr val="accent1"/>
-          </a:lnRef>
-          <a:fillRef idx="3">
-            <a:schemeClr val="accent1"/>
-          </a:fillRef>
-          <a:effectRef idx="2">
-            <a:schemeClr val="accent1"/>
-          </a:effectRef>
-          <a:fontRef idx="minor">
-            <a:schemeClr val="lt1"/>
-          </a:fontRef>
-        </p:style>
-        <p:txBody>
-          <a:bodyPr rtlCol="0" anchor="ctr"/>
-          <a:lstStyle/>
-          <a:p>
-            <a:pPr algn="ctr"/>
-          </a:p>
-        </p:txBody>
-      </p:sp>
-      <p:sp>
-        <p:nvSpPr>
-          <p:cNvPr id="11" name="Rectangle 10"/>
-          <p:cNvSpPr/>
-          <p:nvPr/>
-        </p:nvSpPr>
-        <p:spPr>
-          <a:xfrm>
-            <a:off x="4133850" y="952500"/>
-            <a:ext cx="47625" cy="1143000"/>
-          </a:xfrm>
-          <a:prstGeom prst="rect">
-            <a:avLst/>
-          </a:prstGeom>
-          <a:solidFill>
-            <a:srgbClr val="2563EB"/>
-          </a:solidFill>
-          <a:ln>
-            <a:noFill/>
-          </a:ln>
-          <a:effectLst/>
-        </p:spPr>
-        <p:style>
-          <a:lnRef idx="1">
-            <a:schemeClr val="accent1"/>
-          </a:lnRef>
-          <a:fillRef idx="3">
-            <a:schemeClr val="accent1"/>
-          </a:fillRef>
-          <a:effectRef idx="2">
-            <a:schemeClr val="accent1"/>
-          </a:effectRef>
-          <a:fontRef idx="minor">
-            <a:schemeClr val="lt1"/>
-          </a:fontRef>
-        </p:style>
-        <p:txBody>
-          <a:bodyPr rtlCol="0" anchor="ctr"/>
-          <a:lstStyle/>
-          <a:p>
-            <a:pPr algn="ctr"/>
-          </a:p>
-        </p:txBody>
-      </p:sp>
-      <p:sp>
-        <p:nvSpPr>
-          <p:cNvPr id="12" name="TextBox 11"/>
-          <p:cNvSpPr txBox="1"/>
-          <p:nvPr/>
-        </p:nvSpPr>
-        <p:spPr>
-          <a:xfrm>
-            <a:off x="4267200" y="952500"/>
-            <a:ext cx="1847850" cy="1143000"/>
-          </a:xfrm>
-          <a:prstGeom prst="rect">
-            <a:avLst/>
-          </a:prstGeom>
-          <a:noFill/>
-        </p:spPr>
-        <p:txBody>
-          <a:bodyPr wrap="square" anchor="ctr">
-            <a:spAutoFit/>
-          </a:bodyPr>
-          <a:lstStyle/>
-          <a:p>
-            <a:pPr algn="l">
-              <a:lnSpc>
-                <a:spcPct val="100000"/>
-              </a:lnSpc>
-            </a:pPr>
-            <a:r>
-              <a:rPr sz="1200" b="1">
-                <a:solidFill>
-                  <a:srgbClr val="475569"/>
-                </a:solidFill>
-                <a:latin typeface="PingFang SC"/>
-              </a:rPr>
-              <a:t>query_db</a:t>
-            </a:r>
-          </a:p>
-        </p:txBody>
-      </p:sp>
-      <p:sp>
-        <p:nvSpPr>
-          <p:cNvPr id="13" name="Rounded Rectangle 12"/>
-          <p:cNvSpPr/>
-          <p:nvPr/>
-        </p:nvSpPr>
-        <p:spPr>
-          <a:xfrm>
-            <a:off x="6362700" y="952500"/>
-            <a:ext cx="2076450" cy="1143000"/>
-          </a:xfrm>
-          <a:prstGeom prst="roundRect">
-            <a:avLst>
-              <a:gd name="adj" fmla="val 8000"/>
-            </a:avLst>
-          </a:prstGeom>
-          <a:solidFill>
-            <a:srgbClr val="FFFFFF"/>
-          </a:solidFill>
-          <a:ln w="12700">
-            <a:solidFill>
-              <a:srgbClr val="2563EB"/>
-            </a:solidFill>
-          </a:ln>
-          <a:effectLst/>
-        </p:spPr>
-        <p:style>
-          <a:lnRef idx="1">
-            <a:schemeClr val="accent1"/>
-          </a:lnRef>
-          <a:fillRef idx="3">
-            <a:schemeClr val="accent1"/>
-          </a:fillRef>
-          <a:effectRef idx="2">
-            <a:schemeClr val="accent1"/>
-          </a:effectRef>
-          <a:fontRef idx="minor">
-            <a:schemeClr val="lt1"/>
-          </a:fontRef>
-        </p:style>
-        <p:txBody>
-          <a:bodyPr rtlCol="0" anchor="ctr"/>
-          <a:lstStyle/>
-          <a:p>
-            <a:pPr algn="ctr"/>
-          </a:p>
-        </p:txBody>
-      </p:sp>
-      <p:sp>
-        <p:nvSpPr>
-          <p:cNvPr id="14" name="Rectangle 13"/>
-          <p:cNvSpPr/>
-          <p:nvPr/>
-        </p:nvSpPr>
-        <p:spPr>
-          <a:xfrm>
-            <a:off x="6362700" y="952500"/>
-            <a:ext cx="47625" cy="1143000"/>
-          </a:xfrm>
-          <a:prstGeom prst="rect">
-            <a:avLst/>
-          </a:prstGeom>
-          <a:solidFill>
-            <a:srgbClr val="2563EB"/>
-          </a:solidFill>
-          <a:ln>
-            <a:noFill/>
-          </a:ln>
-          <a:effectLst/>
-        </p:spPr>
-        <p:style>
-          <a:lnRef idx="1">
-            <a:schemeClr val="accent1"/>
-          </a:lnRef>
-          <a:fillRef idx="3">
-            <a:schemeClr val="accent1"/>
-          </a:fillRef>
-          <a:effectRef idx="2">
-            <a:schemeClr val="accent1"/>
-          </a:effectRef>
-          <a:fontRef idx="minor">
-            <a:schemeClr val="lt1"/>
-          </a:fontRef>
-        </p:style>
-        <p:txBody>
-          <a:bodyPr rtlCol="0" anchor="ctr"/>
-          <a:lstStyle/>
-          <a:p>
-            <a:pPr algn="ctr"/>
-          </a:p>
-        </p:txBody>
-      </p:sp>
-      <p:sp>
-        <p:nvSpPr>
-          <p:cNvPr id="15" name="TextBox 14"/>
-          <p:cNvSpPr txBox="1"/>
-          <p:nvPr/>
-        </p:nvSpPr>
-        <p:spPr>
-          <a:xfrm>
-            <a:off x="6496050" y="952500"/>
-            <a:ext cx="1847850" cy="1143000"/>
-          </a:xfrm>
-          <a:prstGeom prst="rect">
-            <a:avLst/>
-          </a:prstGeom>
-          <a:noFill/>
-        </p:spPr>
-        <p:txBody>
-          <a:bodyPr wrap="square" anchor="ctr">
-            <a:spAutoFit/>
-          </a:bodyPr>
-          <a:lstStyle/>
-          <a:p>
-            <a:pPr algn="l">
-              <a:lnSpc>
-                <a:spcPct val="100000"/>
-              </a:lnSpc>
-            </a:pPr>
-            <a:r>
-              <a:rPr sz="1200" b="1">
-                <a:solidFill>
-                  <a:srgbClr val="475569"/>
-                </a:solidFill>
-                <a:latin typeface="PingFang SC"/>
-              </a:rPr>
-              <a:t>send_mail</a:t>
-            </a:r>
-          </a:p>
-        </p:txBody>
-      </p:sp>
-      <p:sp>
-        <p:nvSpPr>
-          <p:cNvPr id="16" name="Rounded Rectangle 15"/>
-          <p:cNvSpPr/>
-          <p:nvPr/>
-        </p:nvSpPr>
-        <p:spPr>
-          <a:xfrm>
-            <a:off x="8591550" y="952500"/>
-            <a:ext cx="2076450" cy="1143000"/>
-          </a:xfrm>
-          <a:prstGeom prst="roundRect">
-            <a:avLst>
-              <a:gd name="adj" fmla="val 8000"/>
-            </a:avLst>
-          </a:prstGeom>
-          <a:solidFill>
-            <a:srgbClr val="FFFFFF"/>
-          </a:solidFill>
-          <a:ln w="12700">
-            <a:solidFill>
-              <a:srgbClr val="2563EB"/>
-            </a:solidFill>
-          </a:ln>
-          <a:effectLst/>
-        </p:spPr>
-        <p:style>
-          <a:lnRef idx="1">
-            <a:schemeClr val="accent1"/>
-          </a:lnRef>
-          <a:fillRef idx="3">
-            <a:schemeClr val="accent1"/>
-          </a:fillRef>
-          <a:effectRef idx="2">
-            <a:schemeClr val="accent1"/>
-          </a:effectRef>
-          <a:fontRef idx="minor">
-            <a:schemeClr val="lt1"/>
-          </a:fontRef>
-        </p:style>
-        <p:txBody>
-          <a:bodyPr rtlCol="0" anchor="ctr"/>
-          <a:lstStyle/>
-          <a:p>
-            <a:pPr algn="ctr"/>
-          </a:p>
-        </p:txBody>
-      </p:sp>
-      <p:sp>
-        <p:nvSpPr>
-          <p:cNvPr id="17" name="Rectangle 16"/>
-          <p:cNvSpPr/>
-          <p:nvPr/>
-        </p:nvSpPr>
-        <p:spPr>
-          <a:xfrm>
-            <a:off x="8591550" y="952500"/>
-            <a:ext cx="47625" cy="1143000"/>
-          </a:xfrm>
-          <a:prstGeom prst="rect">
-            <a:avLst/>
-          </a:prstGeom>
-          <a:solidFill>
-            <a:srgbClr val="2563EB"/>
-          </a:solidFill>
-          <a:ln>
-            <a:noFill/>
-          </a:ln>
-          <a:effectLst/>
-        </p:spPr>
-        <p:style>
-          <a:lnRef idx="1">
-            <a:schemeClr val="accent1"/>
-          </a:lnRef>
-          <a:fillRef idx="3">
-            <a:schemeClr val="accent1"/>
-          </a:fillRef>
-          <a:effectRef idx="2">
-            <a:schemeClr val="accent1"/>
-          </a:effectRef>
-          <a:fontRef idx="minor">
-            <a:schemeClr val="lt1"/>
-          </a:fontRef>
-        </p:style>
-        <p:txBody>
-          <a:bodyPr rtlCol="0" anchor="ctr"/>
-          <a:lstStyle/>
-          <a:p>
-            <a:pPr algn="ctr"/>
-          </a:p>
-        </p:txBody>
-      </p:sp>
-      <p:sp>
-        <p:nvSpPr>
-          <p:cNvPr id="18" name="TextBox 17"/>
-          <p:cNvSpPr txBox="1"/>
-          <p:nvPr/>
-        </p:nvSpPr>
-        <p:spPr>
-          <a:xfrm>
-            <a:off x="8724900" y="952500"/>
-            <a:ext cx="1847850" cy="1143000"/>
-          </a:xfrm>
-          <a:prstGeom prst="rect">
-            <a:avLst/>
-          </a:prstGeom>
-          <a:noFill/>
-        </p:spPr>
-        <p:txBody>
-          <a:bodyPr wrap="square" anchor="ctr">
-            <a:spAutoFit/>
-          </a:bodyPr>
-          <a:lstStyle/>
-          <a:p>
-            <a:pPr algn="l">
-              <a:lnSpc>
-                <a:spcPct val="100000"/>
-              </a:lnSpc>
-            </a:pPr>
-            <a:r>
-              <a:rPr sz="1200" b="1">
-                <a:solidFill>
-                  <a:srgbClr val="475569"/>
-                </a:solidFill>
-                <a:latin typeface="PingFang SC"/>
-              </a:rPr>
-              <a:t>run_test</a:t>
-            </a:r>
-          </a:p>
-        </p:txBody>
-      </p:sp>
-      <p:cxnSp>
-        <p:nvCxnSpPr>
-          <p:cNvPr id="19" name="Connector 18"/>
-          <p:cNvCxnSpPr/>
-          <p:nvPr/>
-        </p:nvCxnSpPr>
-        <p:spPr>
-          <a:xfrm>
-            <a:off x="6096000" y="2152650"/>
-            <a:ext cx="0" cy="152400"/>
-          </a:xfrm>
-          <a:prstGeom prst="line">
-            <a:avLst/>
-          </a:prstGeom>
-          <a:ln w="15240">
-            <a:solidFill>
-              <a:srgbClr val="94A3B8"/>
-            </a:solidFill>
-          </a:ln>
-        </p:spPr>
-        <p:style>
-          <a:lnRef idx="2">
-            <a:schemeClr val="accent1"/>
-          </a:lnRef>
-          <a:fillRef idx="0">
-            <a:schemeClr val="accent1"/>
-          </a:fillRef>
-          <a:effectRef idx="1">
-            <a:schemeClr val="accent1"/>
-          </a:effectRef>
-          <a:fontRef idx="minor">
-            <a:schemeClr val="tx1"/>
-          </a:fontRef>
-        </p:style>
-      </p:cxnSp>
-      <p:sp>
-        <p:nvSpPr>
-          <p:cNvPr id="20" name="Isosceles Triangle 19"/>
-          <p:cNvSpPr/>
-          <p:nvPr/>
-        </p:nvSpPr>
-        <p:spPr>
-          <a:xfrm rot="10800000">
-            <a:off x="6053138" y="2219326"/>
-            <a:ext cx="85725" cy="85725"/>
-          </a:xfrm>
-          <a:prstGeom prst="triangle">
-            <a:avLst/>
-          </a:prstGeom>
-          <a:solidFill>
-            <a:srgbClr val="94A3B8"/>
-          </a:solidFill>
-          <a:ln>
-            <a:noFill/>
-          </a:ln>
-          <a:effectLst/>
-        </p:spPr>
-        <p:style>
-          <a:lnRef idx="1">
-            <a:schemeClr val="accent1"/>
-          </a:lnRef>
-          <a:fillRef idx="3">
-            <a:schemeClr val="accent1"/>
-          </a:fillRef>
-          <a:effectRef idx="2">
-            <a:schemeClr val="accent1"/>
-          </a:effectRef>
-          <a:fontRef idx="minor">
-            <a:schemeClr val="lt1"/>
-          </a:fontRef>
-        </p:style>
-        <p:txBody>
-          <a:bodyPr rtlCol="0" anchor="ctr"/>
-          <a:lstStyle/>
-          <a:p>
-            <a:pPr algn="ctr"/>
-          </a:p>
-        </p:txBody>
-      </p:sp>
-      <p:sp>
-        <p:nvSpPr>
-          <p:cNvPr id="21" name="TextBox 20"/>
-          <p:cNvSpPr txBox="1"/>
-          <p:nvPr/>
-        </p:nvSpPr>
-        <p:spPr>
-          <a:xfrm>
-            <a:off x="6248400" y="2095500"/>
-            <a:ext cx="2095500" cy="247650"/>
-          </a:xfrm>
-          <a:prstGeom prst="rect">
-            <a:avLst/>
-          </a:prstGeom>
-          <a:noFill/>
-        </p:spPr>
-        <p:txBody>
-          <a:bodyPr wrap="square" anchor="ctr">
-            <a:spAutoFit/>
-          </a:bodyPr>
-          <a:lstStyle/>
-          <a:p>
-            <a:pPr algn="l">
-              <a:lnSpc>
-                <a:spcPct val="100000"/>
-              </a:lnSpc>
-            </a:pPr>
-            <a:r>
-              <a:rPr sz="1000" b="0">
-                <a:solidFill>
-                  <a:srgbClr val="94A3B8"/>
-                </a:solidFill>
-                <a:latin typeface="PingFang SC"/>
-              </a:rPr>
-              <a:t>调用</a:t>
-            </a:r>
-          </a:p>
-        </p:txBody>
-      </p:sp>
-      <p:sp>
-        <p:nvSpPr>
-          <p:cNvPr id="22" name="Rounded Rectangle 21"/>
-          <p:cNvSpPr/>
-          <p:nvPr/>
-        </p:nvSpPr>
-        <p:spPr>
-          <a:xfrm>
-            <a:off x="1847850" y="2305050"/>
-            <a:ext cx="8877300" cy="1219200"/>
-          </a:xfrm>
-          <a:prstGeom prst="roundRect">
-            <a:avLst>
-              <a:gd name="adj" fmla="val 8000"/>
-            </a:avLst>
-          </a:prstGeom>
-          <a:solidFill>
-            <a:srgbClr val="F1F5F9"/>
-          </a:solidFill>
-          <a:ln>
-            <a:noFill/>
-          </a:ln>
-          <a:effectLst/>
-        </p:spPr>
-        <p:style>
-          <a:lnRef idx="1">
-            <a:schemeClr val="accent1"/>
-          </a:lnRef>
-          <a:fillRef idx="3">
-            <a:schemeClr val="accent1"/>
-          </a:fillRef>
-          <a:effectRef idx="2">
-            <a:schemeClr val="accent1"/>
-          </a:effectRef>
-          <a:fontRef idx="minor">
-            <a:schemeClr val="lt1"/>
-          </a:fontRef>
-        </p:style>
-        <p:txBody>
-          <a:bodyPr rtlCol="0" anchor="ctr"/>
-          <a:lstStyle/>
-          <a:p>
-            <a:pPr algn="ctr"/>
-          </a:p>
-        </p:txBody>
-      </p:sp>
-      <p:sp>
-        <p:nvSpPr>
-          <p:cNvPr id="23" name="Rounded Rectangle 22"/>
-          <p:cNvSpPr/>
-          <p:nvPr/>
-        </p:nvSpPr>
-        <p:spPr>
-          <a:xfrm>
-            <a:off x="1905000" y="2343150"/>
-            <a:ext cx="2076450" cy="1143000"/>
-          </a:xfrm>
-          <a:prstGeom prst="roundRect">
-            <a:avLst>
-              <a:gd name="adj" fmla="val 8000"/>
-            </a:avLst>
-          </a:prstGeom>
-          <a:solidFill>
-            <a:srgbClr val="FFFFFF"/>
-          </a:solidFill>
-          <a:ln w="12700">
-            <a:solidFill>
-              <a:srgbClr val="14B8A6"/>
-            </a:solidFill>
-          </a:ln>
-          <a:effectLst/>
-        </p:spPr>
-        <p:style>
-          <a:lnRef idx="1">
-            <a:schemeClr val="accent1"/>
-          </a:lnRef>
-          <a:fillRef idx="3">
-            <a:schemeClr val="accent1"/>
-          </a:fillRef>
-          <a:effectRef idx="2">
-            <a:schemeClr val="accent1"/>
-          </a:effectRef>
-          <a:fontRef idx="minor">
-            <a:schemeClr val="lt1"/>
-          </a:fontRef>
-        </p:style>
-        <p:txBody>
-          <a:bodyPr rtlCol="0" anchor="ctr"/>
-          <a:lstStyle/>
-          <a:p>
-            <a:pPr algn="ctr"/>
-          </a:p>
-        </p:txBody>
-      </p:sp>
-      <p:sp>
-        <p:nvSpPr>
-          <p:cNvPr id="24" name="Rectangle 23"/>
-          <p:cNvSpPr/>
-          <p:nvPr/>
-        </p:nvSpPr>
-        <p:spPr>
-          <a:xfrm>
-            <a:off x="1905000" y="2343150"/>
-            <a:ext cx="47625" cy="1143000"/>
-          </a:xfrm>
-          <a:prstGeom prst="rect">
-            <a:avLst/>
-          </a:prstGeom>
-          <a:solidFill>
-            <a:srgbClr val="14B8A6"/>
-          </a:solidFill>
-          <a:ln>
-            <a:noFill/>
-          </a:ln>
-          <a:effectLst/>
-        </p:spPr>
-        <p:style>
-          <a:lnRef idx="1">
-            <a:schemeClr val="accent1"/>
-          </a:lnRef>
-          <a:fillRef idx="3">
-            <a:schemeClr val="accent1"/>
-          </a:fillRef>
-          <a:effectRef idx="2">
-            <a:schemeClr val="accent1"/>
-          </a:effectRef>
-          <a:fontRef idx="minor">
-            <a:schemeClr val="lt1"/>
-          </a:fontRef>
-        </p:style>
-        <p:txBody>
-          <a:bodyPr rtlCol="0" anchor="ctr"/>
-          <a:lstStyle/>
-          <a:p>
-            <a:pPr algn="ctr"/>
-          </a:p>
-        </p:txBody>
-      </p:sp>
-      <p:sp>
-        <p:nvSpPr>
-          <p:cNvPr id="25" name="TextBox 24"/>
-          <p:cNvSpPr txBox="1"/>
-          <p:nvPr/>
-        </p:nvSpPr>
-        <p:spPr>
-          <a:xfrm>
-            <a:off x="2038350" y="2343150"/>
-            <a:ext cx="1847850" cy="1143000"/>
-          </a:xfrm>
-          <a:prstGeom prst="rect">
-            <a:avLst/>
-          </a:prstGeom>
-          <a:noFill/>
-        </p:spPr>
-        <p:txBody>
-          <a:bodyPr wrap="square" anchor="ctr">
-            <a:spAutoFit/>
-          </a:bodyPr>
-          <a:lstStyle/>
-          <a:p>
-            <a:pPr algn="l">
-              <a:lnSpc>
-                <a:spcPct val="100000"/>
-              </a:lnSpc>
-            </a:pPr>
-            <a:r>
-              <a:rPr sz="1200" b="1">
-                <a:solidFill>
-                  <a:srgbClr val="475569"/>
-                </a:solidFill>
-                <a:latin typeface="PingFang SC"/>
-              </a:rPr>
-              <a:t>服务层:Milvus</a:t>
-            </a:r>
-          </a:p>
-        </p:txBody>
-      </p:sp>
-      <p:sp>
-        <p:nvSpPr>
-          <p:cNvPr id="26" name="Rounded Rectangle 25"/>
-          <p:cNvSpPr/>
-          <p:nvPr/>
-        </p:nvSpPr>
-        <p:spPr>
-          <a:xfrm>
-            <a:off x="4133850" y="2343150"/>
-            <a:ext cx="2076450" cy="1143000"/>
-          </a:xfrm>
-          <a:prstGeom prst="roundRect">
-            <a:avLst>
-              <a:gd name="adj" fmla="val 8000"/>
-            </a:avLst>
-          </a:prstGeom>
-          <a:solidFill>
-            <a:srgbClr val="FFFFFF"/>
-          </a:solidFill>
-          <a:ln w="12700">
-            <a:solidFill>
-              <a:srgbClr val="14B8A6"/>
-            </a:solidFill>
-          </a:ln>
-          <a:effectLst/>
-        </p:spPr>
-        <p:style>
-          <a:lnRef idx="1">
-            <a:schemeClr val="accent1"/>
-          </a:lnRef>
-          <a:fillRef idx="3">
-            <a:schemeClr val="accent1"/>
-          </a:fillRef>
-          <a:effectRef idx="2">
-            <a:schemeClr val="accent1"/>
-          </a:effectRef>
-          <a:fontRef idx="minor">
-            <a:schemeClr val="lt1"/>
-          </a:fontRef>
-        </p:style>
-        <p:txBody>
-          <a:bodyPr rtlCol="0" anchor="ctr"/>
-          <a:lstStyle/>
-          <a:p>
-            <a:pPr algn="ctr"/>
-          </a:p>
-        </p:txBody>
-      </p:sp>
-      <p:sp>
-        <p:nvSpPr>
-          <p:cNvPr id="27" name="Rectangle 26"/>
-          <p:cNvSpPr/>
-          <p:nvPr/>
-        </p:nvSpPr>
-        <p:spPr>
-          <a:xfrm>
-            <a:off x="4133850" y="2343150"/>
-            <a:ext cx="47625" cy="1143000"/>
-          </a:xfrm>
-          <a:prstGeom prst="rect">
-            <a:avLst/>
-          </a:prstGeom>
-          <a:solidFill>
-            <a:srgbClr val="14B8A6"/>
-          </a:solidFill>
-          <a:ln>
-            <a:noFill/>
-          </a:ln>
-          <a:effectLst/>
-        </p:spPr>
-        <p:style>
-          <a:lnRef idx="1">
-            <a:schemeClr val="accent1"/>
-          </a:lnRef>
-          <a:fillRef idx="3">
-            <a:schemeClr val="accent1"/>
-          </a:fillRef>
-          <a:effectRef idx="2">
-            <a:schemeClr val="accent1"/>
-          </a:effectRef>
-          <a:fontRef idx="minor">
-            <a:schemeClr val="lt1"/>
-          </a:fontRef>
-        </p:style>
-        <p:txBody>
-          <a:bodyPr rtlCol="0" anchor="ctr"/>
-          <a:lstStyle/>
-          <a:p>
-            <a:pPr algn="ctr"/>
-          </a:p>
-        </p:txBody>
-      </p:sp>
-      <p:sp>
-        <p:nvSpPr>
-          <p:cNvPr id="28" name="TextBox 27"/>
-          <p:cNvSpPr txBox="1"/>
-          <p:nvPr/>
-        </p:nvSpPr>
-        <p:spPr>
-          <a:xfrm>
-            <a:off x="4267200" y="2343150"/>
-            <a:ext cx="1847850" cy="1143000"/>
-          </a:xfrm>
-          <a:prstGeom prst="rect">
-            <a:avLst/>
-          </a:prstGeom>
-          <a:noFill/>
-        </p:spPr>
-        <p:txBody>
-          <a:bodyPr wrap="square" anchor="ctr">
-            <a:spAutoFit/>
-          </a:bodyPr>
-          <a:lstStyle/>
-          <a:p>
-            <a:pPr algn="l">
-              <a:lnSpc>
-                <a:spcPct val="100000"/>
-              </a:lnSpc>
-            </a:pPr>
-            <a:r>
-              <a:rPr sz="1200" b="1">
-                <a:solidFill>
-                  <a:srgbClr val="475569"/>
-                </a:solidFill>
-                <a:latin typeface="PingFang SC"/>
-              </a:rPr>
-              <a:t>PG 只读</a:t>
-            </a:r>
-          </a:p>
-        </p:txBody>
-      </p:sp>
-      <p:sp>
-        <p:nvSpPr>
-          <p:cNvPr id="29" name="Rounded Rectangle 28"/>
-          <p:cNvSpPr/>
-          <p:nvPr/>
-        </p:nvSpPr>
-        <p:spPr>
-          <a:xfrm>
-            <a:off x="6362700" y="2343150"/>
-            <a:ext cx="2076450" cy="1143000"/>
-          </a:xfrm>
-          <a:prstGeom prst="roundRect">
-            <a:avLst>
-              <a:gd name="adj" fmla="val 8000"/>
-            </a:avLst>
-          </a:prstGeom>
-          <a:solidFill>
-            <a:srgbClr val="FFFFFF"/>
-          </a:solidFill>
-          <a:ln w="12700">
-            <a:solidFill>
-              <a:srgbClr val="14B8A6"/>
-            </a:solidFill>
-          </a:ln>
-          <a:effectLst/>
-        </p:spPr>
-        <p:style>
-          <a:lnRef idx="1">
-            <a:schemeClr val="accent1"/>
-          </a:lnRef>
-          <a:fillRef idx="3">
-            <a:schemeClr val="accent1"/>
-          </a:fillRef>
-          <a:effectRef idx="2">
-            <a:schemeClr val="accent1"/>
-          </a:effectRef>
-          <a:fontRef idx="minor">
-            <a:schemeClr val="lt1"/>
-          </a:fontRef>
-        </p:style>
-        <p:txBody>
-          <a:bodyPr rtlCol="0" anchor="ctr"/>
-          <a:lstStyle/>
-          <a:p>
-            <a:pPr algn="ctr"/>
-          </a:p>
-        </p:txBody>
-      </p:sp>
-      <p:sp>
-        <p:nvSpPr>
-          <p:cNvPr id="30" name="Rectangle 29"/>
-          <p:cNvSpPr/>
-          <p:nvPr/>
-        </p:nvSpPr>
-        <p:spPr>
-          <a:xfrm>
-            <a:off x="6362700" y="2343150"/>
-            <a:ext cx="47625" cy="1143000"/>
-          </a:xfrm>
-          <a:prstGeom prst="rect">
-            <a:avLst/>
-          </a:prstGeom>
-          <a:solidFill>
-            <a:srgbClr val="14B8A6"/>
-          </a:solidFill>
-          <a:ln>
-            <a:noFill/>
-          </a:ln>
-          <a:effectLst/>
-        </p:spPr>
-        <p:style>
-          <a:lnRef idx="1">
-            <a:schemeClr val="accent1"/>
-          </a:lnRef>
-          <a:fillRef idx="3">
-            <a:schemeClr val="accent1"/>
-          </a:fillRef>
-          <a:effectRef idx="2">
-            <a:schemeClr val="accent1"/>
-          </a:effectRef>
-          <a:fontRef idx="minor">
-            <a:schemeClr val="lt1"/>
-          </a:fontRef>
-        </p:style>
-        <p:txBody>
-          <a:bodyPr rtlCol="0" anchor="ctr"/>
-          <a:lstStyle/>
-          <a:p>
-            <a:pPr algn="ctr"/>
-          </a:p>
-        </p:txBody>
-      </p:sp>
-      <p:sp>
-        <p:nvSpPr>
-          <p:cNvPr id="31" name="TextBox 30"/>
-          <p:cNvSpPr txBox="1"/>
-          <p:nvPr/>
-        </p:nvSpPr>
-        <p:spPr>
-          <a:xfrm>
-            <a:off x="6496050" y="2343150"/>
-            <a:ext cx="1847850" cy="1143000"/>
-          </a:xfrm>
-          <a:prstGeom prst="rect">
-            <a:avLst/>
-          </a:prstGeom>
-          <a:noFill/>
-        </p:spPr>
-        <p:txBody>
-          <a:bodyPr wrap="square" anchor="ctr">
-            <a:spAutoFit/>
-          </a:bodyPr>
-          <a:lstStyle/>
-          <a:p>
-            <a:pPr algn="l">
-              <a:lnSpc>
-                <a:spcPct val="100000"/>
-              </a:lnSpc>
-            </a:pPr>
-            <a:r>
-              <a:rPr sz="1200" b="1">
-                <a:solidFill>
-                  <a:srgbClr val="475569"/>
-                </a:solidFill>
-                <a:latin typeface="PingFang SC"/>
-              </a:rPr>
-              <a:t>SMTP 网关</a:t>
-            </a:r>
-          </a:p>
-        </p:txBody>
-      </p:sp>
-      <p:sp>
-        <p:nvSpPr>
-          <p:cNvPr id="32" name="Rounded Rectangle 31"/>
-          <p:cNvSpPr/>
-          <p:nvPr/>
-        </p:nvSpPr>
-        <p:spPr>
-          <a:xfrm>
-            <a:off x="8591550" y="2343150"/>
-            <a:ext cx="2076450" cy="1143000"/>
-          </a:xfrm>
-          <a:prstGeom prst="roundRect">
-            <a:avLst>
-              <a:gd name="adj" fmla="val 8000"/>
-            </a:avLst>
-          </a:prstGeom>
-          <a:solidFill>
-            <a:srgbClr val="FFFFFF"/>
-          </a:solidFill>
-          <a:ln w="12700">
-            <a:solidFill>
-              <a:srgbClr val="14B8A6"/>
-            </a:solidFill>
-          </a:ln>
-          <a:effectLst/>
-        </p:spPr>
-        <p:style>
-          <a:lnRef idx="1">
-            <a:schemeClr val="accent1"/>
-          </a:lnRef>
-          <a:fillRef idx="3">
-            <a:schemeClr val="accent1"/>
-          </a:fillRef>
-          <a:effectRef idx="2">
-            <a:schemeClr val="accent1"/>
-          </a:effectRef>
-          <a:fontRef idx="minor">
-            <a:schemeClr val="lt1"/>
-          </a:fontRef>
-        </p:style>
-        <p:txBody>
-          <a:bodyPr rtlCol="0" anchor="ctr"/>
-          <a:lstStyle/>
-          <a:p>
-            <a:pPr algn="ctr"/>
-          </a:p>
-        </p:txBody>
-      </p:sp>
-      <p:sp>
-        <p:nvSpPr>
-          <p:cNvPr id="33" name="Rectangle 32"/>
-          <p:cNvSpPr/>
-          <p:nvPr/>
-        </p:nvSpPr>
-        <p:spPr>
-          <a:xfrm>
-            <a:off x="8591550" y="2343150"/>
-            <a:ext cx="47625" cy="1143000"/>
-          </a:xfrm>
-          <a:prstGeom prst="rect">
-            <a:avLst/>
-          </a:prstGeom>
-          <a:solidFill>
-            <a:srgbClr val="14B8A6"/>
-          </a:solidFill>
-          <a:ln>
-            <a:noFill/>
-          </a:ln>
-          <a:effectLst/>
-        </p:spPr>
-        <p:style>
-          <a:lnRef idx="1">
-            <a:schemeClr val="accent1"/>
-          </a:lnRef>
-          <a:fillRef idx="3">
-            <a:schemeClr val="accent1"/>
-          </a:fillRef>
-          <a:effectRef idx="2">
-            <a:schemeClr val="accent1"/>
-          </a:effectRef>
-          <a:fontRef idx="minor">
-            <a:schemeClr val="lt1"/>
-          </a:fontRef>
-        </p:style>
-        <p:txBody>
-          <a:bodyPr rtlCol="0" anchor="ctr"/>
-          <a:lstStyle/>
-          <a:p>
-            <a:pPr algn="ctr"/>
-          </a:p>
-        </p:txBody>
-      </p:sp>
-      <p:sp>
-        <p:nvSpPr>
-          <p:cNvPr id="34" name="TextBox 33"/>
-          <p:cNvSpPr txBox="1"/>
-          <p:nvPr/>
-        </p:nvSpPr>
-        <p:spPr>
-          <a:xfrm>
-            <a:off x="8724900" y="2343150"/>
-            <a:ext cx="1847850" cy="1143000"/>
-          </a:xfrm>
-          <a:prstGeom prst="rect">
-            <a:avLst/>
-          </a:prstGeom>
-          <a:noFill/>
-        </p:spPr>
-        <p:txBody>
-          <a:bodyPr wrap="square" anchor="ctr">
-            <a:spAutoFit/>
-          </a:bodyPr>
-          <a:lstStyle/>
-          <a:p>
-            <a:pPr algn="l">
-              <a:lnSpc>
-                <a:spcPct val="100000"/>
-              </a:lnSpc>
-            </a:pPr>
-            <a:r>
-              <a:rPr sz="1200" b="1">
-                <a:solidFill>
-                  <a:srgbClr val="475569"/>
-                </a:solidFill>
-                <a:latin typeface="PingFang SC"/>
-              </a:rPr>
-              <a:t>CI Runner</a:t>
-            </a:r>
-          </a:p>
-        </p:txBody>
-      </p:sp>
-      <p:cxnSp>
-        <p:nvCxnSpPr>
-          <p:cNvPr id="35" name="Connector 34"/>
-          <p:cNvCxnSpPr/>
-          <p:nvPr/>
-        </p:nvCxnSpPr>
-        <p:spPr>
-          <a:xfrm>
-            <a:off x="6096000" y="3543300"/>
-            <a:ext cx="0" cy="152400"/>
-          </a:xfrm>
-          <a:prstGeom prst="line">
-            <a:avLst/>
-          </a:prstGeom>
-          <a:ln w="15240">
-            <a:solidFill>
-              <a:srgbClr val="94A3B8"/>
-            </a:solidFill>
-          </a:ln>
-        </p:spPr>
-        <p:style>
-          <a:lnRef idx="2">
-            <a:schemeClr val="accent1"/>
-          </a:lnRef>
-          <a:fillRef idx="0">
-            <a:schemeClr val="accent1"/>
-          </a:fillRef>
-          <a:effectRef idx="1">
-            <a:schemeClr val="accent1"/>
-          </a:effectRef>
-          <a:fontRef idx="minor">
-            <a:schemeClr val="tx1"/>
-          </a:fontRef>
-        </p:style>
-      </p:cxnSp>
-      <p:sp>
-        <p:nvSpPr>
-          <p:cNvPr id="36" name="Isosceles Triangle 35"/>
-          <p:cNvSpPr/>
-          <p:nvPr/>
-        </p:nvSpPr>
-        <p:spPr>
-          <a:xfrm rot="10800000">
-            <a:off x="6053138" y="3609976"/>
-            <a:ext cx="85725" cy="85725"/>
-          </a:xfrm>
-          <a:prstGeom prst="triangle">
-            <a:avLst/>
-          </a:prstGeom>
-          <a:solidFill>
-            <a:srgbClr val="94A3B8"/>
-          </a:solidFill>
-          <a:ln>
-            <a:noFill/>
-          </a:ln>
-          <a:effectLst/>
-        </p:spPr>
-        <p:style>
-          <a:lnRef idx="1">
-            <a:schemeClr val="accent1"/>
-          </a:lnRef>
-          <a:fillRef idx="3">
-            <a:schemeClr val="accent1"/>
-          </a:fillRef>
-          <a:effectRef idx="2">
-            <a:schemeClr val="accent1"/>
-          </a:effectRef>
-          <a:fontRef idx="minor">
-            <a:schemeClr val="lt1"/>
-          </a:fontRef>
-        </p:style>
-        <p:txBody>
-          <a:bodyPr rtlCol="0" anchor="ctr"/>
-          <a:lstStyle/>
-          <a:p>
-            <a:pPr algn="ctr"/>
-          </a:p>
-        </p:txBody>
-      </p:sp>
-      <p:sp>
-        <p:nvSpPr>
-          <p:cNvPr id="37" name="TextBox 36"/>
-          <p:cNvSpPr txBox="1"/>
-          <p:nvPr/>
-        </p:nvSpPr>
-        <p:spPr>
-          <a:xfrm>
-            <a:off x="6248400" y="3486150"/>
-            <a:ext cx="2095500" cy="247650"/>
-          </a:xfrm>
-          <a:prstGeom prst="rect">
-            <a:avLst/>
-          </a:prstGeom>
-          <a:noFill/>
-        </p:spPr>
-        <p:txBody>
-          <a:bodyPr wrap="square" anchor="ctr">
-            <a:spAutoFit/>
-          </a:bodyPr>
-          <a:lstStyle/>
-          <a:p>
-            <a:pPr algn="l">
-              <a:lnSpc>
-                <a:spcPct val="100000"/>
-              </a:lnSpc>
-            </a:pPr>
-            <a:r>
-              <a:rPr sz="1000" b="0">
-                <a:solidFill>
-                  <a:srgbClr val="94A3B8"/>
-                </a:solidFill>
-                <a:latin typeface="PingFang SC"/>
-              </a:rPr>
-              <a:t>连接</a:t>
-            </a:r>
-          </a:p>
-        </p:txBody>
-      </p:sp>
-      <p:sp>
-        <p:nvSpPr>
-          <p:cNvPr id="38" name="Rounded Rectangle 37"/>
-          <p:cNvSpPr/>
-          <p:nvPr/>
-        </p:nvSpPr>
-        <p:spPr>
-          <a:xfrm>
-            <a:off x="1847850" y="3695700"/>
-            <a:ext cx="8877300" cy="1219200"/>
-          </a:xfrm>
-          <a:prstGeom prst="roundRect">
-            <a:avLst>
-              <a:gd name="adj" fmla="val 8000"/>
-            </a:avLst>
-          </a:prstGeom>
-          <a:solidFill>
-            <a:srgbClr val="F1F5F9"/>
-          </a:solidFill>
-          <a:ln>
-            <a:noFill/>
-          </a:ln>
-          <a:effectLst/>
-        </p:spPr>
-        <p:style>
-          <a:lnRef idx="1">
-            <a:schemeClr val="accent1"/>
-          </a:lnRef>
-          <a:fillRef idx="3">
-            <a:schemeClr val="accent1"/>
-          </a:fillRef>
-          <a:effectRef idx="2">
-            <a:schemeClr val="accent1"/>
-          </a:effectRef>
-          <a:fontRef idx="minor">
-            <a:schemeClr val="lt1"/>
-          </a:fontRef>
-        </p:style>
-        <p:txBody>
-          <a:bodyPr rtlCol="0" anchor="ctr"/>
-          <a:lstStyle/>
-          <a:p>
-            <a:pPr algn="ctr"/>
-          </a:p>
-        </p:txBody>
-      </p:sp>
-      <p:sp>
-        <p:nvSpPr>
-          <p:cNvPr id="39" name="Rounded Rectangle 38"/>
-          <p:cNvSpPr/>
-          <p:nvPr/>
-        </p:nvSpPr>
-        <p:spPr>
-          <a:xfrm>
-            <a:off x="1905000" y="3733800"/>
-            <a:ext cx="2819400" cy="1143000"/>
-          </a:xfrm>
-          <a:prstGeom prst="roundRect">
-            <a:avLst>
-              <a:gd name="adj" fmla="val 8000"/>
-            </a:avLst>
-          </a:prstGeom>
-          <a:solidFill>
-            <a:srgbClr val="FFFFFF"/>
-          </a:solidFill>
-          <a:ln w="12700">
-            <a:solidFill>
-              <a:srgbClr val="8B5CF6"/>
-            </a:solidFill>
-          </a:ln>
-          <a:effectLst/>
-        </p:spPr>
-        <p:style>
-          <a:lnRef idx="1">
-            <a:schemeClr val="accent1"/>
-          </a:lnRef>
-          <a:fillRef idx="3">
-            <a:schemeClr val="accent1"/>
-          </a:fillRef>
-          <a:effectRef idx="2">
-            <a:schemeClr val="accent1"/>
-          </a:effectRef>
-          <a:fontRef idx="minor">
-            <a:schemeClr val="lt1"/>
-          </a:fontRef>
-        </p:style>
-        <p:txBody>
-          <a:bodyPr rtlCol="0" anchor="ctr"/>
-          <a:lstStyle/>
-          <a:p>
-            <a:pPr algn="ctr"/>
-          </a:p>
-        </p:txBody>
-      </p:sp>
-      <p:sp>
-        <p:nvSpPr>
-          <p:cNvPr id="40" name="Rectangle 39"/>
-          <p:cNvSpPr/>
-          <p:nvPr/>
-        </p:nvSpPr>
-        <p:spPr>
-          <a:xfrm>
-            <a:off x="1905000" y="3733800"/>
-            <a:ext cx="47625" cy="1143000"/>
-          </a:xfrm>
-          <a:prstGeom prst="rect">
-            <a:avLst/>
-          </a:prstGeom>
-          <a:solidFill>
-            <a:srgbClr val="8B5CF6"/>
-          </a:solidFill>
-          <a:ln>
-            <a:noFill/>
-          </a:ln>
-          <a:effectLst/>
-        </p:spPr>
-        <p:style>
-          <a:lnRef idx="1">
-            <a:schemeClr val="accent1"/>
-          </a:lnRef>
-          <a:fillRef idx="3">
-            <a:schemeClr val="accent1"/>
-          </a:fillRef>
-          <a:effectRef idx="2">
-            <a:schemeClr val="accent1"/>
-          </a:effectRef>
-          <a:fontRef idx="minor">
-            <a:schemeClr val="lt1"/>
-          </a:fontRef>
-        </p:style>
-        <p:txBody>
-          <a:bodyPr rtlCol="0" anchor="ctr"/>
-          <a:lstStyle/>
-          <a:p>
-            <a:pPr algn="ctr"/>
-          </a:p>
-        </p:txBody>
-      </p:sp>
-      <p:sp>
-        <p:nvSpPr>
-          <p:cNvPr id="41" name="TextBox 40"/>
-          <p:cNvSpPr txBox="1"/>
-          <p:nvPr/>
-        </p:nvSpPr>
-        <p:spPr>
-          <a:xfrm>
-            <a:off x="2038350" y="3733800"/>
-            <a:ext cx="2590800" cy="1143000"/>
-          </a:xfrm>
-          <a:prstGeom prst="rect">
-            <a:avLst/>
-          </a:prstGeom>
-          <a:noFill/>
-        </p:spPr>
-        <p:txBody>
-          <a:bodyPr wrap="square" anchor="ctr">
-            <a:spAutoFit/>
-          </a:bodyPr>
-          <a:lstStyle/>
-          <a:p>
-            <a:pPr algn="l">
-              <a:lnSpc>
-                <a:spcPct val="100000"/>
-              </a:lnSpc>
-            </a:pPr>
-            <a:r>
-              <a:rPr sz="1200" b="1">
-                <a:solidFill>
-                  <a:srgbClr val="475569"/>
-                </a:solidFill>
-                <a:latin typeface="PingFang SC"/>
-              </a:rPr>
-              <a:t>凭据层:DB 密钥</a:t>
-            </a:r>
-          </a:p>
-        </p:txBody>
-      </p:sp>
-      <p:sp>
-        <p:nvSpPr>
-          <p:cNvPr id="42" name="Rounded Rectangle 41"/>
-          <p:cNvSpPr/>
-          <p:nvPr/>
-        </p:nvSpPr>
-        <p:spPr>
-          <a:xfrm>
-            <a:off x="4876800" y="3733800"/>
-            <a:ext cx="2819400" cy="1143000"/>
-          </a:xfrm>
-          <a:prstGeom prst="roundRect">
-            <a:avLst>
-              <a:gd name="adj" fmla="val 8000"/>
-            </a:avLst>
-          </a:prstGeom>
-          <a:solidFill>
-            <a:srgbClr val="FFFFFF"/>
-          </a:solidFill>
-          <a:ln w="12700">
-            <a:solidFill>
-              <a:srgbClr val="8B5CF6"/>
-            </a:solidFill>
-          </a:ln>
-          <a:effectLst/>
-        </p:spPr>
-        <p:style>
-          <a:lnRef idx="1">
-            <a:schemeClr val="accent1"/>
-          </a:lnRef>
-          <a:fillRef idx="3">
-            <a:schemeClr val="accent1"/>
-          </a:fillRef>
-          <a:effectRef idx="2">
-            <a:schemeClr val="accent1"/>
-          </a:effectRef>
-          <a:fontRef idx="minor">
-            <a:schemeClr val="lt1"/>
-          </a:fontRef>
-        </p:style>
-        <p:txBody>
-          <a:bodyPr rtlCol="0" anchor="ctr"/>
-          <a:lstStyle/>
-          <a:p>
-            <a:pPr algn="ctr"/>
-          </a:p>
-        </p:txBody>
-      </p:sp>
-      <p:sp>
-        <p:nvSpPr>
-          <p:cNvPr id="43" name="Rectangle 42"/>
-          <p:cNvSpPr/>
-          <p:nvPr/>
-        </p:nvSpPr>
-        <p:spPr>
-          <a:xfrm>
-            <a:off x="4876800" y="3733800"/>
-            <a:ext cx="47625" cy="1143000"/>
-          </a:xfrm>
-          <a:prstGeom prst="rect">
-            <a:avLst/>
-          </a:prstGeom>
-          <a:solidFill>
-            <a:srgbClr val="8B5CF6"/>
-          </a:solidFill>
-          <a:ln>
-            <a:noFill/>
-          </a:ln>
-          <a:effectLst/>
-        </p:spPr>
-        <p:style>
-          <a:lnRef idx="1">
-            <a:schemeClr val="accent1"/>
-          </a:lnRef>
-          <a:fillRef idx="3">
-            <a:schemeClr val="accent1"/>
-          </a:fillRef>
-          <a:effectRef idx="2">
-            <a:schemeClr val="accent1"/>
-          </a:effectRef>
-          <a:fontRef idx="minor">
-            <a:schemeClr val="lt1"/>
-          </a:fontRef>
-        </p:style>
-        <p:txBody>
-          <a:bodyPr rtlCol="0" anchor="ctr"/>
-          <a:lstStyle/>
-          <a:p>
-            <a:pPr algn="ctr"/>
-          </a:p>
-        </p:txBody>
-      </p:sp>
-      <p:sp>
-        <p:nvSpPr>
-          <p:cNvPr id="44" name="TextBox 43"/>
-          <p:cNvSpPr txBox="1"/>
-          <p:nvPr/>
-        </p:nvSpPr>
-        <p:spPr>
-          <a:xfrm>
-            <a:off x="5010150" y="3733800"/>
-            <a:ext cx="2590800" cy="1143000"/>
-          </a:xfrm>
-          <a:prstGeom prst="rect">
-            <a:avLst/>
-          </a:prstGeom>
-          <a:noFill/>
-        </p:spPr>
-        <p:txBody>
-          <a:bodyPr wrap="square" anchor="ctr">
-            <a:spAutoFit/>
-          </a:bodyPr>
-          <a:lstStyle/>
-          <a:p>
-            <a:pPr algn="l">
-              <a:lnSpc>
-                <a:spcPct val="100000"/>
-              </a:lnSpc>
-            </a:pPr>
-            <a:r>
-              <a:rPr sz="1200" b="1">
-                <a:solidFill>
-                  <a:srgbClr val="475569"/>
-                </a:solidFill>
-                <a:latin typeface="PingFang SC"/>
-              </a:rPr>
-              <a:t>API Key</a:t>
-            </a:r>
-          </a:p>
-        </p:txBody>
-      </p:sp>
-      <p:sp>
-        <p:nvSpPr>
-          <p:cNvPr id="45" name="Rounded Rectangle 44"/>
-          <p:cNvSpPr/>
-          <p:nvPr/>
-        </p:nvSpPr>
-        <p:spPr>
-          <a:xfrm>
-            <a:off x="7848600" y="3733800"/>
-            <a:ext cx="2819400" cy="1143000"/>
-          </a:xfrm>
-          <a:prstGeom prst="roundRect">
-            <a:avLst>
-              <a:gd name="adj" fmla="val 8000"/>
-            </a:avLst>
-          </a:prstGeom>
-          <a:solidFill>
-            <a:srgbClr val="FFFFFF"/>
-          </a:solidFill>
-          <a:ln w="12700">
-            <a:solidFill>
-              <a:srgbClr val="8B5CF6"/>
-            </a:solidFill>
-          </a:ln>
-          <a:effectLst/>
-        </p:spPr>
-        <p:style>
-          <a:lnRef idx="1">
-            <a:schemeClr val="accent1"/>
-          </a:lnRef>
-          <a:fillRef idx="3">
-            <a:schemeClr val="accent1"/>
-          </a:fillRef>
-          <a:effectRef idx="2">
-            <a:schemeClr val="accent1"/>
-          </a:effectRef>
-          <a:fontRef idx="minor">
-            <a:schemeClr val="lt1"/>
-          </a:fontRef>
-        </p:style>
-        <p:txBody>
-          <a:bodyPr rtlCol="0" anchor="ctr"/>
-          <a:lstStyle/>
-          <a:p>
-            <a:pPr algn="ctr"/>
-          </a:p>
-        </p:txBody>
-      </p:sp>
-      <p:sp>
-        <p:nvSpPr>
-          <p:cNvPr id="46" name="Rectangle 45"/>
-          <p:cNvSpPr/>
-          <p:nvPr/>
-        </p:nvSpPr>
-        <p:spPr>
-          <a:xfrm>
-            <a:off x="7848600" y="3733800"/>
-            <a:ext cx="47625" cy="1143000"/>
-          </a:xfrm>
-          <a:prstGeom prst="rect">
-            <a:avLst/>
-          </a:prstGeom>
-          <a:solidFill>
-            <a:srgbClr val="8B5CF6"/>
-          </a:solidFill>
-          <a:ln>
-            <a:noFill/>
-          </a:ln>
-          <a:effectLst/>
-        </p:spPr>
-        <p:style>
-          <a:lnRef idx="1">
-            <a:schemeClr val="accent1"/>
-          </a:lnRef>
-          <a:fillRef idx="3">
-            <a:schemeClr val="accent1"/>
-          </a:fillRef>
-          <a:effectRef idx="2">
-            <a:schemeClr val="accent1"/>
-          </a:effectRef>
-          <a:fontRef idx="minor">
-            <a:schemeClr val="lt1"/>
-          </a:fontRef>
-        </p:style>
-        <p:txBody>
-          <a:bodyPr rtlCol="0" anchor="ctr"/>
-          <a:lstStyle/>
-          <a:p>
-            <a:pPr algn="ctr"/>
-          </a:p>
-        </p:txBody>
-      </p:sp>
-      <p:sp>
-        <p:nvSpPr>
-          <p:cNvPr id="47" name="TextBox 46"/>
-          <p:cNvSpPr txBox="1"/>
-          <p:nvPr/>
-        </p:nvSpPr>
-        <p:spPr>
-          <a:xfrm>
-            <a:off x="7981950" y="3733800"/>
-            <a:ext cx="2590800" cy="1143000"/>
-          </a:xfrm>
-          <a:prstGeom prst="rect">
-            <a:avLst/>
-          </a:prstGeom>
-          <a:noFill/>
-        </p:spPr>
-        <p:txBody>
-          <a:bodyPr wrap="square" anchor="ctr">
-            <a:spAutoFit/>
-          </a:bodyPr>
-          <a:lstStyle/>
-          <a:p>
-            <a:pPr algn="l">
-              <a:lnSpc>
-                <a:spcPct val="100000"/>
-              </a:lnSpc>
-            </a:pPr>
-            <a:r>
-              <a:rPr sz="1200" b="1">
-                <a:solidFill>
-                  <a:srgbClr val="475569"/>
-                </a:solidFill>
-                <a:latin typeface="PingFang SC"/>
-              </a:rPr>
-              <a:t>SMTP Token|缺依赖→启动即自动禁用</a:t>
-            </a:r>
-          </a:p>
-        </p:txBody>
-      </p:sp>
-      <p:sp>
-        <p:nvSpPr>
-          <p:cNvPr id="48" name="TextBox 47"/>
-          <p:cNvSpPr txBox="1"/>
-          <p:nvPr/>
-        </p:nvSpPr>
-        <p:spPr>
-          <a:xfrm>
-            <a:off x="10287000" y="6534150"/>
-            <a:ext cx="1619250" cy="266700"/>
-          </a:xfrm>
-          <a:prstGeom prst="rect">
-            <a:avLst/>
-          </a:prstGeom>
-          <a:noFill/>
-        </p:spPr>
-        <p:txBody>
-          <a:bodyPr wrap="square" anchor="ctr">
-            <a:spAutoFit/>
-          </a:bodyPr>
-          <a:lstStyle/>
-          <a:p>
-            <a:pPr algn="r">
-              <a:lnSpc>
-                <a:spcPct val="100000"/>
-              </a:lnSpc>
-            </a:pPr>
-            <a:r>
               <a:rPr sz="900" b="0">
                 <a:solidFill>
                   <a:srgbClr val="94A3B8"/>
@@ -10457,7 +10592,7 @@
       </p:sp>
       <p:sp>
         <p:nvSpPr>
-          <p:cNvPr id="49" name="TextBox 48"/>
+          <p:cNvPr id="53" name="TextBox 52"/>
           <p:cNvSpPr txBox="1"/>
           <p:nvPr/>
         </p:nvSpPr>
@@ -16227,14 +16362,1342 @@
       </p:sp>
       <p:sp>
         <p:nvSpPr>
-          <p:cNvPr id="5" name="TextBox 4"/>
+          <p:cNvPr id="5" name="Rectangle 4"/>
+          <p:cNvSpPr/>
+          <p:nvPr/>
+        </p:nvSpPr>
+        <p:spPr>
+          <a:xfrm>
+            <a:off x="1619250" y="3314700"/>
+            <a:ext cx="8953500" cy="38100"/>
+          </a:xfrm>
+          <a:prstGeom prst="rect">
+            <a:avLst/>
+          </a:prstGeom>
+          <a:solidFill>
+            <a:srgbClr val="DDE5EE"/>
+          </a:solidFill>
+          <a:ln>
+            <a:noFill/>
+          </a:ln>
+          <a:effectLst/>
+        </p:spPr>
+        <p:style>
+          <a:lnRef idx="1">
+            <a:schemeClr val="accent1"/>
+          </a:lnRef>
+          <a:fillRef idx="3">
+            <a:schemeClr val="accent1"/>
+          </a:fillRef>
+          <a:effectRef idx="2">
+            <a:schemeClr val="accent1"/>
+          </a:effectRef>
+          <a:fontRef idx="minor">
+            <a:schemeClr val="lt1"/>
+          </a:fontRef>
+        </p:style>
+        <p:txBody>
+          <a:bodyPr rtlCol="0" anchor="ctr"/>
+          <a:lstStyle/>
+          <a:p>
+            <a:pPr algn="ctr"/>
+          </a:p>
+        </p:txBody>
+      </p:sp>
+      <p:sp>
+        <p:nvSpPr>
+          <p:cNvPr id="6" name="Rounded Rectangle 5"/>
+          <p:cNvSpPr/>
+          <p:nvPr/>
+        </p:nvSpPr>
+        <p:spPr>
+          <a:xfrm>
+            <a:off x="1514475" y="3228975"/>
+            <a:ext cx="209550" cy="209550"/>
+          </a:xfrm>
+          <a:prstGeom prst="roundRect">
+            <a:avLst>
+              <a:gd name="adj" fmla="val 8000"/>
+            </a:avLst>
+          </a:prstGeom>
+          <a:solidFill>
+            <a:srgbClr val="2563EB"/>
+          </a:solidFill>
+          <a:ln>
+            <a:noFill/>
+          </a:ln>
+          <a:effectLst/>
+        </p:spPr>
+        <p:style>
+          <a:lnRef idx="1">
+            <a:schemeClr val="accent1"/>
+          </a:lnRef>
+          <a:fillRef idx="3">
+            <a:schemeClr val="accent1"/>
+          </a:fillRef>
+          <a:effectRef idx="2">
+            <a:schemeClr val="accent1"/>
+          </a:effectRef>
+          <a:fontRef idx="minor">
+            <a:schemeClr val="lt1"/>
+          </a:fontRef>
+        </p:style>
+        <p:txBody>
+          <a:bodyPr rtlCol="0" anchor="ctr"/>
+          <a:lstStyle/>
+          <a:p>
+            <a:pPr algn="ctr"/>
+          </a:p>
+        </p:txBody>
+      </p:sp>
+      <p:sp>
+        <p:nvSpPr>
+          <p:cNvPr id="7" name="Rounded Rectangle 6"/>
+          <p:cNvSpPr/>
+          <p:nvPr/>
+        </p:nvSpPr>
+        <p:spPr>
+          <a:xfrm>
+            <a:off x="190500" y="1905000"/>
+            <a:ext cx="2857500" cy="1123950"/>
+          </a:xfrm>
+          <a:prstGeom prst="roundRect">
+            <a:avLst>
+              <a:gd name="adj" fmla="val 8000"/>
+            </a:avLst>
+          </a:prstGeom>
+          <a:solidFill>
+            <a:srgbClr val="F1F5F9"/>
+          </a:solidFill>
+          <a:ln>
+            <a:noFill/>
+          </a:ln>
+          <a:effectLst/>
+        </p:spPr>
+        <p:style>
+          <a:lnRef idx="1">
+            <a:schemeClr val="accent1"/>
+          </a:lnRef>
+          <a:fillRef idx="3">
+            <a:schemeClr val="accent1"/>
+          </a:fillRef>
+          <a:effectRef idx="2">
+            <a:schemeClr val="accent1"/>
+          </a:effectRef>
+          <a:fontRef idx="minor">
+            <a:schemeClr val="lt1"/>
+          </a:fontRef>
+        </p:style>
+        <p:txBody>
+          <a:bodyPr rtlCol="0" anchor="ctr"/>
+          <a:lstStyle/>
+          <a:p>
+            <a:pPr algn="ctr"/>
+          </a:p>
+        </p:txBody>
+      </p:sp>
+      <p:sp>
+        <p:nvSpPr>
+          <p:cNvPr id="8" name="Rectangle 7"/>
+          <p:cNvSpPr/>
+          <p:nvPr/>
+        </p:nvSpPr>
+        <p:spPr>
+          <a:xfrm>
+            <a:off x="190500" y="1905000"/>
+            <a:ext cx="2857500" cy="38100"/>
+          </a:xfrm>
+          <a:prstGeom prst="rect">
+            <a:avLst/>
+          </a:prstGeom>
+          <a:solidFill>
+            <a:srgbClr val="2563EB"/>
+          </a:solidFill>
+          <a:ln>
+            <a:noFill/>
+          </a:ln>
+          <a:effectLst/>
+        </p:spPr>
+        <p:style>
+          <a:lnRef idx="1">
+            <a:schemeClr val="accent1"/>
+          </a:lnRef>
+          <a:fillRef idx="3">
+            <a:schemeClr val="accent1"/>
+          </a:fillRef>
+          <a:effectRef idx="2">
+            <a:schemeClr val="accent1"/>
+          </a:effectRef>
+          <a:fontRef idx="minor">
+            <a:schemeClr val="lt1"/>
+          </a:fontRef>
+        </p:style>
+        <p:txBody>
+          <a:bodyPr rtlCol="0" anchor="ctr"/>
+          <a:lstStyle/>
+          <a:p>
+            <a:pPr algn="ctr"/>
+          </a:p>
+        </p:txBody>
+      </p:sp>
+      <p:sp>
+        <p:nvSpPr>
+          <p:cNvPr id="9" name="TextBox 8"/>
           <p:cNvSpPr txBox="1"/>
           <p:nvPr/>
         </p:nvSpPr>
         <p:spPr>
           <a:xfrm>
-            <a:off x="9334500" y="0"/>
-            <a:ext cx="2667000" cy="704850"/>
+            <a:off x="285750" y="2000250"/>
+            <a:ext cx="2667000" cy="285750"/>
+          </a:xfrm>
+          <a:prstGeom prst="rect">
+            <a:avLst/>
+          </a:prstGeom>
+          <a:noFill/>
+        </p:spPr>
+        <p:txBody>
+          <a:bodyPr wrap="square" anchor="ctr">
+            <a:spAutoFit/>
+          </a:bodyPr>
+          <a:lstStyle/>
+          <a:p>
+            <a:pPr algn="ctr">
+              <a:lnSpc>
+                <a:spcPct val="100000"/>
+              </a:lnSpc>
+            </a:pPr>
+            <a:r>
+              <a:rPr sz="1400" b="1">
+                <a:solidFill>
+                  <a:srgbClr val="2563EB"/>
+                </a:solidFill>
+                <a:latin typeface="PingFang SC"/>
+              </a:rPr>
+              <a:t>disable 改共享 spec</a:t>
+            </a:r>
+          </a:p>
+        </p:txBody>
+      </p:sp>
+      <p:sp>
+        <p:nvSpPr>
+          <p:cNvPr id="10" name="TextBox 9"/>
+          <p:cNvSpPr txBox="1"/>
+          <p:nvPr/>
+        </p:nvSpPr>
+        <p:spPr>
+          <a:xfrm>
+            <a:off x="285750" y="2305050"/>
+            <a:ext cx="2667000" cy="666750"/>
+          </a:xfrm>
+          <a:prstGeom prst="rect">
+            <a:avLst/>
+          </a:prstGeom>
+          <a:noFill/>
+        </p:spPr>
+        <p:txBody>
+          <a:bodyPr wrap="square" anchor="ctr">
+            <a:spAutoFit/>
+          </a:bodyPr>
+          <a:lstStyle/>
+          <a:p>
+            <a:pPr algn="l">
+              <a:lnSpc>
+                <a:spcPct val="105000"/>
+              </a:lnSpc>
+            </a:pPr>
+            <a:r>
+              <a:rPr sz="1050" b="0">
+                <a:solidFill>
+                  <a:srgbClr val="475569"/>
+                </a:solidFill>
+                <a:latin typeface="PingFang SC"/>
+              </a:rPr>
+              <a:t/>
+            </a:r>
+          </a:p>
+        </p:txBody>
+      </p:sp>
+      <p:sp>
+        <p:nvSpPr>
+          <p:cNvPr id="11" name="Rounded Rectangle 10"/>
+          <p:cNvSpPr/>
+          <p:nvPr/>
+        </p:nvSpPr>
+        <p:spPr>
+          <a:xfrm>
+            <a:off x="3305175" y="3228975"/>
+            <a:ext cx="209550" cy="209550"/>
+          </a:xfrm>
+          <a:prstGeom prst="roundRect">
+            <a:avLst>
+              <a:gd name="adj" fmla="val 8000"/>
+            </a:avLst>
+          </a:prstGeom>
+          <a:solidFill>
+            <a:srgbClr val="14B8A6"/>
+          </a:solidFill>
+          <a:ln>
+            <a:noFill/>
+          </a:ln>
+          <a:effectLst/>
+        </p:spPr>
+        <p:style>
+          <a:lnRef idx="1">
+            <a:schemeClr val="accent1"/>
+          </a:lnRef>
+          <a:fillRef idx="3">
+            <a:schemeClr val="accent1"/>
+          </a:fillRef>
+          <a:effectRef idx="2">
+            <a:schemeClr val="accent1"/>
+          </a:effectRef>
+          <a:fontRef idx="minor">
+            <a:schemeClr val="lt1"/>
+          </a:fontRef>
+        </p:style>
+        <p:txBody>
+          <a:bodyPr rtlCol="0" anchor="ctr"/>
+          <a:lstStyle/>
+          <a:p>
+            <a:pPr algn="ctr"/>
+          </a:p>
+        </p:txBody>
+      </p:sp>
+      <p:sp>
+        <p:nvSpPr>
+          <p:cNvPr id="12" name="Rounded Rectangle 11"/>
+          <p:cNvSpPr/>
+          <p:nvPr/>
+        </p:nvSpPr>
+        <p:spPr>
+          <a:xfrm>
+            <a:off x="1981200" y="3619500"/>
+            <a:ext cx="2857500" cy="1123950"/>
+          </a:xfrm>
+          <a:prstGeom prst="roundRect">
+            <a:avLst>
+              <a:gd name="adj" fmla="val 8000"/>
+            </a:avLst>
+          </a:prstGeom>
+          <a:solidFill>
+            <a:srgbClr val="F1F5F9"/>
+          </a:solidFill>
+          <a:ln>
+            <a:noFill/>
+          </a:ln>
+          <a:effectLst/>
+        </p:spPr>
+        <p:style>
+          <a:lnRef idx="1">
+            <a:schemeClr val="accent1"/>
+          </a:lnRef>
+          <a:fillRef idx="3">
+            <a:schemeClr val="accent1"/>
+          </a:fillRef>
+          <a:effectRef idx="2">
+            <a:schemeClr val="accent1"/>
+          </a:effectRef>
+          <a:fontRef idx="minor">
+            <a:schemeClr val="lt1"/>
+          </a:fontRef>
+        </p:style>
+        <p:txBody>
+          <a:bodyPr rtlCol="0" anchor="ctr"/>
+          <a:lstStyle/>
+          <a:p>
+            <a:pPr algn="ctr"/>
+          </a:p>
+        </p:txBody>
+      </p:sp>
+      <p:sp>
+        <p:nvSpPr>
+          <p:cNvPr id="13" name="Rectangle 12"/>
+          <p:cNvSpPr/>
+          <p:nvPr/>
+        </p:nvSpPr>
+        <p:spPr>
+          <a:xfrm>
+            <a:off x="1981200" y="3619500"/>
+            <a:ext cx="2857500" cy="38100"/>
+          </a:xfrm>
+          <a:prstGeom prst="rect">
+            <a:avLst/>
+          </a:prstGeom>
+          <a:solidFill>
+            <a:srgbClr val="14B8A6"/>
+          </a:solidFill>
+          <a:ln>
+            <a:noFill/>
+          </a:ln>
+          <a:effectLst/>
+        </p:spPr>
+        <p:style>
+          <a:lnRef idx="1">
+            <a:schemeClr val="accent1"/>
+          </a:lnRef>
+          <a:fillRef idx="3">
+            <a:schemeClr val="accent1"/>
+          </a:fillRef>
+          <a:effectRef idx="2">
+            <a:schemeClr val="accent1"/>
+          </a:effectRef>
+          <a:fontRef idx="minor">
+            <a:schemeClr val="lt1"/>
+          </a:fontRef>
+        </p:style>
+        <p:txBody>
+          <a:bodyPr rtlCol="0" anchor="ctr"/>
+          <a:lstStyle/>
+          <a:p>
+            <a:pPr algn="ctr"/>
+          </a:p>
+        </p:txBody>
+      </p:sp>
+      <p:sp>
+        <p:nvSpPr>
+          <p:cNvPr id="14" name="TextBox 13"/>
+          <p:cNvSpPr txBox="1"/>
+          <p:nvPr/>
+        </p:nvSpPr>
+        <p:spPr>
+          <a:xfrm>
+            <a:off x="2076450" y="3714750"/>
+            <a:ext cx="2667000" cy="285750"/>
+          </a:xfrm>
+          <a:prstGeom prst="rect">
+            <a:avLst/>
+          </a:prstGeom>
+          <a:noFill/>
+        </p:spPr>
+        <p:txBody>
+          <a:bodyPr wrap="square" anchor="ctr">
+            <a:spAutoFit/>
+          </a:bodyPr>
+          <a:lstStyle/>
+          <a:p>
+            <a:pPr algn="ctr">
+              <a:lnSpc>
+                <a:spcPct val="100000"/>
+              </a:lnSpc>
+            </a:pPr>
+            <a:r>
+              <a:rPr sz="1400" b="1">
+                <a:solidFill>
+                  <a:srgbClr val="14B8A6"/>
+                </a:solidFill>
+                <a:latin typeface="PingFang SC"/>
+              </a:rPr>
+              <a:t>后续 3 个权限测试连环假失败</a:t>
+            </a:r>
+          </a:p>
+        </p:txBody>
+      </p:sp>
+      <p:sp>
+        <p:nvSpPr>
+          <p:cNvPr id="15" name="TextBox 14"/>
+          <p:cNvSpPr txBox="1"/>
+          <p:nvPr/>
+        </p:nvSpPr>
+        <p:spPr>
+          <a:xfrm>
+            <a:off x="2076450" y="4019550"/>
+            <a:ext cx="2667000" cy="666750"/>
+          </a:xfrm>
+          <a:prstGeom prst="rect">
+            <a:avLst/>
+          </a:prstGeom>
+          <a:noFill/>
+        </p:spPr>
+        <p:txBody>
+          <a:bodyPr wrap="square" anchor="ctr">
+            <a:spAutoFit/>
+          </a:bodyPr>
+          <a:lstStyle/>
+          <a:p>
+            <a:pPr algn="l">
+              <a:lnSpc>
+                <a:spcPct val="105000"/>
+              </a:lnSpc>
+            </a:pPr>
+            <a:r>
+              <a:rPr sz="1050" b="0">
+                <a:solidFill>
+                  <a:srgbClr val="475569"/>
+                </a:solidFill>
+                <a:latin typeface="PingFang SC"/>
+              </a:rPr>
+              <a:t/>
+            </a:r>
+          </a:p>
+        </p:txBody>
+      </p:sp>
+      <p:sp>
+        <p:nvSpPr>
+          <p:cNvPr id="16" name="Rounded Rectangle 15"/>
+          <p:cNvSpPr/>
+          <p:nvPr/>
+        </p:nvSpPr>
+        <p:spPr>
+          <a:xfrm>
+            <a:off x="5095875" y="3228975"/>
+            <a:ext cx="209550" cy="209550"/>
+          </a:xfrm>
+          <a:prstGeom prst="roundRect">
+            <a:avLst>
+              <a:gd name="adj" fmla="val 8000"/>
+            </a:avLst>
+          </a:prstGeom>
+          <a:solidFill>
+            <a:srgbClr val="8B5CF6"/>
+          </a:solidFill>
+          <a:ln>
+            <a:noFill/>
+          </a:ln>
+          <a:effectLst/>
+        </p:spPr>
+        <p:style>
+          <a:lnRef idx="1">
+            <a:schemeClr val="accent1"/>
+          </a:lnRef>
+          <a:fillRef idx="3">
+            <a:schemeClr val="accent1"/>
+          </a:fillRef>
+          <a:effectRef idx="2">
+            <a:schemeClr val="accent1"/>
+          </a:effectRef>
+          <a:fontRef idx="minor">
+            <a:schemeClr val="lt1"/>
+          </a:fontRef>
+        </p:style>
+        <p:txBody>
+          <a:bodyPr rtlCol="0" anchor="ctr"/>
+          <a:lstStyle/>
+          <a:p>
+            <a:pPr algn="ctr"/>
+          </a:p>
+        </p:txBody>
+      </p:sp>
+      <p:sp>
+        <p:nvSpPr>
+          <p:cNvPr id="17" name="Rounded Rectangle 16"/>
+          <p:cNvSpPr/>
+          <p:nvPr/>
+        </p:nvSpPr>
+        <p:spPr>
+          <a:xfrm>
+            <a:off x="3771900" y="1905000"/>
+            <a:ext cx="2857500" cy="1123950"/>
+          </a:xfrm>
+          <a:prstGeom prst="roundRect">
+            <a:avLst>
+              <a:gd name="adj" fmla="val 8000"/>
+            </a:avLst>
+          </a:prstGeom>
+          <a:solidFill>
+            <a:srgbClr val="F1F5F9"/>
+          </a:solidFill>
+          <a:ln>
+            <a:noFill/>
+          </a:ln>
+          <a:effectLst/>
+        </p:spPr>
+        <p:style>
+          <a:lnRef idx="1">
+            <a:schemeClr val="accent1"/>
+          </a:lnRef>
+          <a:fillRef idx="3">
+            <a:schemeClr val="accent1"/>
+          </a:fillRef>
+          <a:effectRef idx="2">
+            <a:schemeClr val="accent1"/>
+          </a:effectRef>
+          <a:fontRef idx="minor">
+            <a:schemeClr val="lt1"/>
+          </a:fontRef>
+        </p:style>
+        <p:txBody>
+          <a:bodyPr rtlCol="0" anchor="ctr"/>
+          <a:lstStyle/>
+          <a:p>
+            <a:pPr algn="ctr"/>
+          </a:p>
+        </p:txBody>
+      </p:sp>
+      <p:sp>
+        <p:nvSpPr>
+          <p:cNvPr id="18" name="Rectangle 17"/>
+          <p:cNvSpPr/>
+          <p:nvPr/>
+        </p:nvSpPr>
+        <p:spPr>
+          <a:xfrm>
+            <a:off x="3771900" y="1905000"/>
+            <a:ext cx="2857500" cy="38100"/>
+          </a:xfrm>
+          <a:prstGeom prst="rect">
+            <a:avLst/>
+          </a:prstGeom>
+          <a:solidFill>
+            <a:srgbClr val="8B5CF6"/>
+          </a:solidFill>
+          <a:ln>
+            <a:noFill/>
+          </a:ln>
+          <a:effectLst/>
+        </p:spPr>
+        <p:style>
+          <a:lnRef idx="1">
+            <a:schemeClr val="accent1"/>
+          </a:lnRef>
+          <a:fillRef idx="3">
+            <a:schemeClr val="accent1"/>
+          </a:fillRef>
+          <a:effectRef idx="2">
+            <a:schemeClr val="accent1"/>
+          </a:effectRef>
+          <a:fontRef idx="minor">
+            <a:schemeClr val="lt1"/>
+          </a:fontRef>
+        </p:style>
+        <p:txBody>
+          <a:bodyPr rtlCol="0" anchor="ctr"/>
+          <a:lstStyle/>
+          <a:p>
+            <a:pPr algn="ctr"/>
+          </a:p>
+        </p:txBody>
+      </p:sp>
+      <p:sp>
+        <p:nvSpPr>
+          <p:cNvPr id="19" name="TextBox 18"/>
+          <p:cNvSpPr txBox="1"/>
+          <p:nvPr/>
+        </p:nvSpPr>
+        <p:spPr>
+          <a:xfrm>
+            <a:off x="3867150" y="2000250"/>
+            <a:ext cx="2667000" cy="285750"/>
+          </a:xfrm>
+          <a:prstGeom prst="rect">
+            <a:avLst/>
+          </a:prstGeom>
+          <a:noFill/>
+        </p:spPr>
+        <p:txBody>
+          <a:bodyPr wrap="square" anchor="ctr">
+            <a:spAutoFit/>
+          </a:bodyPr>
+          <a:lstStyle/>
+          <a:p>
+            <a:pPr algn="ctr">
+              <a:lnSpc>
+                <a:spcPct val="100000"/>
+              </a:lnSpc>
+            </a:pPr>
+            <a:r>
+              <a:rPr sz="1400" b="1">
+                <a:solidFill>
+                  <a:srgbClr val="8B5CF6"/>
+                </a:solidFill>
+                <a:latin typeface="PingFang SC"/>
+              </a:rPr>
+              <a:t>单跑全绿/全量必红</a:t>
+            </a:r>
+          </a:p>
+        </p:txBody>
+      </p:sp>
+      <p:sp>
+        <p:nvSpPr>
+          <p:cNvPr id="20" name="TextBox 19"/>
+          <p:cNvSpPr txBox="1"/>
+          <p:nvPr/>
+        </p:nvSpPr>
+        <p:spPr>
+          <a:xfrm>
+            <a:off x="3867150" y="2305050"/>
+            <a:ext cx="2667000" cy="666750"/>
+          </a:xfrm>
+          <a:prstGeom prst="rect">
+            <a:avLst/>
+          </a:prstGeom>
+          <a:noFill/>
+        </p:spPr>
+        <p:txBody>
+          <a:bodyPr wrap="square" anchor="ctr">
+            <a:spAutoFit/>
+          </a:bodyPr>
+          <a:lstStyle/>
+          <a:p>
+            <a:pPr algn="l">
+              <a:lnSpc>
+                <a:spcPct val="105000"/>
+              </a:lnSpc>
+            </a:pPr>
+            <a:r>
+              <a:rPr sz="1050" b="0">
+                <a:solidFill>
+                  <a:srgbClr val="475569"/>
+                </a:solidFill>
+                <a:latin typeface="PingFang SC"/>
+              </a:rPr>
+              <a:t/>
+            </a:r>
+          </a:p>
+        </p:txBody>
+      </p:sp>
+      <p:sp>
+        <p:nvSpPr>
+          <p:cNvPr id="21" name="Rounded Rectangle 20"/>
+          <p:cNvSpPr/>
+          <p:nvPr/>
+        </p:nvSpPr>
+        <p:spPr>
+          <a:xfrm>
+            <a:off x="6886575" y="3228975"/>
+            <a:ext cx="209550" cy="209550"/>
+          </a:xfrm>
+          <a:prstGeom prst="roundRect">
+            <a:avLst>
+              <a:gd name="adj" fmla="val 8000"/>
+            </a:avLst>
+          </a:prstGeom>
+          <a:solidFill>
+            <a:srgbClr val="F59E0B"/>
+          </a:solidFill>
+          <a:ln>
+            <a:noFill/>
+          </a:ln>
+          <a:effectLst/>
+        </p:spPr>
+        <p:style>
+          <a:lnRef idx="1">
+            <a:schemeClr val="accent1"/>
+          </a:lnRef>
+          <a:fillRef idx="3">
+            <a:schemeClr val="accent1"/>
+          </a:fillRef>
+          <a:effectRef idx="2">
+            <a:schemeClr val="accent1"/>
+          </a:effectRef>
+          <a:fontRef idx="minor">
+            <a:schemeClr val="lt1"/>
+          </a:fontRef>
+        </p:style>
+        <p:txBody>
+          <a:bodyPr rtlCol="0" anchor="ctr"/>
+          <a:lstStyle/>
+          <a:p>
+            <a:pPr algn="ctr"/>
+          </a:p>
+        </p:txBody>
+      </p:sp>
+      <p:sp>
+        <p:nvSpPr>
+          <p:cNvPr id="22" name="Rounded Rectangle 21"/>
+          <p:cNvSpPr/>
+          <p:nvPr/>
+        </p:nvSpPr>
+        <p:spPr>
+          <a:xfrm>
+            <a:off x="5562600" y="3619500"/>
+            <a:ext cx="2857500" cy="1123950"/>
+          </a:xfrm>
+          <a:prstGeom prst="roundRect">
+            <a:avLst>
+              <a:gd name="adj" fmla="val 8000"/>
+            </a:avLst>
+          </a:prstGeom>
+          <a:solidFill>
+            <a:srgbClr val="F1F5F9"/>
+          </a:solidFill>
+          <a:ln>
+            <a:noFill/>
+          </a:ln>
+          <a:effectLst/>
+        </p:spPr>
+        <p:style>
+          <a:lnRef idx="1">
+            <a:schemeClr val="accent1"/>
+          </a:lnRef>
+          <a:fillRef idx="3">
+            <a:schemeClr val="accent1"/>
+          </a:fillRef>
+          <a:effectRef idx="2">
+            <a:schemeClr val="accent1"/>
+          </a:effectRef>
+          <a:fontRef idx="minor">
+            <a:schemeClr val="lt1"/>
+          </a:fontRef>
+        </p:style>
+        <p:txBody>
+          <a:bodyPr rtlCol="0" anchor="ctr"/>
+          <a:lstStyle/>
+          <a:p>
+            <a:pPr algn="ctr"/>
+          </a:p>
+        </p:txBody>
+      </p:sp>
+      <p:sp>
+        <p:nvSpPr>
+          <p:cNvPr id="23" name="Rectangle 22"/>
+          <p:cNvSpPr/>
+          <p:nvPr/>
+        </p:nvSpPr>
+        <p:spPr>
+          <a:xfrm>
+            <a:off x="5562600" y="3619500"/>
+            <a:ext cx="2857500" cy="38100"/>
+          </a:xfrm>
+          <a:prstGeom prst="rect">
+            <a:avLst/>
+          </a:prstGeom>
+          <a:solidFill>
+            <a:srgbClr val="F59E0B"/>
+          </a:solidFill>
+          <a:ln>
+            <a:noFill/>
+          </a:ln>
+          <a:effectLst/>
+        </p:spPr>
+        <p:style>
+          <a:lnRef idx="1">
+            <a:schemeClr val="accent1"/>
+          </a:lnRef>
+          <a:fillRef idx="3">
+            <a:schemeClr val="accent1"/>
+          </a:fillRef>
+          <a:effectRef idx="2">
+            <a:schemeClr val="accent1"/>
+          </a:effectRef>
+          <a:fontRef idx="minor">
+            <a:schemeClr val="lt1"/>
+          </a:fontRef>
+        </p:style>
+        <p:txBody>
+          <a:bodyPr rtlCol="0" anchor="ctr"/>
+          <a:lstStyle/>
+          <a:p>
+            <a:pPr algn="ctr"/>
+          </a:p>
+        </p:txBody>
+      </p:sp>
+      <p:sp>
+        <p:nvSpPr>
+          <p:cNvPr id="24" name="TextBox 23"/>
+          <p:cNvSpPr txBox="1"/>
+          <p:nvPr/>
+        </p:nvSpPr>
+        <p:spPr>
+          <a:xfrm>
+            <a:off x="5657850" y="3714750"/>
+            <a:ext cx="2667000" cy="285750"/>
+          </a:xfrm>
+          <a:prstGeom prst="rect">
+            <a:avLst/>
+          </a:prstGeom>
+          <a:noFill/>
+        </p:spPr>
+        <p:txBody>
+          <a:bodyPr wrap="square" anchor="ctr">
+            <a:spAutoFit/>
+          </a:bodyPr>
+          <a:lstStyle/>
+          <a:p>
+            <a:pPr algn="ctr">
+              <a:lnSpc>
+                <a:spcPct val="100000"/>
+              </a:lnSpc>
+            </a:pPr>
+            <a:r>
+              <a:rPr sz="1400" b="1">
+                <a:solidFill>
+                  <a:srgbClr val="F59E0B"/>
+                </a:solidFill>
+                <a:latin typeface="PingFang SC"/>
+              </a:rPr>
+              <a:t>根因</a:t>
+            </a:r>
+          </a:p>
+        </p:txBody>
+      </p:sp>
+      <p:sp>
+        <p:nvSpPr>
+          <p:cNvPr id="25" name="TextBox 24"/>
+          <p:cNvSpPr txBox="1"/>
+          <p:nvPr/>
+        </p:nvSpPr>
+        <p:spPr>
+          <a:xfrm>
+            <a:off x="5657850" y="4019550"/>
+            <a:ext cx="2667000" cy="666750"/>
+          </a:xfrm>
+          <a:prstGeom prst="rect">
+            <a:avLst/>
+          </a:prstGeom>
+          <a:noFill/>
+        </p:spPr>
+        <p:txBody>
+          <a:bodyPr wrap="square" anchor="ctr">
+            <a:spAutoFit/>
+          </a:bodyPr>
+          <a:lstStyle/>
+          <a:p>
+            <a:pPr algn="l">
+              <a:lnSpc>
+                <a:spcPct val="105000"/>
+              </a:lnSpc>
+            </a:pPr>
+            <a:r>
+              <a:rPr sz="1050" b="0">
+                <a:solidFill>
+                  <a:srgbClr val="475569"/>
+                </a:solidFill>
+                <a:latin typeface="PingFang SC"/>
+              </a:rPr>
+              <a:t>可变共享状态</a:t>
+            </a:r>
+          </a:p>
+        </p:txBody>
+      </p:sp>
+      <p:sp>
+        <p:nvSpPr>
+          <p:cNvPr id="26" name="Rounded Rectangle 25"/>
+          <p:cNvSpPr/>
+          <p:nvPr/>
+        </p:nvSpPr>
+        <p:spPr>
+          <a:xfrm>
+            <a:off x="8677275" y="3228975"/>
+            <a:ext cx="209550" cy="209550"/>
+          </a:xfrm>
+          <a:prstGeom prst="roundRect">
+            <a:avLst>
+              <a:gd name="adj" fmla="val 8000"/>
+            </a:avLst>
+          </a:prstGeom>
+          <a:solidFill>
+            <a:srgbClr val="34D399"/>
+          </a:solidFill>
+          <a:ln>
+            <a:noFill/>
+          </a:ln>
+          <a:effectLst/>
+        </p:spPr>
+        <p:style>
+          <a:lnRef idx="1">
+            <a:schemeClr val="accent1"/>
+          </a:lnRef>
+          <a:fillRef idx="3">
+            <a:schemeClr val="accent1"/>
+          </a:fillRef>
+          <a:effectRef idx="2">
+            <a:schemeClr val="accent1"/>
+          </a:effectRef>
+          <a:fontRef idx="minor">
+            <a:schemeClr val="lt1"/>
+          </a:fontRef>
+        </p:style>
+        <p:txBody>
+          <a:bodyPr rtlCol="0" anchor="ctr"/>
+          <a:lstStyle/>
+          <a:p>
+            <a:pPr algn="ctr"/>
+          </a:p>
+        </p:txBody>
+      </p:sp>
+      <p:sp>
+        <p:nvSpPr>
+          <p:cNvPr id="27" name="Rounded Rectangle 26"/>
+          <p:cNvSpPr/>
+          <p:nvPr/>
+        </p:nvSpPr>
+        <p:spPr>
+          <a:xfrm>
+            <a:off x="7353300" y="1905000"/>
+            <a:ext cx="2857500" cy="1123950"/>
+          </a:xfrm>
+          <a:prstGeom prst="roundRect">
+            <a:avLst>
+              <a:gd name="adj" fmla="val 8000"/>
+            </a:avLst>
+          </a:prstGeom>
+          <a:solidFill>
+            <a:srgbClr val="F1F5F9"/>
+          </a:solidFill>
+          <a:ln>
+            <a:noFill/>
+          </a:ln>
+          <a:effectLst/>
+        </p:spPr>
+        <p:style>
+          <a:lnRef idx="1">
+            <a:schemeClr val="accent1"/>
+          </a:lnRef>
+          <a:fillRef idx="3">
+            <a:schemeClr val="accent1"/>
+          </a:fillRef>
+          <a:effectRef idx="2">
+            <a:schemeClr val="accent1"/>
+          </a:effectRef>
+          <a:fontRef idx="minor">
+            <a:schemeClr val="lt1"/>
+          </a:fontRef>
+        </p:style>
+        <p:txBody>
+          <a:bodyPr rtlCol="0" anchor="ctr"/>
+          <a:lstStyle/>
+          <a:p>
+            <a:pPr algn="ctr"/>
+          </a:p>
+        </p:txBody>
+      </p:sp>
+      <p:sp>
+        <p:nvSpPr>
+          <p:cNvPr id="28" name="Rectangle 27"/>
+          <p:cNvSpPr/>
+          <p:nvPr/>
+        </p:nvSpPr>
+        <p:spPr>
+          <a:xfrm>
+            <a:off x="7353300" y="1905000"/>
+            <a:ext cx="2857500" cy="38100"/>
+          </a:xfrm>
+          <a:prstGeom prst="rect">
+            <a:avLst/>
+          </a:prstGeom>
+          <a:solidFill>
+            <a:srgbClr val="34D399"/>
+          </a:solidFill>
+          <a:ln>
+            <a:noFill/>
+          </a:ln>
+          <a:effectLst/>
+        </p:spPr>
+        <p:style>
+          <a:lnRef idx="1">
+            <a:schemeClr val="accent1"/>
+          </a:lnRef>
+          <a:fillRef idx="3">
+            <a:schemeClr val="accent1"/>
+          </a:fillRef>
+          <a:effectRef idx="2">
+            <a:schemeClr val="accent1"/>
+          </a:effectRef>
+          <a:fontRef idx="minor">
+            <a:schemeClr val="lt1"/>
+          </a:fontRef>
+        </p:style>
+        <p:txBody>
+          <a:bodyPr rtlCol="0" anchor="ctr"/>
+          <a:lstStyle/>
+          <a:p>
+            <a:pPr algn="ctr"/>
+          </a:p>
+        </p:txBody>
+      </p:sp>
+      <p:sp>
+        <p:nvSpPr>
+          <p:cNvPr id="29" name="TextBox 28"/>
+          <p:cNvSpPr txBox="1"/>
+          <p:nvPr/>
+        </p:nvSpPr>
+        <p:spPr>
+          <a:xfrm>
+            <a:off x="7448550" y="2000250"/>
+            <a:ext cx="2667000" cy="285750"/>
+          </a:xfrm>
+          <a:prstGeom prst="rect">
+            <a:avLst/>
+          </a:prstGeom>
+          <a:noFill/>
+        </p:spPr>
+        <p:txBody>
+          <a:bodyPr wrap="square" anchor="ctr">
+            <a:spAutoFit/>
+          </a:bodyPr>
+          <a:lstStyle/>
+          <a:p>
+            <a:pPr algn="ctr">
+              <a:lnSpc>
+                <a:spcPct val="100000"/>
+              </a:lnSpc>
+            </a:pPr>
+            <a:r>
+              <a:rPr sz="1400" b="1">
+                <a:solidFill>
+                  <a:srgbClr val="34D399"/>
+                </a:solidFill>
+                <a:latin typeface="PingFang SC"/>
+              </a:rPr>
+              <a:t>修复</a:t>
+            </a:r>
+          </a:p>
+        </p:txBody>
+      </p:sp>
+      <p:sp>
+        <p:nvSpPr>
+          <p:cNvPr id="30" name="TextBox 29"/>
+          <p:cNvSpPr txBox="1"/>
+          <p:nvPr/>
+        </p:nvSpPr>
+        <p:spPr>
+          <a:xfrm>
+            <a:off x="7448550" y="2305050"/>
+            <a:ext cx="2667000" cy="666750"/>
+          </a:xfrm>
+          <a:prstGeom prst="rect">
+            <a:avLst/>
+          </a:prstGeom>
+          <a:noFill/>
+        </p:spPr>
+        <p:txBody>
+          <a:bodyPr wrap="square" anchor="ctr">
+            <a:spAutoFit/>
+          </a:bodyPr>
+          <a:lstStyle/>
+          <a:p>
+            <a:pPr algn="l">
+              <a:lnSpc>
+                <a:spcPct val="105000"/>
+              </a:lnSpc>
+            </a:pPr>
+            <a:r>
+              <a:rPr sz="1050" b="0">
+                <a:solidFill>
+                  <a:srgbClr val="475569"/>
+                </a:solidFill>
+                <a:latin typeface="PingFang SC"/>
+              </a:rPr>
+              <a:t>启停收归 Registry</a:t>
+            </a:r>
+          </a:p>
+        </p:txBody>
+      </p:sp>
+      <p:sp>
+        <p:nvSpPr>
+          <p:cNvPr id="31" name="Rounded Rectangle 30"/>
+          <p:cNvSpPr/>
+          <p:nvPr/>
+        </p:nvSpPr>
+        <p:spPr>
+          <a:xfrm>
+            <a:off x="10467975" y="3228975"/>
+            <a:ext cx="209550" cy="209550"/>
+          </a:xfrm>
+          <a:prstGeom prst="roundRect">
+            <a:avLst>
+              <a:gd name="adj" fmla="val 8000"/>
+            </a:avLst>
+          </a:prstGeom>
+          <a:solidFill>
+            <a:srgbClr val="F87171"/>
+          </a:solidFill>
+          <a:ln>
+            <a:noFill/>
+          </a:ln>
+          <a:effectLst/>
+        </p:spPr>
+        <p:style>
+          <a:lnRef idx="1">
+            <a:schemeClr val="accent1"/>
+          </a:lnRef>
+          <a:fillRef idx="3">
+            <a:schemeClr val="accent1"/>
+          </a:fillRef>
+          <a:effectRef idx="2">
+            <a:schemeClr val="accent1"/>
+          </a:effectRef>
+          <a:fontRef idx="minor">
+            <a:schemeClr val="lt1"/>
+          </a:fontRef>
+        </p:style>
+        <p:txBody>
+          <a:bodyPr rtlCol="0" anchor="ctr"/>
+          <a:lstStyle/>
+          <a:p>
+            <a:pPr algn="ctr"/>
+          </a:p>
+        </p:txBody>
+      </p:sp>
+      <p:sp>
+        <p:nvSpPr>
+          <p:cNvPr id="32" name="Rounded Rectangle 31"/>
+          <p:cNvSpPr/>
+          <p:nvPr/>
+        </p:nvSpPr>
+        <p:spPr>
+          <a:xfrm>
+            <a:off x="9144000" y="3619500"/>
+            <a:ext cx="2857500" cy="1123950"/>
+          </a:xfrm>
+          <a:prstGeom prst="roundRect">
+            <a:avLst>
+              <a:gd name="adj" fmla="val 8000"/>
+            </a:avLst>
+          </a:prstGeom>
+          <a:solidFill>
+            <a:srgbClr val="F1F5F9"/>
+          </a:solidFill>
+          <a:ln>
+            <a:noFill/>
+          </a:ln>
+          <a:effectLst/>
+        </p:spPr>
+        <p:style>
+          <a:lnRef idx="1">
+            <a:schemeClr val="accent1"/>
+          </a:lnRef>
+          <a:fillRef idx="3">
+            <a:schemeClr val="accent1"/>
+          </a:fillRef>
+          <a:effectRef idx="2">
+            <a:schemeClr val="accent1"/>
+          </a:effectRef>
+          <a:fontRef idx="minor">
+            <a:schemeClr val="lt1"/>
+          </a:fontRef>
+        </p:style>
+        <p:txBody>
+          <a:bodyPr rtlCol="0" anchor="ctr"/>
+          <a:lstStyle/>
+          <a:p>
+            <a:pPr algn="ctr"/>
+          </a:p>
+        </p:txBody>
+      </p:sp>
+      <p:sp>
+        <p:nvSpPr>
+          <p:cNvPr id="33" name="Rectangle 32"/>
+          <p:cNvSpPr/>
+          <p:nvPr/>
+        </p:nvSpPr>
+        <p:spPr>
+          <a:xfrm>
+            <a:off x="9144000" y="3619500"/>
+            <a:ext cx="2857500" cy="38100"/>
+          </a:xfrm>
+          <a:prstGeom prst="rect">
+            <a:avLst/>
+          </a:prstGeom>
+          <a:solidFill>
+            <a:srgbClr val="F87171"/>
+          </a:solidFill>
+          <a:ln>
+            <a:noFill/>
+          </a:ln>
+          <a:effectLst/>
+        </p:spPr>
+        <p:style>
+          <a:lnRef idx="1">
+            <a:schemeClr val="accent1"/>
+          </a:lnRef>
+          <a:fillRef idx="3">
+            <a:schemeClr val="accent1"/>
+          </a:fillRef>
+          <a:effectRef idx="2">
+            <a:schemeClr val="accent1"/>
+          </a:effectRef>
+          <a:fontRef idx="minor">
+            <a:schemeClr val="lt1"/>
+          </a:fontRef>
+        </p:style>
+        <p:txBody>
+          <a:bodyPr rtlCol="0" anchor="ctr"/>
+          <a:lstStyle/>
+          <a:p>
+            <a:pPr algn="ctr"/>
+          </a:p>
+        </p:txBody>
+      </p:sp>
+      <p:sp>
+        <p:nvSpPr>
+          <p:cNvPr id="34" name="TextBox 33"/>
+          <p:cNvSpPr txBox="1"/>
+          <p:nvPr/>
+        </p:nvSpPr>
+        <p:spPr>
+          <a:xfrm>
+            <a:off x="9239250" y="3714750"/>
+            <a:ext cx="2667000" cy="285750"/>
+          </a:xfrm>
+          <a:prstGeom prst="rect">
+            <a:avLst/>
+          </a:prstGeom>
+          <a:noFill/>
+        </p:spPr>
+        <p:txBody>
+          <a:bodyPr wrap="square" anchor="ctr">
+            <a:spAutoFit/>
+          </a:bodyPr>
+          <a:lstStyle/>
+          <a:p>
+            <a:pPr algn="ctr">
+              <a:lnSpc>
+                <a:spcPct val="100000"/>
+              </a:lnSpc>
+            </a:pPr>
+            <a:r>
+              <a:rPr sz="1400" b="1">
+                <a:solidFill>
+                  <a:srgbClr val="F87171"/>
+                </a:solidFill>
+                <a:latin typeface="PingFang SC"/>
+              </a:rPr>
+              <a:t>回归</a:t>
+            </a:r>
+          </a:p>
+        </p:txBody>
+      </p:sp>
+      <p:sp>
+        <p:nvSpPr>
+          <p:cNvPr id="35" name="TextBox 34"/>
+          <p:cNvSpPr txBox="1"/>
+          <p:nvPr/>
+        </p:nvSpPr>
+        <p:spPr>
+          <a:xfrm>
+            <a:off x="9239250" y="4019550"/>
+            <a:ext cx="2667000" cy="666750"/>
+          </a:xfrm>
+          <a:prstGeom prst="rect">
+            <a:avLst/>
+          </a:prstGeom>
+          <a:noFill/>
+        </p:spPr>
+        <p:txBody>
+          <a:bodyPr wrap="square" anchor="ctr">
+            <a:spAutoFit/>
+          </a:bodyPr>
+          <a:lstStyle/>
+          <a:p>
+            <a:pPr algn="l">
+              <a:lnSpc>
+                <a:spcPct val="105000"/>
+              </a:lnSpc>
+            </a:pPr>
+            <a:r>
+              <a:rPr sz="1050" b="0">
+                <a:solidFill>
+                  <a:srgbClr val="475569"/>
+                </a:solidFill>
+                <a:latin typeface="PingFang SC"/>
+              </a:rPr>
+              <a:t>加隔离用例</a:t>
+            </a:r>
+          </a:p>
+        </p:txBody>
+      </p:sp>
+      <p:sp>
+        <p:nvSpPr>
+          <p:cNvPr id="36" name="TextBox 35"/>
+          <p:cNvSpPr txBox="1"/>
+          <p:nvPr/>
+        </p:nvSpPr>
+        <p:spPr>
+          <a:xfrm>
+            <a:off x="10287000" y="6534150"/>
+            <a:ext cx="1619250" cy="266700"/>
           </a:xfrm>
           <a:prstGeom prst="rect">
             <a:avLst/>
@@ -16253,1373 +17716,6 @@
               </a:lnSpc>
             </a:pPr>
             <a:r>
-              <a:rPr sz="1100" b="0">
-                <a:solidFill>
-                  <a:srgbClr val="94A3B8"/>
-                </a:solidFill>
-                <a:latin typeface="PingFang SC"/>
-              </a:rPr>
-              <a:t>disable 改共享 spec;后续 3 个权限测试连环假失败;单跑全绿/全量必红;根因:可变共享状态;修复:启停收归 Registry;回归:加隔离用例|教学级真实案例</a:t>
-            </a:r>
-          </a:p>
-        </p:txBody>
-      </p:sp>
-      <p:sp>
-        <p:nvSpPr>
-          <p:cNvPr id="6" name="Rectangle 5"/>
-          <p:cNvSpPr/>
-          <p:nvPr/>
-        </p:nvSpPr>
-        <p:spPr>
-          <a:xfrm>
-            <a:off x="1619250" y="3314700"/>
-            <a:ext cx="8953500" cy="38100"/>
-          </a:xfrm>
-          <a:prstGeom prst="rect">
-            <a:avLst/>
-          </a:prstGeom>
-          <a:solidFill>
-            <a:srgbClr val="DDE5EE"/>
-          </a:solidFill>
-          <a:ln>
-            <a:noFill/>
-          </a:ln>
-          <a:effectLst/>
-        </p:spPr>
-        <p:style>
-          <a:lnRef idx="1">
-            <a:schemeClr val="accent1"/>
-          </a:lnRef>
-          <a:fillRef idx="3">
-            <a:schemeClr val="accent1"/>
-          </a:fillRef>
-          <a:effectRef idx="2">
-            <a:schemeClr val="accent1"/>
-          </a:effectRef>
-          <a:fontRef idx="minor">
-            <a:schemeClr val="lt1"/>
-          </a:fontRef>
-        </p:style>
-        <p:txBody>
-          <a:bodyPr rtlCol="0" anchor="ctr"/>
-          <a:lstStyle/>
-          <a:p>
-            <a:pPr algn="ctr"/>
-          </a:p>
-        </p:txBody>
-      </p:sp>
-      <p:sp>
-        <p:nvSpPr>
-          <p:cNvPr id="7" name="Rounded Rectangle 6"/>
-          <p:cNvSpPr/>
-          <p:nvPr/>
-        </p:nvSpPr>
-        <p:spPr>
-          <a:xfrm>
-            <a:off x="1514475" y="3228975"/>
-            <a:ext cx="209550" cy="209550"/>
-          </a:xfrm>
-          <a:prstGeom prst="roundRect">
-            <a:avLst>
-              <a:gd name="adj" fmla="val 8000"/>
-            </a:avLst>
-          </a:prstGeom>
-          <a:solidFill>
-            <a:srgbClr val="2563EB"/>
-          </a:solidFill>
-          <a:ln>
-            <a:noFill/>
-          </a:ln>
-          <a:effectLst/>
-        </p:spPr>
-        <p:style>
-          <a:lnRef idx="1">
-            <a:schemeClr val="accent1"/>
-          </a:lnRef>
-          <a:fillRef idx="3">
-            <a:schemeClr val="accent1"/>
-          </a:fillRef>
-          <a:effectRef idx="2">
-            <a:schemeClr val="accent1"/>
-          </a:effectRef>
-          <a:fontRef idx="minor">
-            <a:schemeClr val="lt1"/>
-          </a:fontRef>
-        </p:style>
-        <p:txBody>
-          <a:bodyPr rtlCol="0" anchor="ctr"/>
-          <a:lstStyle/>
-          <a:p>
-            <a:pPr algn="ctr"/>
-          </a:p>
-        </p:txBody>
-      </p:sp>
-      <p:sp>
-        <p:nvSpPr>
-          <p:cNvPr id="8" name="Rounded Rectangle 7"/>
-          <p:cNvSpPr/>
-          <p:nvPr/>
-        </p:nvSpPr>
-        <p:spPr>
-          <a:xfrm>
-            <a:off x="190500" y="1905000"/>
-            <a:ext cx="2857500" cy="1123950"/>
-          </a:xfrm>
-          <a:prstGeom prst="roundRect">
-            <a:avLst>
-              <a:gd name="adj" fmla="val 8000"/>
-            </a:avLst>
-          </a:prstGeom>
-          <a:solidFill>
-            <a:srgbClr val="F1F5F9"/>
-          </a:solidFill>
-          <a:ln>
-            <a:noFill/>
-          </a:ln>
-          <a:effectLst/>
-        </p:spPr>
-        <p:style>
-          <a:lnRef idx="1">
-            <a:schemeClr val="accent1"/>
-          </a:lnRef>
-          <a:fillRef idx="3">
-            <a:schemeClr val="accent1"/>
-          </a:fillRef>
-          <a:effectRef idx="2">
-            <a:schemeClr val="accent1"/>
-          </a:effectRef>
-          <a:fontRef idx="minor">
-            <a:schemeClr val="lt1"/>
-          </a:fontRef>
-        </p:style>
-        <p:txBody>
-          <a:bodyPr rtlCol="0" anchor="ctr"/>
-          <a:lstStyle/>
-          <a:p>
-            <a:pPr algn="ctr"/>
-          </a:p>
-        </p:txBody>
-      </p:sp>
-      <p:sp>
-        <p:nvSpPr>
-          <p:cNvPr id="9" name="Rectangle 8"/>
-          <p:cNvSpPr/>
-          <p:nvPr/>
-        </p:nvSpPr>
-        <p:spPr>
-          <a:xfrm>
-            <a:off x="190500" y="1905000"/>
-            <a:ext cx="2857500" cy="38100"/>
-          </a:xfrm>
-          <a:prstGeom prst="rect">
-            <a:avLst/>
-          </a:prstGeom>
-          <a:solidFill>
-            <a:srgbClr val="2563EB"/>
-          </a:solidFill>
-          <a:ln>
-            <a:noFill/>
-          </a:ln>
-          <a:effectLst/>
-        </p:spPr>
-        <p:style>
-          <a:lnRef idx="1">
-            <a:schemeClr val="accent1"/>
-          </a:lnRef>
-          <a:fillRef idx="3">
-            <a:schemeClr val="accent1"/>
-          </a:fillRef>
-          <a:effectRef idx="2">
-            <a:schemeClr val="accent1"/>
-          </a:effectRef>
-          <a:fontRef idx="minor">
-            <a:schemeClr val="lt1"/>
-          </a:fontRef>
-        </p:style>
-        <p:txBody>
-          <a:bodyPr rtlCol="0" anchor="ctr"/>
-          <a:lstStyle/>
-          <a:p>
-            <a:pPr algn="ctr"/>
-          </a:p>
-        </p:txBody>
-      </p:sp>
-      <p:sp>
-        <p:nvSpPr>
-          <p:cNvPr id="10" name="TextBox 9"/>
-          <p:cNvSpPr txBox="1"/>
-          <p:nvPr/>
-        </p:nvSpPr>
-        <p:spPr>
-          <a:xfrm>
-            <a:off x="285750" y="2000250"/>
-            <a:ext cx="2667000" cy="285750"/>
-          </a:xfrm>
-          <a:prstGeom prst="rect">
-            <a:avLst/>
-          </a:prstGeom>
-          <a:noFill/>
-        </p:spPr>
-        <p:txBody>
-          <a:bodyPr wrap="square" anchor="ctr">
-            <a:spAutoFit/>
-          </a:bodyPr>
-          <a:lstStyle/>
-          <a:p>
-            <a:pPr algn="ctr">
-              <a:lnSpc>
-                <a:spcPct val="100000"/>
-              </a:lnSpc>
-            </a:pPr>
-            <a:r>
-              <a:rPr sz="1400" b="1">
-                <a:solidFill>
-                  <a:srgbClr val="2563EB"/>
-                </a:solidFill>
-                <a:latin typeface="PingFang SC"/>
-              </a:rPr>
-              <a:t>disable 改共享 spec</a:t>
-            </a:r>
-          </a:p>
-        </p:txBody>
-      </p:sp>
-      <p:sp>
-        <p:nvSpPr>
-          <p:cNvPr id="11" name="TextBox 10"/>
-          <p:cNvSpPr txBox="1"/>
-          <p:nvPr/>
-        </p:nvSpPr>
-        <p:spPr>
-          <a:xfrm>
-            <a:off x="285750" y="2305050"/>
-            <a:ext cx="2667000" cy="666750"/>
-          </a:xfrm>
-          <a:prstGeom prst="rect">
-            <a:avLst/>
-          </a:prstGeom>
-          <a:noFill/>
-        </p:spPr>
-        <p:txBody>
-          <a:bodyPr wrap="square" anchor="ctr">
-            <a:spAutoFit/>
-          </a:bodyPr>
-          <a:lstStyle/>
-          <a:p>
-            <a:pPr algn="l">
-              <a:lnSpc>
-                <a:spcPct val="105000"/>
-              </a:lnSpc>
-            </a:pPr>
-            <a:r>
-              <a:rPr sz="1050" b="0">
-                <a:solidFill>
-                  <a:srgbClr val="475569"/>
-                </a:solidFill>
-                <a:latin typeface="PingFang SC"/>
-              </a:rPr>
-              <a:t/>
-            </a:r>
-          </a:p>
-        </p:txBody>
-      </p:sp>
-      <p:sp>
-        <p:nvSpPr>
-          <p:cNvPr id="12" name="Rounded Rectangle 11"/>
-          <p:cNvSpPr/>
-          <p:nvPr/>
-        </p:nvSpPr>
-        <p:spPr>
-          <a:xfrm>
-            <a:off x="3305175" y="3228975"/>
-            <a:ext cx="209550" cy="209550"/>
-          </a:xfrm>
-          <a:prstGeom prst="roundRect">
-            <a:avLst>
-              <a:gd name="adj" fmla="val 8000"/>
-            </a:avLst>
-          </a:prstGeom>
-          <a:solidFill>
-            <a:srgbClr val="14B8A6"/>
-          </a:solidFill>
-          <a:ln>
-            <a:noFill/>
-          </a:ln>
-          <a:effectLst/>
-        </p:spPr>
-        <p:style>
-          <a:lnRef idx="1">
-            <a:schemeClr val="accent1"/>
-          </a:lnRef>
-          <a:fillRef idx="3">
-            <a:schemeClr val="accent1"/>
-          </a:fillRef>
-          <a:effectRef idx="2">
-            <a:schemeClr val="accent1"/>
-          </a:effectRef>
-          <a:fontRef idx="minor">
-            <a:schemeClr val="lt1"/>
-          </a:fontRef>
-        </p:style>
-        <p:txBody>
-          <a:bodyPr rtlCol="0" anchor="ctr"/>
-          <a:lstStyle/>
-          <a:p>
-            <a:pPr algn="ctr"/>
-          </a:p>
-        </p:txBody>
-      </p:sp>
-      <p:sp>
-        <p:nvSpPr>
-          <p:cNvPr id="13" name="Rounded Rectangle 12"/>
-          <p:cNvSpPr/>
-          <p:nvPr/>
-        </p:nvSpPr>
-        <p:spPr>
-          <a:xfrm>
-            <a:off x="1981200" y="3619500"/>
-            <a:ext cx="2857500" cy="1123950"/>
-          </a:xfrm>
-          <a:prstGeom prst="roundRect">
-            <a:avLst>
-              <a:gd name="adj" fmla="val 8000"/>
-            </a:avLst>
-          </a:prstGeom>
-          <a:solidFill>
-            <a:srgbClr val="F1F5F9"/>
-          </a:solidFill>
-          <a:ln>
-            <a:noFill/>
-          </a:ln>
-          <a:effectLst/>
-        </p:spPr>
-        <p:style>
-          <a:lnRef idx="1">
-            <a:schemeClr val="accent1"/>
-          </a:lnRef>
-          <a:fillRef idx="3">
-            <a:schemeClr val="accent1"/>
-          </a:fillRef>
-          <a:effectRef idx="2">
-            <a:schemeClr val="accent1"/>
-          </a:effectRef>
-          <a:fontRef idx="minor">
-            <a:schemeClr val="lt1"/>
-          </a:fontRef>
-        </p:style>
-        <p:txBody>
-          <a:bodyPr rtlCol="0" anchor="ctr"/>
-          <a:lstStyle/>
-          <a:p>
-            <a:pPr algn="ctr"/>
-          </a:p>
-        </p:txBody>
-      </p:sp>
-      <p:sp>
-        <p:nvSpPr>
-          <p:cNvPr id="14" name="Rectangle 13"/>
-          <p:cNvSpPr/>
-          <p:nvPr/>
-        </p:nvSpPr>
-        <p:spPr>
-          <a:xfrm>
-            <a:off x="1981200" y="3619500"/>
-            <a:ext cx="2857500" cy="38100"/>
-          </a:xfrm>
-          <a:prstGeom prst="rect">
-            <a:avLst/>
-          </a:prstGeom>
-          <a:solidFill>
-            <a:srgbClr val="14B8A6"/>
-          </a:solidFill>
-          <a:ln>
-            <a:noFill/>
-          </a:ln>
-          <a:effectLst/>
-        </p:spPr>
-        <p:style>
-          <a:lnRef idx="1">
-            <a:schemeClr val="accent1"/>
-          </a:lnRef>
-          <a:fillRef idx="3">
-            <a:schemeClr val="accent1"/>
-          </a:fillRef>
-          <a:effectRef idx="2">
-            <a:schemeClr val="accent1"/>
-          </a:effectRef>
-          <a:fontRef idx="minor">
-            <a:schemeClr val="lt1"/>
-          </a:fontRef>
-        </p:style>
-        <p:txBody>
-          <a:bodyPr rtlCol="0" anchor="ctr"/>
-          <a:lstStyle/>
-          <a:p>
-            <a:pPr algn="ctr"/>
-          </a:p>
-        </p:txBody>
-      </p:sp>
-      <p:sp>
-        <p:nvSpPr>
-          <p:cNvPr id="15" name="TextBox 14"/>
-          <p:cNvSpPr txBox="1"/>
-          <p:nvPr/>
-        </p:nvSpPr>
-        <p:spPr>
-          <a:xfrm>
-            <a:off x="2076450" y="3714750"/>
-            <a:ext cx="2667000" cy="285750"/>
-          </a:xfrm>
-          <a:prstGeom prst="rect">
-            <a:avLst/>
-          </a:prstGeom>
-          <a:noFill/>
-        </p:spPr>
-        <p:txBody>
-          <a:bodyPr wrap="square" anchor="ctr">
-            <a:spAutoFit/>
-          </a:bodyPr>
-          <a:lstStyle/>
-          <a:p>
-            <a:pPr algn="ctr">
-              <a:lnSpc>
-                <a:spcPct val="100000"/>
-              </a:lnSpc>
-            </a:pPr>
-            <a:r>
-              <a:rPr sz="1400" b="1">
-                <a:solidFill>
-                  <a:srgbClr val="14B8A6"/>
-                </a:solidFill>
-                <a:latin typeface="PingFang SC"/>
-              </a:rPr>
-              <a:t>后续 3 个权限测试连环假失败</a:t>
-            </a:r>
-          </a:p>
-        </p:txBody>
-      </p:sp>
-      <p:sp>
-        <p:nvSpPr>
-          <p:cNvPr id="16" name="TextBox 15"/>
-          <p:cNvSpPr txBox="1"/>
-          <p:nvPr/>
-        </p:nvSpPr>
-        <p:spPr>
-          <a:xfrm>
-            <a:off x="2076450" y="4019550"/>
-            <a:ext cx="2667000" cy="666750"/>
-          </a:xfrm>
-          <a:prstGeom prst="rect">
-            <a:avLst/>
-          </a:prstGeom>
-          <a:noFill/>
-        </p:spPr>
-        <p:txBody>
-          <a:bodyPr wrap="square" anchor="ctr">
-            <a:spAutoFit/>
-          </a:bodyPr>
-          <a:lstStyle/>
-          <a:p>
-            <a:pPr algn="l">
-              <a:lnSpc>
-                <a:spcPct val="105000"/>
-              </a:lnSpc>
-            </a:pPr>
-            <a:r>
-              <a:rPr sz="1050" b="0">
-                <a:solidFill>
-                  <a:srgbClr val="475569"/>
-                </a:solidFill>
-                <a:latin typeface="PingFang SC"/>
-              </a:rPr>
-              <a:t/>
-            </a:r>
-          </a:p>
-        </p:txBody>
-      </p:sp>
-      <p:sp>
-        <p:nvSpPr>
-          <p:cNvPr id="17" name="Rounded Rectangle 16"/>
-          <p:cNvSpPr/>
-          <p:nvPr/>
-        </p:nvSpPr>
-        <p:spPr>
-          <a:xfrm>
-            <a:off x="5095875" y="3228975"/>
-            <a:ext cx="209550" cy="209550"/>
-          </a:xfrm>
-          <a:prstGeom prst="roundRect">
-            <a:avLst>
-              <a:gd name="adj" fmla="val 8000"/>
-            </a:avLst>
-          </a:prstGeom>
-          <a:solidFill>
-            <a:srgbClr val="8B5CF6"/>
-          </a:solidFill>
-          <a:ln>
-            <a:noFill/>
-          </a:ln>
-          <a:effectLst/>
-        </p:spPr>
-        <p:style>
-          <a:lnRef idx="1">
-            <a:schemeClr val="accent1"/>
-          </a:lnRef>
-          <a:fillRef idx="3">
-            <a:schemeClr val="accent1"/>
-          </a:fillRef>
-          <a:effectRef idx="2">
-            <a:schemeClr val="accent1"/>
-          </a:effectRef>
-          <a:fontRef idx="minor">
-            <a:schemeClr val="lt1"/>
-          </a:fontRef>
-        </p:style>
-        <p:txBody>
-          <a:bodyPr rtlCol="0" anchor="ctr"/>
-          <a:lstStyle/>
-          <a:p>
-            <a:pPr algn="ctr"/>
-          </a:p>
-        </p:txBody>
-      </p:sp>
-      <p:sp>
-        <p:nvSpPr>
-          <p:cNvPr id="18" name="Rounded Rectangle 17"/>
-          <p:cNvSpPr/>
-          <p:nvPr/>
-        </p:nvSpPr>
-        <p:spPr>
-          <a:xfrm>
-            <a:off x="3771900" y="1905000"/>
-            <a:ext cx="2857500" cy="1123950"/>
-          </a:xfrm>
-          <a:prstGeom prst="roundRect">
-            <a:avLst>
-              <a:gd name="adj" fmla="val 8000"/>
-            </a:avLst>
-          </a:prstGeom>
-          <a:solidFill>
-            <a:srgbClr val="F1F5F9"/>
-          </a:solidFill>
-          <a:ln>
-            <a:noFill/>
-          </a:ln>
-          <a:effectLst/>
-        </p:spPr>
-        <p:style>
-          <a:lnRef idx="1">
-            <a:schemeClr val="accent1"/>
-          </a:lnRef>
-          <a:fillRef idx="3">
-            <a:schemeClr val="accent1"/>
-          </a:fillRef>
-          <a:effectRef idx="2">
-            <a:schemeClr val="accent1"/>
-          </a:effectRef>
-          <a:fontRef idx="minor">
-            <a:schemeClr val="lt1"/>
-          </a:fontRef>
-        </p:style>
-        <p:txBody>
-          <a:bodyPr rtlCol="0" anchor="ctr"/>
-          <a:lstStyle/>
-          <a:p>
-            <a:pPr algn="ctr"/>
-          </a:p>
-        </p:txBody>
-      </p:sp>
-      <p:sp>
-        <p:nvSpPr>
-          <p:cNvPr id="19" name="Rectangle 18"/>
-          <p:cNvSpPr/>
-          <p:nvPr/>
-        </p:nvSpPr>
-        <p:spPr>
-          <a:xfrm>
-            <a:off x="3771900" y="1905000"/>
-            <a:ext cx="2857500" cy="38100"/>
-          </a:xfrm>
-          <a:prstGeom prst="rect">
-            <a:avLst/>
-          </a:prstGeom>
-          <a:solidFill>
-            <a:srgbClr val="8B5CF6"/>
-          </a:solidFill>
-          <a:ln>
-            <a:noFill/>
-          </a:ln>
-          <a:effectLst/>
-        </p:spPr>
-        <p:style>
-          <a:lnRef idx="1">
-            <a:schemeClr val="accent1"/>
-          </a:lnRef>
-          <a:fillRef idx="3">
-            <a:schemeClr val="accent1"/>
-          </a:fillRef>
-          <a:effectRef idx="2">
-            <a:schemeClr val="accent1"/>
-          </a:effectRef>
-          <a:fontRef idx="minor">
-            <a:schemeClr val="lt1"/>
-          </a:fontRef>
-        </p:style>
-        <p:txBody>
-          <a:bodyPr rtlCol="0" anchor="ctr"/>
-          <a:lstStyle/>
-          <a:p>
-            <a:pPr algn="ctr"/>
-          </a:p>
-        </p:txBody>
-      </p:sp>
-      <p:sp>
-        <p:nvSpPr>
-          <p:cNvPr id="20" name="TextBox 19"/>
-          <p:cNvSpPr txBox="1"/>
-          <p:nvPr/>
-        </p:nvSpPr>
-        <p:spPr>
-          <a:xfrm>
-            <a:off x="3867150" y="2000250"/>
-            <a:ext cx="2667000" cy="285750"/>
-          </a:xfrm>
-          <a:prstGeom prst="rect">
-            <a:avLst/>
-          </a:prstGeom>
-          <a:noFill/>
-        </p:spPr>
-        <p:txBody>
-          <a:bodyPr wrap="square" anchor="ctr">
-            <a:spAutoFit/>
-          </a:bodyPr>
-          <a:lstStyle/>
-          <a:p>
-            <a:pPr algn="ctr">
-              <a:lnSpc>
-                <a:spcPct val="100000"/>
-              </a:lnSpc>
-            </a:pPr>
-            <a:r>
-              <a:rPr sz="1400" b="1">
-                <a:solidFill>
-                  <a:srgbClr val="8B5CF6"/>
-                </a:solidFill>
-                <a:latin typeface="PingFang SC"/>
-              </a:rPr>
-              <a:t>单跑全绿/全量必红</a:t>
-            </a:r>
-          </a:p>
-        </p:txBody>
-      </p:sp>
-      <p:sp>
-        <p:nvSpPr>
-          <p:cNvPr id="21" name="TextBox 20"/>
-          <p:cNvSpPr txBox="1"/>
-          <p:nvPr/>
-        </p:nvSpPr>
-        <p:spPr>
-          <a:xfrm>
-            <a:off x="3867150" y="2305050"/>
-            <a:ext cx="2667000" cy="666750"/>
-          </a:xfrm>
-          <a:prstGeom prst="rect">
-            <a:avLst/>
-          </a:prstGeom>
-          <a:noFill/>
-        </p:spPr>
-        <p:txBody>
-          <a:bodyPr wrap="square" anchor="ctr">
-            <a:spAutoFit/>
-          </a:bodyPr>
-          <a:lstStyle/>
-          <a:p>
-            <a:pPr algn="l">
-              <a:lnSpc>
-                <a:spcPct val="105000"/>
-              </a:lnSpc>
-            </a:pPr>
-            <a:r>
-              <a:rPr sz="1050" b="0">
-                <a:solidFill>
-                  <a:srgbClr val="475569"/>
-                </a:solidFill>
-                <a:latin typeface="PingFang SC"/>
-              </a:rPr>
-              <a:t/>
-            </a:r>
-          </a:p>
-        </p:txBody>
-      </p:sp>
-      <p:sp>
-        <p:nvSpPr>
-          <p:cNvPr id="22" name="Rounded Rectangle 21"/>
-          <p:cNvSpPr/>
-          <p:nvPr/>
-        </p:nvSpPr>
-        <p:spPr>
-          <a:xfrm>
-            <a:off x="6886575" y="3228975"/>
-            <a:ext cx="209550" cy="209550"/>
-          </a:xfrm>
-          <a:prstGeom prst="roundRect">
-            <a:avLst>
-              <a:gd name="adj" fmla="val 8000"/>
-            </a:avLst>
-          </a:prstGeom>
-          <a:solidFill>
-            <a:srgbClr val="F59E0B"/>
-          </a:solidFill>
-          <a:ln>
-            <a:noFill/>
-          </a:ln>
-          <a:effectLst/>
-        </p:spPr>
-        <p:style>
-          <a:lnRef idx="1">
-            <a:schemeClr val="accent1"/>
-          </a:lnRef>
-          <a:fillRef idx="3">
-            <a:schemeClr val="accent1"/>
-          </a:fillRef>
-          <a:effectRef idx="2">
-            <a:schemeClr val="accent1"/>
-          </a:effectRef>
-          <a:fontRef idx="minor">
-            <a:schemeClr val="lt1"/>
-          </a:fontRef>
-        </p:style>
-        <p:txBody>
-          <a:bodyPr rtlCol="0" anchor="ctr"/>
-          <a:lstStyle/>
-          <a:p>
-            <a:pPr algn="ctr"/>
-          </a:p>
-        </p:txBody>
-      </p:sp>
-      <p:sp>
-        <p:nvSpPr>
-          <p:cNvPr id="23" name="Rounded Rectangle 22"/>
-          <p:cNvSpPr/>
-          <p:nvPr/>
-        </p:nvSpPr>
-        <p:spPr>
-          <a:xfrm>
-            <a:off x="5562600" y="3619500"/>
-            <a:ext cx="2857500" cy="1123950"/>
-          </a:xfrm>
-          <a:prstGeom prst="roundRect">
-            <a:avLst>
-              <a:gd name="adj" fmla="val 8000"/>
-            </a:avLst>
-          </a:prstGeom>
-          <a:solidFill>
-            <a:srgbClr val="F1F5F9"/>
-          </a:solidFill>
-          <a:ln>
-            <a:noFill/>
-          </a:ln>
-          <a:effectLst/>
-        </p:spPr>
-        <p:style>
-          <a:lnRef idx="1">
-            <a:schemeClr val="accent1"/>
-          </a:lnRef>
-          <a:fillRef idx="3">
-            <a:schemeClr val="accent1"/>
-          </a:fillRef>
-          <a:effectRef idx="2">
-            <a:schemeClr val="accent1"/>
-          </a:effectRef>
-          <a:fontRef idx="minor">
-            <a:schemeClr val="lt1"/>
-          </a:fontRef>
-        </p:style>
-        <p:txBody>
-          <a:bodyPr rtlCol="0" anchor="ctr"/>
-          <a:lstStyle/>
-          <a:p>
-            <a:pPr algn="ctr"/>
-          </a:p>
-        </p:txBody>
-      </p:sp>
-      <p:sp>
-        <p:nvSpPr>
-          <p:cNvPr id="24" name="Rectangle 23"/>
-          <p:cNvSpPr/>
-          <p:nvPr/>
-        </p:nvSpPr>
-        <p:spPr>
-          <a:xfrm>
-            <a:off x="5562600" y="3619500"/>
-            <a:ext cx="2857500" cy="38100"/>
-          </a:xfrm>
-          <a:prstGeom prst="rect">
-            <a:avLst/>
-          </a:prstGeom>
-          <a:solidFill>
-            <a:srgbClr val="F59E0B"/>
-          </a:solidFill>
-          <a:ln>
-            <a:noFill/>
-          </a:ln>
-          <a:effectLst/>
-        </p:spPr>
-        <p:style>
-          <a:lnRef idx="1">
-            <a:schemeClr val="accent1"/>
-          </a:lnRef>
-          <a:fillRef idx="3">
-            <a:schemeClr val="accent1"/>
-          </a:fillRef>
-          <a:effectRef idx="2">
-            <a:schemeClr val="accent1"/>
-          </a:effectRef>
-          <a:fontRef idx="minor">
-            <a:schemeClr val="lt1"/>
-          </a:fontRef>
-        </p:style>
-        <p:txBody>
-          <a:bodyPr rtlCol="0" anchor="ctr"/>
-          <a:lstStyle/>
-          <a:p>
-            <a:pPr algn="ctr"/>
-          </a:p>
-        </p:txBody>
-      </p:sp>
-      <p:sp>
-        <p:nvSpPr>
-          <p:cNvPr id="25" name="TextBox 24"/>
-          <p:cNvSpPr txBox="1"/>
-          <p:nvPr/>
-        </p:nvSpPr>
-        <p:spPr>
-          <a:xfrm>
-            <a:off x="5657850" y="3714750"/>
-            <a:ext cx="2667000" cy="285750"/>
-          </a:xfrm>
-          <a:prstGeom prst="rect">
-            <a:avLst/>
-          </a:prstGeom>
-          <a:noFill/>
-        </p:spPr>
-        <p:txBody>
-          <a:bodyPr wrap="square" anchor="ctr">
-            <a:spAutoFit/>
-          </a:bodyPr>
-          <a:lstStyle/>
-          <a:p>
-            <a:pPr algn="ctr">
-              <a:lnSpc>
-                <a:spcPct val="100000"/>
-              </a:lnSpc>
-            </a:pPr>
-            <a:r>
-              <a:rPr sz="1400" b="1">
-                <a:solidFill>
-                  <a:srgbClr val="F59E0B"/>
-                </a:solidFill>
-                <a:latin typeface="PingFang SC"/>
-              </a:rPr>
-              <a:t>根因</a:t>
-            </a:r>
-          </a:p>
-        </p:txBody>
-      </p:sp>
-      <p:sp>
-        <p:nvSpPr>
-          <p:cNvPr id="26" name="TextBox 25"/>
-          <p:cNvSpPr txBox="1"/>
-          <p:nvPr/>
-        </p:nvSpPr>
-        <p:spPr>
-          <a:xfrm>
-            <a:off x="5657850" y="4019550"/>
-            <a:ext cx="2667000" cy="666750"/>
-          </a:xfrm>
-          <a:prstGeom prst="rect">
-            <a:avLst/>
-          </a:prstGeom>
-          <a:noFill/>
-        </p:spPr>
-        <p:txBody>
-          <a:bodyPr wrap="square" anchor="ctr">
-            <a:spAutoFit/>
-          </a:bodyPr>
-          <a:lstStyle/>
-          <a:p>
-            <a:pPr algn="l">
-              <a:lnSpc>
-                <a:spcPct val="105000"/>
-              </a:lnSpc>
-            </a:pPr>
-            <a:r>
-              <a:rPr sz="1050" b="0">
-                <a:solidFill>
-                  <a:srgbClr val="475569"/>
-                </a:solidFill>
-                <a:latin typeface="PingFang SC"/>
-              </a:rPr>
-              <a:t>可变共享状态</a:t>
-            </a:r>
-          </a:p>
-        </p:txBody>
-      </p:sp>
-      <p:sp>
-        <p:nvSpPr>
-          <p:cNvPr id="27" name="Rounded Rectangle 26"/>
-          <p:cNvSpPr/>
-          <p:nvPr/>
-        </p:nvSpPr>
-        <p:spPr>
-          <a:xfrm>
-            <a:off x="8677275" y="3228975"/>
-            <a:ext cx="209550" cy="209550"/>
-          </a:xfrm>
-          <a:prstGeom prst="roundRect">
-            <a:avLst>
-              <a:gd name="adj" fmla="val 8000"/>
-            </a:avLst>
-          </a:prstGeom>
-          <a:solidFill>
-            <a:srgbClr val="34D399"/>
-          </a:solidFill>
-          <a:ln>
-            <a:noFill/>
-          </a:ln>
-          <a:effectLst/>
-        </p:spPr>
-        <p:style>
-          <a:lnRef idx="1">
-            <a:schemeClr val="accent1"/>
-          </a:lnRef>
-          <a:fillRef idx="3">
-            <a:schemeClr val="accent1"/>
-          </a:fillRef>
-          <a:effectRef idx="2">
-            <a:schemeClr val="accent1"/>
-          </a:effectRef>
-          <a:fontRef idx="minor">
-            <a:schemeClr val="lt1"/>
-          </a:fontRef>
-        </p:style>
-        <p:txBody>
-          <a:bodyPr rtlCol="0" anchor="ctr"/>
-          <a:lstStyle/>
-          <a:p>
-            <a:pPr algn="ctr"/>
-          </a:p>
-        </p:txBody>
-      </p:sp>
-      <p:sp>
-        <p:nvSpPr>
-          <p:cNvPr id="28" name="Rounded Rectangle 27"/>
-          <p:cNvSpPr/>
-          <p:nvPr/>
-        </p:nvSpPr>
-        <p:spPr>
-          <a:xfrm>
-            <a:off x="7353300" y="1905000"/>
-            <a:ext cx="2857500" cy="1123950"/>
-          </a:xfrm>
-          <a:prstGeom prst="roundRect">
-            <a:avLst>
-              <a:gd name="adj" fmla="val 8000"/>
-            </a:avLst>
-          </a:prstGeom>
-          <a:solidFill>
-            <a:srgbClr val="F1F5F9"/>
-          </a:solidFill>
-          <a:ln>
-            <a:noFill/>
-          </a:ln>
-          <a:effectLst/>
-        </p:spPr>
-        <p:style>
-          <a:lnRef idx="1">
-            <a:schemeClr val="accent1"/>
-          </a:lnRef>
-          <a:fillRef idx="3">
-            <a:schemeClr val="accent1"/>
-          </a:fillRef>
-          <a:effectRef idx="2">
-            <a:schemeClr val="accent1"/>
-          </a:effectRef>
-          <a:fontRef idx="minor">
-            <a:schemeClr val="lt1"/>
-          </a:fontRef>
-        </p:style>
-        <p:txBody>
-          <a:bodyPr rtlCol="0" anchor="ctr"/>
-          <a:lstStyle/>
-          <a:p>
-            <a:pPr algn="ctr"/>
-          </a:p>
-        </p:txBody>
-      </p:sp>
-      <p:sp>
-        <p:nvSpPr>
-          <p:cNvPr id="29" name="Rectangle 28"/>
-          <p:cNvSpPr/>
-          <p:nvPr/>
-        </p:nvSpPr>
-        <p:spPr>
-          <a:xfrm>
-            <a:off x="7353300" y="1905000"/>
-            <a:ext cx="2857500" cy="38100"/>
-          </a:xfrm>
-          <a:prstGeom prst="rect">
-            <a:avLst/>
-          </a:prstGeom>
-          <a:solidFill>
-            <a:srgbClr val="34D399"/>
-          </a:solidFill>
-          <a:ln>
-            <a:noFill/>
-          </a:ln>
-          <a:effectLst/>
-        </p:spPr>
-        <p:style>
-          <a:lnRef idx="1">
-            <a:schemeClr val="accent1"/>
-          </a:lnRef>
-          <a:fillRef idx="3">
-            <a:schemeClr val="accent1"/>
-          </a:fillRef>
-          <a:effectRef idx="2">
-            <a:schemeClr val="accent1"/>
-          </a:effectRef>
-          <a:fontRef idx="minor">
-            <a:schemeClr val="lt1"/>
-          </a:fontRef>
-        </p:style>
-        <p:txBody>
-          <a:bodyPr rtlCol="0" anchor="ctr"/>
-          <a:lstStyle/>
-          <a:p>
-            <a:pPr algn="ctr"/>
-          </a:p>
-        </p:txBody>
-      </p:sp>
-      <p:sp>
-        <p:nvSpPr>
-          <p:cNvPr id="30" name="TextBox 29"/>
-          <p:cNvSpPr txBox="1"/>
-          <p:nvPr/>
-        </p:nvSpPr>
-        <p:spPr>
-          <a:xfrm>
-            <a:off x="7448550" y="2000250"/>
-            <a:ext cx="2667000" cy="285750"/>
-          </a:xfrm>
-          <a:prstGeom prst="rect">
-            <a:avLst/>
-          </a:prstGeom>
-          <a:noFill/>
-        </p:spPr>
-        <p:txBody>
-          <a:bodyPr wrap="square" anchor="ctr">
-            <a:spAutoFit/>
-          </a:bodyPr>
-          <a:lstStyle/>
-          <a:p>
-            <a:pPr algn="ctr">
-              <a:lnSpc>
-                <a:spcPct val="100000"/>
-              </a:lnSpc>
-            </a:pPr>
-            <a:r>
-              <a:rPr sz="1400" b="1">
-                <a:solidFill>
-                  <a:srgbClr val="34D399"/>
-                </a:solidFill>
-                <a:latin typeface="PingFang SC"/>
-              </a:rPr>
-              <a:t>修复</a:t>
-            </a:r>
-          </a:p>
-        </p:txBody>
-      </p:sp>
-      <p:sp>
-        <p:nvSpPr>
-          <p:cNvPr id="31" name="TextBox 30"/>
-          <p:cNvSpPr txBox="1"/>
-          <p:nvPr/>
-        </p:nvSpPr>
-        <p:spPr>
-          <a:xfrm>
-            <a:off x="7448550" y="2305050"/>
-            <a:ext cx="2667000" cy="666750"/>
-          </a:xfrm>
-          <a:prstGeom prst="rect">
-            <a:avLst/>
-          </a:prstGeom>
-          <a:noFill/>
-        </p:spPr>
-        <p:txBody>
-          <a:bodyPr wrap="square" anchor="ctr">
-            <a:spAutoFit/>
-          </a:bodyPr>
-          <a:lstStyle/>
-          <a:p>
-            <a:pPr algn="l">
-              <a:lnSpc>
-                <a:spcPct val="105000"/>
-              </a:lnSpc>
-            </a:pPr>
-            <a:r>
-              <a:rPr sz="1050" b="0">
-                <a:solidFill>
-                  <a:srgbClr val="475569"/>
-                </a:solidFill>
-                <a:latin typeface="PingFang SC"/>
-              </a:rPr>
-              <a:t>启停收归 Registry</a:t>
-            </a:r>
-          </a:p>
-        </p:txBody>
-      </p:sp>
-      <p:sp>
-        <p:nvSpPr>
-          <p:cNvPr id="32" name="Rounded Rectangle 31"/>
-          <p:cNvSpPr/>
-          <p:nvPr/>
-        </p:nvSpPr>
-        <p:spPr>
-          <a:xfrm>
-            <a:off x="10467975" y="3228975"/>
-            <a:ext cx="209550" cy="209550"/>
-          </a:xfrm>
-          <a:prstGeom prst="roundRect">
-            <a:avLst>
-              <a:gd name="adj" fmla="val 8000"/>
-            </a:avLst>
-          </a:prstGeom>
-          <a:solidFill>
-            <a:srgbClr val="F87171"/>
-          </a:solidFill>
-          <a:ln>
-            <a:noFill/>
-          </a:ln>
-          <a:effectLst/>
-        </p:spPr>
-        <p:style>
-          <a:lnRef idx="1">
-            <a:schemeClr val="accent1"/>
-          </a:lnRef>
-          <a:fillRef idx="3">
-            <a:schemeClr val="accent1"/>
-          </a:fillRef>
-          <a:effectRef idx="2">
-            <a:schemeClr val="accent1"/>
-          </a:effectRef>
-          <a:fontRef idx="minor">
-            <a:schemeClr val="lt1"/>
-          </a:fontRef>
-        </p:style>
-        <p:txBody>
-          <a:bodyPr rtlCol="0" anchor="ctr"/>
-          <a:lstStyle/>
-          <a:p>
-            <a:pPr algn="ctr"/>
-          </a:p>
-        </p:txBody>
-      </p:sp>
-      <p:sp>
-        <p:nvSpPr>
-          <p:cNvPr id="33" name="Rounded Rectangle 32"/>
-          <p:cNvSpPr/>
-          <p:nvPr/>
-        </p:nvSpPr>
-        <p:spPr>
-          <a:xfrm>
-            <a:off x="9144000" y="3619500"/>
-            <a:ext cx="2857500" cy="1123950"/>
-          </a:xfrm>
-          <a:prstGeom prst="roundRect">
-            <a:avLst>
-              <a:gd name="adj" fmla="val 8000"/>
-            </a:avLst>
-          </a:prstGeom>
-          <a:solidFill>
-            <a:srgbClr val="F1F5F9"/>
-          </a:solidFill>
-          <a:ln>
-            <a:noFill/>
-          </a:ln>
-          <a:effectLst/>
-        </p:spPr>
-        <p:style>
-          <a:lnRef idx="1">
-            <a:schemeClr val="accent1"/>
-          </a:lnRef>
-          <a:fillRef idx="3">
-            <a:schemeClr val="accent1"/>
-          </a:fillRef>
-          <a:effectRef idx="2">
-            <a:schemeClr val="accent1"/>
-          </a:effectRef>
-          <a:fontRef idx="minor">
-            <a:schemeClr val="lt1"/>
-          </a:fontRef>
-        </p:style>
-        <p:txBody>
-          <a:bodyPr rtlCol="0" anchor="ctr"/>
-          <a:lstStyle/>
-          <a:p>
-            <a:pPr algn="ctr"/>
-          </a:p>
-        </p:txBody>
-      </p:sp>
-      <p:sp>
-        <p:nvSpPr>
-          <p:cNvPr id="34" name="Rectangle 33"/>
-          <p:cNvSpPr/>
-          <p:nvPr/>
-        </p:nvSpPr>
-        <p:spPr>
-          <a:xfrm>
-            <a:off x="9144000" y="3619500"/>
-            <a:ext cx="2857500" cy="38100"/>
-          </a:xfrm>
-          <a:prstGeom prst="rect">
-            <a:avLst/>
-          </a:prstGeom>
-          <a:solidFill>
-            <a:srgbClr val="F87171"/>
-          </a:solidFill>
-          <a:ln>
-            <a:noFill/>
-          </a:ln>
-          <a:effectLst/>
-        </p:spPr>
-        <p:style>
-          <a:lnRef idx="1">
-            <a:schemeClr val="accent1"/>
-          </a:lnRef>
-          <a:fillRef idx="3">
-            <a:schemeClr val="accent1"/>
-          </a:fillRef>
-          <a:effectRef idx="2">
-            <a:schemeClr val="accent1"/>
-          </a:effectRef>
-          <a:fontRef idx="minor">
-            <a:schemeClr val="lt1"/>
-          </a:fontRef>
-        </p:style>
-        <p:txBody>
-          <a:bodyPr rtlCol="0" anchor="ctr"/>
-          <a:lstStyle/>
-          <a:p>
-            <a:pPr algn="ctr"/>
-          </a:p>
-        </p:txBody>
-      </p:sp>
-      <p:sp>
-        <p:nvSpPr>
-          <p:cNvPr id="35" name="TextBox 34"/>
-          <p:cNvSpPr txBox="1"/>
-          <p:nvPr/>
-        </p:nvSpPr>
-        <p:spPr>
-          <a:xfrm>
-            <a:off x="9239250" y="3714750"/>
-            <a:ext cx="2667000" cy="285750"/>
-          </a:xfrm>
-          <a:prstGeom prst="rect">
-            <a:avLst/>
-          </a:prstGeom>
-          <a:noFill/>
-        </p:spPr>
-        <p:txBody>
-          <a:bodyPr wrap="square" anchor="ctr">
-            <a:spAutoFit/>
-          </a:bodyPr>
-          <a:lstStyle/>
-          <a:p>
-            <a:pPr algn="ctr">
-              <a:lnSpc>
-                <a:spcPct val="100000"/>
-              </a:lnSpc>
-            </a:pPr>
-            <a:r>
-              <a:rPr sz="1400" b="1">
-                <a:solidFill>
-                  <a:srgbClr val="F87171"/>
-                </a:solidFill>
-                <a:latin typeface="PingFang SC"/>
-              </a:rPr>
-              <a:t>回归</a:t>
-            </a:r>
-          </a:p>
-        </p:txBody>
-      </p:sp>
-      <p:sp>
-        <p:nvSpPr>
-          <p:cNvPr id="36" name="TextBox 35"/>
-          <p:cNvSpPr txBox="1"/>
-          <p:nvPr/>
-        </p:nvSpPr>
-        <p:spPr>
-          <a:xfrm>
-            <a:off x="9239250" y="4019550"/>
-            <a:ext cx="2667000" cy="666750"/>
-          </a:xfrm>
-          <a:prstGeom prst="rect">
-            <a:avLst/>
-          </a:prstGeom>
-          <a:noFill/>
-        </p:spPr>
-        <p:txBody>
-          <a:bodyPr wrap="square" anchor="ctr">
-            <a:spAutoFit/>
-          </a:bodyPr>
-          <a:lstStyle/>
-          <a:p>
-            <a:pPr algn="l">
-              <a:lnSpc>
-                <a:spcPct val="105000"/>
-              </a:lnSpc>
-            </a:pPr>
-            <a:r>
-              <a:rPr sz="1050" b="0">
-                <a:solidFill>
-                  <a:srgbClr val="475569"/>
-                </a:solidFill>
-                <a:latin typeface="PingFang SC"/>
-              </a:rPr>
-              <a:t>加隔离用例|教学级真实案例</a:t>
-            </a:r>
-          </a:p>
-        </p:txBody>
-      </p:sp>
-      <p:sp>
-        <p:nvSpPr>
-          <p:cNvPr id="37" name="TextBox 36"/>
-          <p:cNvSpPr txBox="1"/>
-          <p:nvPr/>
-        </p:nvSpPr>
-        <p:spPr>
-          <a:xfrm>
-            <a:off x="10287000" y="6534150"/>
-            <a:ext cx="1619250" cy="266700"/>
-          </a:xfrm>
-          <a:prstGeom prst="rect">
-            <a:avLst/>
-          </a:prstGeom>
-          <a:noFill/>
-        </p:spPr>
-        <p:txBody>
-          <a:bodyPr wrap="square" anchor="ctr">
-            <a:spAutoFit/>
-          </a:bodyPr>
-          <a:lstStyle/>
-          <a:p>
-            <a:pPr algn="r">
-              <a:lnSpc>
-                <a:spcPct val="100000"/>
-              </a:lnSpc>
-            </a:pPr>
-            <a:r>
               <a:rPr sz="900" b="0">
                 <a:solidFill>
                   <a:srgbClr val="94A3B8"/>
@@ -17633,7 +17729,7 @@
       </p:sp>
       <p:sp>
         <p:nvSpPr>
-          <p:cNvPr id="38" name="TextBox 37"/>
+          <p:cNvPr id="37" name="TextBox 36"/>
           <p:cNvSpPr txBox="1"/>
           <p:nvPr/>
         </p:nvSpPr>
@@ -34309,21 +34405,391 @@
                 </a:solidFill>
                 <a:latin typeface="PingFang SC"/>
               </a:rPr>
-              <a:t>discover 检索实测,$ reg.discover("天气");ToolSpec(name='get_weather', risk=READ);$ reg.discover("删除");(空)  # 已 disable 的不出现;# 只返回 enabled:下线即刻生效</a:t>
-            </a:r>
-          </a:p>
-        </p:txBody>
-      </p:sp>
-      <p:sp>
-        <p:nvSpPr>
-          <p:cNvPr id="5" name="TextBox 4"/>
+              <a:t>discover 检索实测</a:t>
+            </a:r>
+          </a:p>
+        </p:txBody>
+      </p:sp>
+      <p:sp>
+        <p:nvSpPr>
+          <p:cNvPr id="5" name="Rounded Rectangle 4"/>
+          <p:cNvSpPr/>
+          <p:nvPr/>
+        </p:nvSpPr>
+        <p:spPr>
+          <a:xfrm>
+            <a:off x="1333500" y="1047750"/>
+            <a:ext cx="9525000" cy="2667000"/>
+          </a:xfrm>
+          <a:prstGeom prst="roundRect">
+            <a:avLst>
+              <a:gd name="adj" fmla="val 8000"/>
+            </a:avLst>
+          </a:prstGeom>
+          <a:solidFill>
+            <a:srgbClr val="0D1117"/>
+          </a:solidFill>
+          <a:ln>
+            <a:noFill/>
+          </a:ln>
+          <a:effectLst/>
+        </p:spPr>
+        <p:style>
+          <a:lnRef idx="1">
+            <a:schemeClr val="accent1"/>
+          </a:lnRef>
+          <a:fillRef idx="3">
+            <a:schemeClr val="accent1"/>
+          </a:fillRef>
+          <a:effectRef idx="2">
+            <a:schemeClr val="accent1"/>
+          </a:effectRef>
+          <a:fontRef idx="minor">
+            <a:schemeClr val="lt1"/>
+          </a:fontRef>
+        </p:style>
+        <p:txBody>
+          <a:bodyPr rtlCol="0" anchor="ctr"/>
+          <a:lstStyle/>
+          <a:p>
+            <a:pPr algn="ctr"/>
+          </a:p>
+        </p:txBody>
+      </p:sp>
+      <p:sp>
+        <p:nvSpPr>
+          <p:cNvPr id="6" name="Rectangle 5"/>
+          <p:cNvSpPr/>
+          <p:nvPr/>
+        </p:nvSpPr>
+        <p:spPr>
+          <a:xfrm>
+            <a:off x="1333500" y="1047750"/>
+            <a:ext cx="9525000" cy="381000"/>
+          </a:xfrm>
+          <a:prstGeom prst="rect">
+            <a:avLst/>
+          </a:prstGeom>
+          <a:solidFill>
+            <a:srgbClr val="1F2937"/>
+          </a:solidFill>
+          <a:ln>
+            <a:noFill/>
+          </a:ln>
+          <a:effectLst/>
+        </p:spPr>
+        <p:style>
+          <a:lnRef idx="1">
+            <a:schemeClr val="accent1"/>
+          </a:lnRef>
+          <a:fillRef idx="3">
+            <a:schemeClr val="accent1"/>
+          </a:fillRef>
+          <a:effectRef idx="2">
+            <a:schemeClr val="accent1"/>
+          </a:effectRef>
+          <a:fontRef idx="minor">
+            <a:schemeClr val="lt1"/>
+          </a:fontRef>
+        </p:style>
+        <p:txBody>
+          <a:bodyPr rtlCol="0" anchor="ctr"/>
+          <a:lstStyle/>
+          <a:p>
+            <a:pPr algn="ctr"/>
+          </a:p>
+        </p:txBody>
+      </p:sp>
+      <p:sp>
+        <p:nvSpPr>
+          <p:cNvPr id="7" name="Rounded Rectangle 6"/>
+          <p:cNvSpPr/>
+          <p:nvPr/>
+        </p:nvSpPr>
+        <p:spPr>
+          <a:xfrm>
+            <a:off x="1504950" y="1181100"/>
+            <a:ext cx="123825" cy="123825"/>
+          </a:xfrm>
+          <a:prstGeom prst="roundRect">
+            <a:avLst>
+              <a:gd name="adj" fmla="val 8000"/>
+            </a:avLst>
+          </a:prstGeom>
+          <a:solidFill>
+            <a:srgbClr val="F87171"/>
+          </a:solidFill>
+          <a:ln>
+            <a:noFill/>
+          </a:ln>
+          <a:effectLst/>
+        </p:spPr>
+        <p:style>
+          <a:lnRef idx="1">
+            <a:schemeClr val="accent1"/>
+          </a:lnRef>
+          <a:fillRef idx="3">
+            <a:schemeClr val="accent1"/>
+          </a:fillRef>
+          <a:effectRef idx="2">
+            <a:schemeClr val="accent1"/>
+          </a:effectRef>
+          <a:fontRef idx="minor">
+            <a:schemeClr val="lt1"/>
+          </a:fontRef>
+        </p:style>
+        <p:txBody>
+          <a:bodyPr rtlCol="0" anchor="ctr"/>
+          <a:lstStyle/>
+          <a:p>
+            <a:pPr algn="ctr"/>
+          </a:p>
+        </p:txBody>
+      </p:sp>
+      <p:sp>
+        <p:nvSpPr>
+          <p:cNvPr id="8" name="Rounded Rectangle 7"/>
+          <p:cNvSpPr/>
+          <p:nvPr/>
+        </p:nvSpPr>
+        <p:spPr>
+          <a:xfrm>
+            <a:off x="1752600" y="1181100"/>
+            <a:ext cx="123825" cy="123825"/>
+          </a:xfrm>
+          <a:prstGeom prst="roundRect">
+            <a:avLst>
+              <a:gd name="adj" fmla="val 8000"/>
+            </a:avLst>
+          </a:prstGeom>
+          <a:solidFill>
+            <a:srgbClr val="F59E0B"/>
+          </a:solidFill>
+          <a:ln>
+            <a:noFill/>
+          </a:ln>
+          <a:effectLst/>
+        </p:spPr>
+        <p:style>
+          <a:lnRef idx="1">
+            <a:schemeClr val="accent1"/>
+          </a:lnRef>
+          <a:fillRef idx="3">
+            <a:schemeClr val="accent1"/>
+          </a:fillRef>
+          <a:effectRef idx="2">
+            <a:schemeClr val="accent1"/>
+          </a:effectRef>
+          <a:fontRef idx="minor">
+            <a:schemeClr val="lt1"/>
+          </a:fontRef>
+        </p:style>
+        <p:txBody>
+          <a:bodyPr rtlCol="0" anchor="ctr"/>
+          <a:lstStyle/>
+          <a:p>
+            <a:pPr algn="ctr"/>
+          </a:p>
+        </p:txBody>
+      </p:sp>
+      <p:sp>
+        <p:nvSpPr>
+          <p:cNvPr id="9" name="Rounded Rectangle 8"/>
+          <p:cNvSpPr/>
+          <p:nvPr/>
+        </p:nvSpPr>
+        <p:spPr>
+          <a:xfrm>
+            <a:off x="2000250" y="1181100"/>
+            <a:ext cx="123825" cy="123825"/>
+          </a:xfrm>
+          <a:prstGeom prst="roundRect">
+            <a:avLst>
+              <a:gd name="adj" fmla="val 8000"/>
+            </a:avLst>
+          </a:prstGeom>
+          <a:solidFill>
+            <a:srgbClr val="34D399"/>
+          </a:solidFill>
+          <a:ln>
+            <a:noFill/>
+          </a:ln>
+          <a:effectLst/>
+        </p:spPr>
+        <p:style>
+          <a:lnRef idx="1">
+            <a:schemeClr val="accent1"/>
+          </a:lnRef>
+          <a:fillRef idx="3">
+            <a:schemeClr val="accent1"/>
+          </a:fillRef>
+          <a:effectRef idx="2">
+            <a:schemeClr val="accent1"/>
+          </a:effectRef>
+          <a:fontRef idx="minor">
+            <a:schemeClr val="lt1"/>
+          </a:fontRef>
+        </p:style>
+        <p:txBody>
+          <a:bodyPr rtlCol="0" anchor="ctr"/>
+          <a:lstStyle/>
+          <a:p>
+            <a:pPr algn="ctr"/>
+          </a:p>
+        </p:txBody>
+      </p:sp>
+      <p:sp>
+        <p:nvSpPr>
+          <p:cNvPr id="10" name="TextBox 9"/>
           <p:cNvSpPr txBox="1"/>
           <p:nvPr/>
         </p:nvSpPr>
         <p:spPr>
           <a:xfrm>
-            <a:off x="9334500" y="0"/>
-            <a:ext cx="2667000" cy="704850"/>
+            <a:off x="2381250" y="1047750"/>
+            <a:ext cx="8286750" cy="381000"/>
+          </a:xfrm>
+          <a:prstGeom prst="rect">
+            <a:avLst/>
+          </a:prstGeom>
+          <a:noFill/>
+        </p:spPr>
+        <p:txBody>
+          <a:bodyPr wrap="square" anchor="ctr">
+            <a:spAutoFit/>
+          </a:bodyPr>
+          <a:lstStyle/>
+          <a:p>
+            <a:pPr algn="l">
+              <a:lnSpc>
+                <a:spcPct val="100000"/>
+              </a:lnSpc>
+            </a:pPr>
+            <a:r>
+              <a:rPr sz="1100" b="0">
+                <a:solidFill>
+                  <a:srgbClr val="94A3B8"/>
+                </a:solidFill>
+                <a:latin typeface="PingFang SC"/>
+              </a:rPr>
+              <a:t>terminal — 平台实测</a:t>
+            </a:r>
+          </a:p>
+        </p:txBody>
+      </p:sp>
+      <p:sp>
+        <p:nvSpPr>
+          <p:cNvPr id="11" name="TextBox 10"/>
+          <p:cNvSpPr txBox="1"/>
+          <p:nvPr/>
+        </p:nvSpPr>
+        <p:spPr>
+          <a:xfrm>
+            <a:off x="1562100" y="1581150"/>
+            <a:ext cx="9067800" cy="2000250"/>
+          </a:xfrm>
+          <a:prstGeom prst="rect">
+            <a:avLst/>
+          </a:prstGeom>
+          <a:noFill/>
+        </p:spPr>
+        <p:txBody>
+          <a:bodyPr wrap="square">
+            <a:spAutoFit/>
+          </a:bodyPr>
+          <a:lstStyle/>
+          <a:p>
+            <a:pPr>
+              <a:lnSpc>
+                <a:spcPct val="115000"/>
+              </a:lnSpc>
+            </a:pPr>
+            <a:r>
+              <a:rPr sz="1300" b="1">
+                <a:solidFill>
+                  <a:srgbClr val="34D399"/>
+                </a:solidFill>
+                <a:latin typeface="Menlo"/>
+              </a:rPr>
+              <a:t>$ reg.discover("天气")</a:t>
+            </a:r>
+          </a:p>
+          <a:p>
+            <a:pPr>
+              <a:lnSpc>
+                <a:spcPct val="115000"/>
+              </a:lnSpc>
+            </a:pPr>
+            <a:r>
+              <a:rPr sz="1300">
+                <a:solidFill>
+                  <a:srgbClr val="CBD5E1"/>
+                </a:solidFill>
+                <a:latin typeface="Menlo"/>
+              </a:rPr>
+              <a:t>ToolSpec(name='get_weather', risk=READ)</a:t>
+            </a:r>
+          </a:p>
+          <a:p>
+            <a:pPr>
+              <a:lnSpc>
+                <a:spcPct val="115000"/>
+              </a:lnSpc>
+            </a:pPr>
+            <a:r>
+              <a:rPr sz="1300" b="1">
+                <a:solidFill>
+                  <a:srgbClr val="34D399"/>
+                </a:solidFill>
+                <a:latin typeface="Menlo"/>
+              </a:rPr>
+              <a:t>$ reg.discover("删除")</a:t>
+            </a:r>
+          </a:p>
+          <a:p>
+            <a:pPr>
+              <a:lnSpc>
+                <a:spcPct val="115000"/>
+              </a:lnSpc>
+            </a:pPr>
+            <a:r>
+              <a:rPr sz="1300">
+                <a:solidFill>
+                  <a:srgbClr val="CBD5E1"/>
+                </a:solidFill>
+                <a:latin typeface="Menlo"/>
+              </a:rPr>
+              <a:t>(空)  # 已 disable 的不出现</a:t>
+            </a:r>
+          </a:p>
+          <a:p>
+            <a:pPr>
+              <a:lnSpc>
+                <a:spcPct val="115000"/>
+              </a:lnSpc>
+            </a:pPr>
+            <a:r>
+              <a:rPr sz="1300">
+                <a:solidFill>
+                  <a:srgbClr val="94A3B8"/>
+                </a:solidFill>
+                <a:latin typeface="Menlo"/>
+              </a:rPr>
+              <a:t># 只返回 enabled:下线即刻生效</a:t>
+            </a:r>
+          </a:p>
+        </p:txBody>
+      </p:sp>
+      <p:sp>
+        <p:nvSpPr>
+          <p:cNvPr id="12" name="TextBox 11"/>
+          <p:cNvSpPr txBox="1"/>
+          <p:nvPr/>
+        </p:nvSpPr>
+        <p:spPr>
+          <a:xfrm>
+            <a:off x="10287000" y="6534150"/>
+            <a:ext cx="1619250" cy="266700"/>
           </a:xfrm>
           <a:prstGeom prst="rect">
             <a:avLst/>
@@ -34342,351 +34808,6 @@
               </a:lnSpc>
             </a:pPr>
             <a:r>
-              <a:rPr sz="1100" b="0">
-                <a:solidFill>
-                  <a:srgbClr val="94A3B8"/>
-                </a:solidFill>
-                <a:latin typeface="PingFang SC"/>
-              </a:rPr>
-              <a:t>tests 真实断言</a:t>
-            </a:r>
-          </a:p>
-        </p:txBody>
-      </p:sp>
-      <p:sp>
-        <p:nvSpPr>
-          <p:cNvPr id="6" name="Rounded Rectangle 5"/>
-          <p:cNvSpPr/>
-          <p:nvPr/>
-        </p:nvSpPr>
-        <p:spPr>
-          <a:xfrm>
-            <a:off x="1333500" y="952500"/>
-            <a:ext cx="9525000" cy="5048250"/>
-          </a:xfrm>
-          <a:prstGeom prst="roundRect">
-            <a:avLst>
-              <a:gd name="adj" fmla="val 8000"/>
-            </a:avLst>
-          </a:prstGeom>
-          <a:solidFill>
-            <a:srgbClr val="0D1117"/>
-          </a:solidFill>
-          <a:ln>
-            <a:noFill/>
-          </a:ln>
-          <a:effectLst/>
-        </p:spPr>
-        <p:style>
-          <a:lnRef idx="1">
-            <a:schemeClr val="accent1"/>
-          </a:lnRef>
-          <a:fillRef idx="3">
-            <a:schemeClr val="accent1"/>
-          </a:fillRef>
-          <a:effectRef idx="2">
-            <a:schemeClr val="accent1"/>
-          </a:effectRef>
-          <a:fontRef idx="minor">
-            <a:schemeClr val="lt1"/>
-          </a:fontRef>
-        </p:style>
-        <p:txBody>
-          <a:bodyPr rtlCol="0" anchor="ctr"/>
-          <a:lstStyle/>
-          <a:p>
-            <a:pPr algn="ctr"/>
-          </a:p>
-        </p:txBody>
-      </p:sp>
-      <p:sp>
-        <p:nvSpPr>
-          <p:cNvPr id="7" name="Rectangle 6"/>
-          <p:cNvSpPr/>
-          <p:nvPr/>
-        </p:nvSpPr>
-        <p:spPr>
-          <a:xfrm>
-            <a:off x="1333500" y="952500"/>
-            <a:ext cx="9525000" cy="381000"/>
-          </a:xfrm>
-          <a:prstGeom prst="rect">
-            <a:avLst/>
-          </a:prstGeom>
-          <a:solidFill>
-            <a:srgbClr val="1F2937"/>
-          </a:solidFill>
-          <a:ln>
-            <a:noFill/>
-          </a:ln>
-          <a:effectLst/>
-        </p:spPr>
-        <p:style>
-          <a:lnRef idx="1">
-            <a:schemeClr val="accent1"/>
-          </a:lnRef>
-          <a:fillRef idx="3">
-            <a:schemeClr val="accent1"/>
-          </a:fillRef>
-          <a:effectRef idx="2">
-            <a:schemeClr val="accent1"/>
-          </a:effectRef>
-          <a:fontRef idx="minor">
-            <a:schemeClr val="lt1"/>
-          </a:fontRef>
-        </p:style>
-        <p:txBody>
-          <a:bodyPr rtlCol="0" anchor="ctr"/>
-          <a:lstStyle/>
-          <a:p>
-            <a:pPr algn="ctr"/>
-          </a:p>
-        </p:txBody>
-      </p:sp>
-      <p:sp>
-        <p:nvSpPr>
-          <p:cNvPr id="8" name="Rounded Rectangle 7"/>
-          <p:cNvSpPr/>
-          <p:nvPr/>
-        </p:nvSpPr>
-        <p:spPr>
-          <a:xfrm>
-            <a:off x="1504950" y="1085850"/>
-            <a:ext cx="123825" cy="123825"/>
-          </a:xfrm>
-          <a:prstGeom prst="roundRect">
-            <a:avLst>
-              <a:gd name="adj" fmla="val 8000"/>
-            </a:avLst>
-          </a:prstGeom>
-          <a:solidFill>
-            <a:srgbClr val="F87171"/>
-          </a:solidFill>
-          <a:ln>
-            <a:noFill/>
-          </a:ln>
-          <a:effectLst/>
-        </p:spPr>
-        <p:style>
-          <a:lnRef idx="1">
-            <a:schemeClr val="accent1"/>
-          </a:lnRef>
-          <a:fillRef idx="3">
-            <a:schemeClr val="accent1"/>
-          </a:fillRef>
-          <a:effectRef idx="2">
-            <a:schemeClr val="accent1"/>
-          </a:effectRef>
-          <a:fontRef idx="minor">
-            <a:schemeClr val="lt1"/>
-          </a:fontRef>
-        </p:style>
-        <p:txBody>
-          <a:bodyPr rtlCol="0" anchor="ctr"/>
-          <a:lstStyle/>
-          <a:p>
-            <a:pPr algn="ctr"/>
-          </a:p>
-        </p:txBody>
-      </p:sp>
-      <p:sp>
-        <p:nvSpPr>
-          <p:cNvPr id="9" name="Rounded Rectangle 8"/>
-          <p:cNvSpPr/>
-          <p:nvPr/>
-        </p:nvSpPr>
-        <p:spPr>
-          <a:xfrm>
-            <a:off x="1752600" y="1085850"/>
-            <a:ext cx="123825" cy="123825"/>
-          </a:xfrm>
-          <a:prstGeom prst="roundRect">
-            <a:avLst>
-              <a:gd name="adj" fmla="val 8000"/>
-            </a:avLst>
-          </a:prstGeom>
-          <a:solidFill>
-            <a:srgbClr val="F59E0B"/>
-          </a:solidFill>
-          <a:ln>
-            <a:noFill/>
-          </a:ln>
-          <a:effectLst/>
-        </p:spPr>
-        <p:style>
-          <a:lnRef idx="1">
-            <a:schemeClr val="accent1"/>
-          </a:lnRef>
-          <a:fillRef idx="3">
-            <a:schemeClr val="accent1"/>
-          </a:fillRef>
-          <a:effectRef idx="2">
-            <a:schemeClr val="accent1"/>
-          </a:effectRef>
-          <a:fontRef idx="minor">
-            <a:schemeClr val="lt1"/>
-          </a:fontRef>
-        </p:style>
-        <p:txBody>
-          <a:bodyPr rtlCol="0" anchor="ctr"/>
-          <a:lstStyle/>
-          <a:p>
-            <a:pPr algn="ctr"/>
-          </a:p>
-        </p:txBody>
-      </p:sp>
-      <p:sp>
-        <p:nvSpPr>
-          <p:cNvPr id="10" name="Rounded Rectangle 9"/>
-          <p:cNvSpPr/>
-          <p:nvPr/>
-        </p:nvSpPr>
-        <p:spPr>
-          <a:xfrm>
-            <a:off x="2000250" y="1085850"/>
-            <a:ext cx="123825" cy="123825"/>
-          </a:xfrm>
-          <a:prstGeom prst="roundRect">
-            <a:avLst>
-              <a:gd name="adj" fmla="val 8000"/>
-            </a:avLst>
-          </a:prstGeom>
-          <a:solidFill>
-            <a:srgbClr val="34D399"/>
-          </a:solidFill>
-          <a:ln>
-            <a:noFill/>
-          </a:ln>
-          <a:effectLst/>
-        </p:spPr>
-        <p:style>
-          <a:lnRef idx="1">
-            <a:schemeClr val="accent1"/>
-          </a:lnRef>
-          <a:fillRef idx="3">
-            <a:schemeClr val="accent1"/>
-          </a:fillRef>
-          <a:effectRef idx="2">
-            <a:schemeClr val="accent1"/>
-          </a:effectRef>
-          <a:fontRef idx="minor">
-            <a:schemeClr val="lt1"/>
-          </a:fontRef>
-        </p:style>
-        <p:txBody>
-          <a:bodyPr rtlCol="0" anchor="ctr"/>
-          <a:lstStyle/>
-          <a:p>
-            <a:pPr algn="ctr"/>
-          </a:p>
-        </p:txBody>
-      </p:sp>
-      <p:sp>
-        <p:nvSpPr>
-          <p:cNvPr id="11" name="TextBox 10"/>
-          <p:cNvSpPr txBox="1"/>
-          <p:nvPr/>
-        </p:nvSpPr>
-        <p:spPr>
-          <a:xfrm>
-            <a:off x="2381250" y="952500"/>
-            <a:ext cx="8286750" cy="381000"/>
-          </a:xfrm>
-          <a:prstGeom prst="rect">
-            <a:avLst/>
-          </a:prstGeom>
-          <a:noFill/>
-        </p:spPr>
-        <p:txBody>
-          <a:bodyPr wrap="square" anchor="ctr">
-            <a:spAutoFit/>
-          </a:bodyPr>
-          <a:lstStyle/>
-          <a:p>
-            <a:pPr algn="l">
-              <a:lnSpc>
-                <a:spcPct val="100000"/>
-              </a:lnSpc>
-            </a:pPr>
-            <a:r>
-              <a:rPr sz="1100" b="0">
-                <a:solidFill>
-                  <a:srgbClr val="94A3B8"/>
-                </a:solidFill>
-                <a:latin typeface="PingFang SC"/>
-              </a:rPr>
-              <a:t>terminal — 平台实测</a:t>
-            </a:r>
-          </a:p>
-        </p:txBody>
-      </p:sp>
-      <p:sp>
-        <p:nvSpPr>
-          <p:cNvPr id="12" name="TextBox 11"/>
-          <p:cNvSpPr txBox="1"/>
-          <p:nvPr/>
-        </p:nvSpPr>
-        <p:spPr>
-          <a:xfrm>
-            <a:off x="1562100" y="1485900"/>
-            <a:ext cx="9067800" cy="4381500"/>
-          </a:xfrm>
-          <a:prstGeom prst="rect">
-            <a:avLst/>
-          </a:prstGeom>
-          <a:noFill/>
-        </p:spPr>
-        <p:txBody>
-          <a:bodyPr wrap="square">
-            <a:spAutoFit/>
-          </a:bodyPr>
-          <a:lstStyle/>
-          <a:p>
-            <a:pPr>
-              <a:lnSpc>
-                <a:spcPct val="115000"/>
-              </a:lnSpc>
-            </a:pPr>
-            <a:r>
-              <a:rPr sz="1300">
-                <a:solidFill>
-                  <a:srgbClr val="CBD5E1"/>
-                </a:solidFill>
-                <a:latin typeface="Menlo"/>
-              </a:rPr>
-              <a:t>tests 真实断言</a:t>
-            </a:r>
-          </a:p>
-        </p:txBody>
-      </p:sp>
-      <p:sp>
-        <p:nvSpPr>
-          <p:cNvPr id="13" name="TextBox 12"/>
-          <p:cNvSpPr txBox="1"/>
-          <p:nvPr/>
-        </p:nvSpPr>
-        <p:spPr>
-          <a:xfrm>
-            <a:off x="10287000" y="6534150"/>
-            <a:ext cx="1619250" cy="266700"/>
-          </a:xfrm>
-          <a:prstGeom prst="rect">
-            <a:avLst/>
-          </a:prstGeom>
-          <a:noFill/>
-        </p:spPr>
-        <p:txBody>
-          <a:bodyPr wrap="square" anchor="ctr">
-            <a:spAutoFit/>
-          </a:bodyPr>
-          <a:lstStyle/>
-          <a:p>
-            <a:pPr algn="r">
-              <a:lnSpc>
-                <a:spcPct val="100000"/>
-              </a:lnSpc>
-            </a:pPr>
-            <a:r>
               <a:rPr sz="900" b="0">
                 <a:solidFill>
                   <a:srgbClr val="94A3B8"/>
@@ -34700,7 +34821,7 @@
       </p:sp>
       <p:sp>
         <p:nvSpPr>
-          <p:cNvPr id="14" name="TextBox 13"/>
+          <p:cNvPr id="13" name="TextBox 12"/>
           <p:cNvSpPr txBox="1"/>
           <p:nvPr/>
         </p:nvSpPr>

--- a/03-课件PPT/讲次版/第2章-2-讲次 2-2 · Tool Registry 设计.pptx
+++ b/03-课件PPT/讲次版/第2章-2-讲次 2-2 · Tool Registry 设计.pptx
@@ -8717,7 +8717,7 @@
           <a:noFill/>
         </p:spPr>
         <p:txBody>
-          <a:bodyPr wrap="none" anchor="ctr">
+          <a:bodyPr wrap="square" anchor="ctr">
             <a:spAutoFit/>
           </a:bodyPr>
           <a:lstStyle/>
@@ -8728,7 +8728,7 @@
               </a:lnSpc>
             </a:pPr>
             <a:r>
-              <a:rPr sz="1100" b="1">
+              <a:rPr sz="1300" b="1">
                 <a:solidFill>
                   <a:srgbClr val="0B1D3A"/>
                 </a:solidFill>
@@ -8848,7 +8848,7 @@
           <a:noFill/>
         </p:spPr>
         <p:txBody>
-          <a:bodyPr wrap="none" anchor="ctr">
+          <a:bodyPr wrap="square" anchor="ctr">
             <a:spAutoFit/>
           </a:bodyPr>
           <a:lstStyle/>
@@ -8979,7 +8979,7 @@
           <a:noFill/>
         </p:spPr>
         <p:txBody>
-          <a:bodyPr wrap="none" anchor="ctr">
+          <a:bodyPr wrap="square" anchor="ctr">
             <a:spAutoFit/>
           </a:bodyPr>
           <a:lstStyle/>
@@ -9110,7 +9110,7 @@
           <a:noFill/>
         </p:spPr>
         <p:txBody>
-          <a:bodyPr wrap="none" anchor="ctr">
+          <a:bodyPr wrap="square" anchor="ctr">
             <a:spAutoFit/>
           </a:bodyPr>
           <a:lstStyle/>
@@ -9492,7 +9492,7 @@
           <a:noFill/>
         </p:spPr>
         <p:txBody>
-          <a:bodyPr wrap="none" anchor="ctr">
+          <a:bodyPr wrap="square" anchor="ctr">
             <a:spAutoFit/>
           </a:bodyPr>
           <a:lstStyle/>
@@ -9623,7 +9623,7 @@
           <a:noFill/>
         </p:spPr>
         <p:txBody>
-          <a:bodyPr wrap="none" anchor="ctr">
+          <a:bodyPr wrap="square" anchor="ctr">
             <a:spAutoFit/>
           </a:bodyPr>
           <a:lstStyle/>
@@ -9754,7 +9754,7 @@
           <a:noFill/>
         </p:spPr>
         <p:txBody>
-          <a:bodyPr wrap="none" anchor="ctr">
+          <a:bodyPr wrap="square" anchor="ctr">
             <a:spAutoFit/>
           </a:bodyPr>
           <a:lstStyle/>
@@ -9885,7 +9885,7 @@
           <a:noFill/>
         </p:spPr>
         <p:txBody>
-          <a:bodyPr wrap="none" anchor="ctr">
+          <a:bodyPr wrap="square" anchor="ctr">
             <a:spAutoFit/>
           </a:bodyPr>
           <a:lstStyle/>
@@ -10267,7 +10267,7 @@
           <a:noFill/>
         </p:spPr>
         <p:txBody>
-          <a:bodyPr wrap="none" anchor="ctr">
+          <a:bodyPr wrap="square" anchor="ctr">
             <a:spAutoFit/>
           </a:bodyPr>
           <a:lstStyle/>
@@ -10398,7 +10398,7 @@
           <a:noFill/>
         </p:spPr>
         <p:txBody>
-          <a:bodyPr wrap="none" anchor="ctr">
+          <a:bodyPr wrap="square" anchor="ctr">
             <a:spAutoFit/>
           </a:bodyPr>
           <a:lstStyle/>
@@ -10529,7 +10529,7 @@
           <a:noFill/>
         </p:spPr>
         <p:txBody>
-          <a:bodyPr wrap="none" anchor="ctr">
+          <a:bodyPr wrap="square" anchor="ctr">
             <a:spAutoFit/>
           </a:bodyPr>
           <a:lstStyle/>
